--- a/slides/proposal.pptx
+++ b/slides/proposal.pptx
@@ -6,17 +6,18 @@
   </p:sldMasterIdLst>
   <p:sldIdLst>
     <p:sldId id="256" r:id="rId7"/>
-    <p:sldId id="257" r:id="rId8"/>
-    <p:sldId id="258" r:id="rId9"/>
-    <p:sldId id="259" r:id="rId10"/>
-    <p:sldId id="260" r:id="rId11"/>
-    <p:sldId id="261" r:id="rId12"/>
-    <p:sldId id="262" r:id="rId13"/>
-    <p:sldId id="263" r:id="rId14"/>
-    <p:sldId id="264" r:id="rId15"/>
-    <p:sldId id="265" r:id="rId16"/>
-    <p:sldId id="266" r:id="rId17"/>
-    <p:sldId id="267" r:id="rId18"/>
+    <p:sldId id="257" r:id="rId9"/>
+    <p:sldId id="258" r:id="rId10"/>
+    <p:sldId id="259" r:id="rId11"/>
+    <p:sldId id="260" r:id="rId12"/>
+    <p:sldId id="261" r:id="rId13"/>
+    <p:sldId id="262" r:id="rId14"/>
+    <p:sldId id="263" r:id="rId15"/>
+    <p:sldId id="264" r:id="rId16"/>
+    <p:sldId id="265" r:id="rId17"/>
+    <p:sldId id="266" r:id="rId18"/>
+    <p:sldId id="267" r:id="rId19"/>
+    <p:sldId id="268" r:id="rId20"/>
   </p:sldIdLst>
   <p:sldSz cx="12191695" cy="6858000" type="screen4x3"/>
   <p:notesSz cx="6858000" cy="9144000"/>
@@ -116,6 +117,2336 @@
     </a:lvl9pPr>
   </p:defaultTextStyle>
 </p:presentation>
+</file>
+
+<file path=ppt/notesMasters/notesMaster1.xml><?xml version="1.0" encoding="utf-8"?>
+<p:notesMaster xmlns:a="http://schemas.openxmlformats.org/drawingml/2006/main" xmlns:p="http://schemas.openxmlformats.org/presentationml/2006/main" xmlns:r="http://schemas.openxmlformats.org/officeDocument/2006/relationships">
+  <p:cSld>
+    <p:bg>
+      <p:bgRef idx="1001">
+        <a:schemeClr val="bg1"/>
+      </p:bgRef>
+    </p:bg>
+    <p:spTree>
+      <p:nvGrpSpPr>
+        <p:cNvPr id="1" name=""/>
+        <p:cNvGrpSpPr/>
+        <p:nvPr/>
+      </p:nvGrpSpPr>
+      <p:grpSpPr>
+        <a:xfrm>
+          <a:off x="0" y="0"/>
+          <a:ext cx="0" cy="0"/>
+          <a:chOff x="0" y="0"/>
+          <a:chExt cx="0" cy="0"/>
+        </a:xfrm>
+      </p:grpSpPr>
+      <p:sp>
+        <p:nvSpPr>
+          <p:cNvPr id="2" name="Header Placeholder 1"/>
+          <p:cNvSpPr>
+            <a:spLocks noGrp="1"/>
+          </p:cNvSpPr>
+          <p:nvPr>
+            <p:ph type="hdr" sz="quarter"/>
+          </p:nvPr>
+        </p:nvSpPr>
+        <p:spPr>
+          <a:xfrm>
+            <a:off x="0" y="0"/>
+            <a:ext cx="2971800" cy="457200"/>
+          </a:xfrm>
+          <a:prstGeom prst="rect">
+            <a:avLst/>
+          </a:prstGeom>
+        </p:spPr>
+        <p:txBody>
+          <a:bodyPr vert="horz" lIns="91440" tIns="45720" rIns="91440" bIns="45720" rtlCol="0"/>
+          <a:lstStyle>
+            <a:lvl1pPr algn="l">
+              <a:defRPr sz="1200"/>
+            </a:lvl1pPr>
+          </a:lstStyle>
+          <a:p>
+            <a:endParaRPr lang="en-US"/>
+          </a:p>
+        </p:txBody>
+      </p:sp>
+      <p:sp>
+        <p:nvSpPr>
+          <p:cNvPr id="3" name="Date Placeholder 2"/>
+          <p:cNvSpPr>
+            <a:spLocks noGrp="1"/>
+          </p:cNvSpPr>
+          <p:nvPr>
+            <p:ph type="dt" idx="1"/>
+          </p:nvPr>
+        </p:nvSpPr>
+        <p:spPr>
+          <a:xfrm>
+            <a:off x="3884613" y="0"/>
+            <a:ext cx="2971800" cy="457200"/>
+          </a:xfrm>
+          <a:prstGeom prst="rect">
+            <a:avLst/>
+          </a:prstGeom>
+        </p:spPr>
+        <p:txBody>
+          <a:bodyPr vert="horz" lIns="91440" tIns="45720" rIns="91440" bIns="45720" rtlCol="0"/>
+          <a:lstStyle>
+            <a:lvl1pPr algn="r">
+              <a:defRPr sz="1200"/>
+            </a:lvl1pPr>
+          </a:lstStyle>
+          <a:p>
+            <a:fld id="{0F89C1C7-3DCD-1040-A9CF-14679D8B5DDD}" type="datetimeFigureOut">
+              <a:rPr lang="en-US" smtClean="0"/>
+              <a:t>10/17/16</a:t>
+            </a:fld>
+            <a:endParaRPr lang="en-US"/>
+          </a:p>
+        </p:txBody>
+      </p:sp>
+      <p:sp>
+        <p:nvSpPr>
+          <p:cNvPr id="4" name="Slide Image Placeholder 3"/>
+          <p:cNvSpPr>
+            <a:spLocks noGrp="1" noRot="1" noChangeAspect="1"/>
+          </p:cNvSpPr>
+          <p:nvPr>
+            <p:ph type="sldImg" idx="2"/>
+          </p:nvPr>
+        </p:nvSpPr>
+        <p:spPr>
+          <a:xfrm>
+            <a:off x="1143000" y="685800"/>
+            <a:ext cx="4572000" cy="3429000"/>
+          </a:xfrm>
+          <a:prstGeom prst="rect">
+            <a:avLst/>
+          </a:prstGeom>
+          <a:noFill/>
+          <a:ln w="12700">
+            <a:solidFill>
+              <a:prstClr val="black"/>
+            </a:solidFill>
+          </a:ln>
+        </p:spPr>
+        <p:txBody>
+          <a:bodyPr vert="horz" lIns="91440" tIns="45720" rIns="91440" bIns="45720" rtlCol="0" anchor="ctr"/>
+          <a:lstStyle/>
+          <a:p>
+            <a:endParaRPr lang="en-US"/>
+          </a:p>
+        </p:txBody>
+      </p:sp>
+      <p:sp>
+        <p:nvSpPr>
+          <p:cNvPr id="5" name="Notes Placeholder 4"/>
+          <p:cNvSpPr>
+            <a:spLocks noGrp="1"/>
+          </p:cNvSpPr>
+          <p:nvPr>
+            <p:ph type="body" sz="quarter" idx="3"/>
+          </p:nvPr>
+        </p:nvSpPr>
+        <p:spPr>
+          <a:xfrm>
+            <a:off x="685800" y="4343400"/>
+            <a:ext cx="5486400" cy="4114800"/>
+          </a:xfrm>
+          <a:prstGeom prst="rect">
+            <a:avLst/>
+          </a:prstGeom>
+        </p:spPr>
+        <p:txBody>
+          <a:bodyPr vert="horz" lIns="91440" tIns="45720" rIns="91440" bIns="45720" rtlCol="0"/>
+          <a:lstStyle/>
+          <a:p>
+            <a:pPr lvl="0"/>
+            <a:r>
+              <a:rPr lang="en-US" smtClean="0"/>
+              <a:t>Click to edit Master text styles</a:t>
+            </a:r>
+          </a:p>
+          <a:p>
+            <a:pPr lvl="1"/>
+            <a:r>
+              <a:rPr lang="en-US" smtClean="0"/>
+              <a:t>Second level</a:t>
+            </a:r>
+          </a:p>
+          <a:p>
+            <a:pPr lvl="2"/>
+            <a:r>
+              <a:rPr lang="en-US" smtClean="0"/>
+              <a:t>Third level</a:t>
+            </a:r>
+          </a:p>
+          <a:p>
+            <a:pPr lvl="3"/>
+            <a:r>
+              <a:rPr lang="en-US" smtClean="0"/>
+              <a:t>Fourth level</a:t>
+            </a:r>
+          </a:p>
+          <a:p>
+            <a:pPr lvl="4"/>
+            <a:r>
+              <a:rPr lang="en-US" smtClean="0"/>
+              <a:t>Fifth level</a:t>
+            </a:r>
+            <a:endParaRPr lang="en-US"/>
+          </a:p>
+        </p:txBody>
+      </p:sp>
+      <p:sp>
+        <p:nvSpPr>
+          <p:cNvPr id="6" name="Footer Placeholder 5"/>
+          <p:cNvSpPr>
+            <a:spLocks noGrp="1"/>
+          </p:cNvSpPr>
+          <p:nvPr>
+            <p:ph type="ftr" sz="quarter" idx="4"/>
+          </p:nvPr>
+        </p:nvSpPr>
+        <p:spPr>
+          <a:xfrm>
+            <a:off x="0" y="8685213"/>
+            <a:ext cx="2971800" cy="457200"/>
+          </a:xfrm>
+          <a:prstGeom prst="rect">
+            <a:avLst/>
+          </a:prstGeom>
+        </p:spPr>
+        <p:txBody>
+          <a:bodyPr vert="horz" lIns="91440" tIns="45720" rIns="91440" bIns="45720" rtlCol="0" anchor="b"/>
+          <a:lstStyle>
+            <a:lvl1pPr algn="l">
+              <a:defRPr sz="1200"/>
+            </a:lvl1pPr>
+          </a:lstStyle>
+          <a:p>
+            <a:endParaRPr lang="en-US"/>
+          </a:p>
+        </p:txBody>
+      </p:sp>
+      <p:sp>
+        <p:nvSpPr>
+          <p:cNvPr id="7" name="Slide Number Placeholder 6"/>
+          <p:cNvSpPr>
+            <a:spLocks noGrp="1"/>
+          </p:cNvSpPr>
+          <p:nvPr>
+            <p:ph type="sldNum" sz="quarter" idx="5"/>
+          </p:nvPr>
+        </p:nvSpPr>
+        <p:spPr>
+          <a:xfrm>
+            <a:off x="3884613" y="8685213"/>
+            <a:ext cx="2971800" cy="457200"/>
+          </a:xfrm>
+          <a:prstGeom prst="rect">
+            <a:avLst/>
+          </a:prstGeom>
+        </p:spPr>
+        <p:txBody>
+          <a:bodyPr vert="horz" lIns="91440" tIns="45720" rIns="91440" bIns="45720" rtlCol="0" anchor="b"/>
+          <a:lstStyle>
+            <a:lvl1pPr algn="r">
+              <a:defRPr sz="1200"/>
+            </a:lvl1pPr>
+          </a:lstStyle>
+          <a:p>
+            <a:fld id="{BB5E49A5-4136-284D-997B-48E1D791AD67}" type="slidenum">
+              <a:rPr lang="en-US" smtClean="0"/>
+              <a:t>‹#›</a:t>
+            </a:fld>
+            <a:endParaRPr lang="en-US"/>
+          </a:p>
+        </p:txBody>
+      </p:sp>
+    </p:spTree>
+    <p:extLst>
+      <p:ext uri="{BB962C8B-B14F-4D97-AF65-F5344CB8AC3E}">
+        <p14:creationId xmlns:p14="http://schemas.microsoft.com/office/powerpoint/2010/main" val="2623252185"/>
+      </p:ext>
+    </p:extLst>
+  </p:cSld>
+  <p:clrMap bg1="lt1" tx1="dk1" bg2="lt2" tx2="dk2" accent1="accent1" accent2="accent2" accent3="accent3" accent4="accent4" accent5="accent5" accent6="accent6" hlink="hlink" folHlink="folHlink"/>
+  <p:notesStyle>
+    <a:lvl1pPr marL="0" algn="l" defTabSz="457200" rtl="0" eaLnBrk="1" latinLnBrk="0" hangingPunct="1">
+      <a:defRPr sz="1200" kern="1200">
+        <a:solidFill>
+          <a:schemeClr val="tx1"/>
+        </a:solidFill>
+        <a:latin typeface="+mn-lt"/>
+        <a:ea typeface="+mn-ea"/>
+        <a:cs typeface="+mn-cs"/>
+      </a:defRPr>
+    </a:lvl1pPr>
+    <a:lvl2pPr marL="457200" algn="l" defTabSz="457200" rtl="0" eaLnBrk="1" latinLnBrk="0" hangingPunct="1">
+      <a:defRPr sz="1200" kern="1200">
+        <a:solidFill>
+          <a:schemeClr val="tx1"/>
+        </a:solidFill>
+        <a:latin typeface="+mn-lt"/>
+        <a:ea typeface="+mn-ea"/>
+        <a:cs typeface="+mn-cs"/>
+      </a:defRPr>
+    </a:lvl2pPr>
+    <a:lvl3pPr marL="914400" algn="l" defTabSz="457200" rtl="0" eaLnBrk="1" latinLnBrk="0" hangingPunct="1">
+      <a:defRPr sz="1200" kern="1200">
+        <a:solidFill>
+          <a:schemeClr val="tx1"/>
+        </a:solidFill>
+        <a:latin typeface="+mn-lt"/>
+        <a:ea typeface="+mn-ea"/>
+        <a:cs typeface="+mn-cs"/>
+      </a:defRPr>
+    </a:lvl3pPr>
+    <a:lvl4pPr marL="1371600" algn="l" defTabSz="457200" rtl="0" eaLnBrk="1" latinLnBrk="0" hangingPunct="1">
+      <a:defRPr sz="1200" kern="1200">
+        <a:solidFill>
+          <a:schemeClr val="tx1"/>
+        </a:solidFill>
+        <a:latin typeface="+mn-lt"/>
+        <a:ea typeface="+mn-ea"/>
+        <a:cs typeface="+mn-cs"/>
+      </a:defRPr>
+    </a:lvl4pPr>
+    <a:lvl5pPr marL="1828800" algn="l" defTabSz="457200" rtl="0" eaLnBrk="1" latinLnBrk="0" hangingPunct="1">
+      <a:defRPr sz="1200" kern="1200">
+        <a:solidFill>
+          <a:schemeClr val="tx1"/>
+        </a:solidFill>
+        <a:latin typeface="+mn-lt"/>
+        <a:ea typeface="+mn-ea"/>
+        <a:cs typeface="+mn-cs"/>
+      </a:defRPr>
+    </a:lvl5pPr>
+    <a:lvl6pPr marL="2286000" algn="l" defTabSz="457200" rtl="0" eaLnBrk="1" latinLnBrk="0" hangingPunct="1">
+      <a:defRPr sz="1200" kern="1200">
+        <a:solidFill>
+          <a:schemeClr val="tx1"/>
+        </a:solidFill>
+        <a:latin typeface="+mn-lt"/>
+        <a:ea typeface="+mn-ea"/>
+        <a:cs typeface="+mn-cs"/>
+      </a:defRPr>
+    </a:lvl6pPr>
+    <a:lvl7pPr marL="2743200" algn="l" defTabSz="457200" rtl="0" eaLnBrk="1" latinLnBrk="0" hangingPunct="1">
+      <a:defRPr sz="1200" kern="1200">
+        <a:solidFill>
+          <a:schemeClr val="tx1"/>
+        </a:solidFill>
+        <a:latin typeface="+mn-lt"/>
+        <a:ea typeface="+mn-ea"/>
+        <a:cs typeface="+mn-cs"/>
+      </a:defRPr>
+    </a:lvl7pPr>
+    <a:lvl8pPr marL="3200400" algn="l" defTabSz="457200" rtl="0" eaLnBrk="1" latinLnBrk="0" hangingPunct="1">
+      <a:defRPr sz="1200" kern="1200">
+        <a:solidFill>
+          <a:schemeClr val="tx1"/>
+        </a:solidFill>
+        <a:latin typeface="+mn-lt"/>
+        <a:ea typeface="+mn-ea"/>
+        <a:cs typeface="+mn-cs"/>
+      </a:defRPr>
+    </a:lvl8pPr>
+    <a:lvl9pPr marL="3657600" algn="l" defTabSz="457200" rtl="0" eaLnBrk="1" latinLnBrk="0" hangingPunct="1">
+      <a:defRPr sz="1200" kern="1200">
+        <a:solidFill>
+          <a:schemeClr val="tx1"/>
+        </a:solidFill>
+        <a:latin typeface="+mn-lt"/>
+        <a:ea typeface="+mn-ea"/>
+        <a:cs typeface="+mn-cs"/>
+      </a:defRPr>
+    </a:lvl9pPr>
+  </p:notesStyle>
+</p:notesMaster>
+</file>
+
+<file path=ppt/notesSlides/notesSlide1.xml><?xml version="1.0" encoding="utf-8"?>
+<p:notes xmlns:a="http://schemas.openxmlformats.org/drawingml/2006/main" xmlns:p="http://schemas.openxmlformats.org/presentationml/2006/main" xmlns:r="http://schemas.openxmlformats.org/officeDocument/2006/relationships">
+  <p:cSld>
+    <p:spTree>
+      <p:nvGrpSpPr>
+        <p:cNvPr id="1" name=""/>
+        <p:cNvGrpSpPr/>
+        <p:nvPr/>
+      </p:nvGrpSpPr>
+      <p:grpSpPr>
+        <a:xfrm>
+          <a:off x="0" y="0"/>
+          <a:ext cx="0" cy="0"/>
+          <a:chOff x="0" y="0"/>
+          <a:chExt cx="0" cy="0"/>
+        </a:xfrm>
+      </p:grpSpPr>
+      <p:sp>
+        <p:nvSpPr>
+          <p:cNvPr id="2" name="Slide Image Placeholder 1"/>
+          <p:cNvSpPr>
+            <a:spLocks noGrp="1"/>
+          </p:cNvSpPr>
+          <p:nvPr>
+            <p:ph type="sldImg" idx="2"/>
+          </p:nvPr>
+        </p:nvSpPr>
+        <p:spPr/>
+      </p:sp>
+      <p:sp>
+        <p:nvSpPr>
+          <p:cNvPr id="3" name="Notes Placeholder 2"/>
+          <p:cNvSpPr>
+            <a:spLocks noGrp="1"/>
+          </p:cNvSpPr>
+          <p:nvPr>
+            <p:ph type="body" idx="3" sz="quarter"/>
+          </p:nvPr>
+        </p:nvSpPr>
+        <p:spPr/>
+        <p:txBody>
+          <a:bodyPr/>
+          <a:lstStyle/>
+          <a:p>
+            <a:r>
+              <a:rPr sz="1200"/>
+              <a:t>Open with the framing. Do not read the slide.</a:t>
+            </a:r>
+          </a:p>
+          <a:p/>
+          <a:p>
+            <a:r>
+              <a:rPr sz="1200"/>
+              <a:t>"Voice cloning is now good enough that a stranger can phone you in your daughter's voice. The</a:t>
+            </a:r>
+          </a:p>
+          <a:p>
+            <a:r>
+              <a:rPr sz="1200"/>
+              <a:t>detection research looks solved on paper. It is not. A published detector scores 1.23% error on</a:t>
+            </a:r>
+          </a:p>
+          <a:p>
+            <a:r>
+              <a:rPr sz="1200"/>
+              <a:t>its own benchmark and 37% on a different dataset, same model, same weights. We are building one</a:t>
+            </a:r>
+          </a:p>
+          <a:p>
+            <a:r>
+              <a:rPr sz="1200"/>
+              <a:t>that closes that gap, and we will prove it with cross-corpus evaluation rather than a single</a:t>
+            </a:r>
+          </a:p>
+          <a:p>
+            <a:r>
+              <a:rPr sz="1200"/>
+              <a:t>headline number."</a:t>
+            </a:r>
+          </a:p>
+          <a:p/>
+          <a:p>
+            <a:r>
+              <a:rPr sz="1200"/>
+              <a:t>Deployment: an app on the callee's phone, listening during the call.</a:t>
+            </a:r>
+          </a:p>
+          <a:p>
+            <a:r>
+              <a:rPr sz="1200"/>
+              <a:t>Corpora: ASVspoof 2019 LA to train, 2021 LA for the channel, In-the-Wild for the corpus shift.</a:t>
+            </a:r>
+          </a:p>
+        </p:txBody>
+      </p:sp>
+      <p:sp>
+        <p:nvSpPr>
+          <p:cNvPr id="4" name="Slide Number Placeholder 3"/>
+          <p:cNvSpPr>
+            <a:spLocks noGrp="1"/>
+          </p:cNvSpPr>
+          <p:nvPr>
+            <p:ph type="sldNum" idx="5" sz="quarter"/>
+          </p:nvPr>
+        </p:nvSpPr>
+        <p:spPr/>
+      </p:sp>
+    </p:spTree>
+  </p:cSld>
+  <p:clrMapOvr>
+    <a:masterClrMapping/>
+  </p:clrMapOvr>
+</p:notes>
+</file>
+
+<file path=ppt/notesSlides/notesSlide10.xml><?xml version="1.0" encoding="utf-8"?>
+<p:notes xmlns:a="http://schemas.openxmlformats.org/drawingml/2006/main" xmlns:p="http://schemas.openxmlformats.org/presentationml/2006/main" xmlns:r="http://schemas.openxmlformats.org/officeDocument/2006/relationships">
+  <p:cSld>
+    <p:spTree>
+      <p:nvGrpSpPr>
+        <p:cNvPr id="1" name=""/>
+        <p:cNvGrpSpPr/>
+        <p:nvPr/>
+      </p:nvGrpSpPr>
+      <p:grpSpPr>
+        <a:xfrm>
+          <a:off x="0" y="0"/>
+          <a:ext cx="0" cy="0"/>
+          <a:chOff x="0" y="0"/>
+          <a:chExt cx="0" cy="0"/>
+        </a:xfrm>
+      </p:grpSpPr>
+      <p:sp>
+        <p:nvSpPr>
+          <p:cNvPr id="2" name="Slide Image Placeholder 1"/>
+          <p:cNvSpPr>
+            <a:spLocks noGrp="1"/>
+          </p:cNvSpPr>
+          <p:nvPr>
+            <p:ph type="sldImg" idx="2"/>
+          </p:nvPr>
+        </p:nvSpPr>
+        <p:spPr/>
+      </p:sp>
+      <p:sp>
+        <p:nvSpPr>
+          <p:cNvPr id="3" name="Notes Placeholder 2"/>
+          <p:cNvSpPr>
+            <a:spLocks noGrp="1"/>
+          </p:cNvSpPr>
+          <p:nvPr>
+            <p:ph type="body" idx="3" sz="quarter"/>
+          </p:nvPr>
+        </p:nvSpPr>
+        <p:spPr/>
+        <p:txBody>
+          <a:bodyPr/>
+          <a:lstStyle/>
+          <a:p>
+            <a:r>
+              <a:rPr sz="1200"/>
+              <a:t>The trap first, and do the arithmetic out loud. It is the most convincing thing on the slide.</a:t>
+            </a:r>
+          </a:p>
+          <a:p/>
+          <a:p>
+            <a:r>
+              <a:rPr sz="1200"/>
+              <a:t>If you alarm whenever any single window crosses a threshold, and your per-window false-alarm rate</a:t>
+            </a:r>
+          </a:p>
+          <a:p>
+            <a:r>
+              <a:rPr sz="1200"/>
+              <a:t>is 5%, and you use 2-second windows, then a 60-second call has 30 windows. One minus 0.95 to the</a:t>
+            </a:r>
+          </a:p>
+          <a:p>
+            <a:r>
+              <a:rPr sz="1200"/>
+              <a:t>30th is 79%. Four calls in five raise a false alarm. The app is uninstalled by lunchtime.</a:t>
+            </a:r>
+          </a:p>
+          <a:p/>
+          <a:p>
+            <a:r>
+              <a:rPr sz="1200"/>
+              <a:t>That is why per-window error rate is the wrong number to report and why we report false alarms</a:t>
+            </a:r>
+          </a:p>
+          <a:p>
+            <a:r>
+              <a:rPr sz="1200"/>
+              <a:t>PER CALL-MINUTE instead.</a:t>
+            </a:r>
+          </a:p>
+          <a:p/>
+          <a:p>
+            <a:r>
+              <a:rPr sz="1200"/>
+              <a:t>How we decide: accumulate a calibrated log-likelihood ratio across windows and alarm when the</a:t>
+            </a:r>
+          </a:p>
+          <a:p>
+            <a:r>
+              <a:rPr sz="1200"/>
+              <a:t>running total crosses a boundary. This is Wald's sequential probability ratio test. We add</a:t>
+            </a:r>
+          </a:p>
+          <a:p>
+            <a:r>
+              <a:rPr sz="1200"/>
+              <a:t>separate raise and clear thresholds for hysteresis, and a three-second evidence floor so it</a:t>
+            </a:r>
+          </a:p>
+          <a:p>
+            <a:r>
+              <a:rPr sz="1200"/>
+              <a:t>cannot fire on the first syllable.</a:t>
+            </a:r>
+          </a:p>
+          <a:p/>
+          <a:p>
+            <a:r>
+              <a:rPr sz="1200"/>
+              <a:t>Why SPRT specifically: it is the classical optimum for "decide as soon as the evidence is</a:t>
+            </a:r>
+          </a:p>
+          <a:p>
+            <a:r>
+              <a:rPr sz="1200"/>
+              <a:t>sufficient", so the time-to-decision versus error-rate tradeoff falls out of it directly. We</a:t>
+            </a:r>
+          </a:p>
+          <a:p>
+            <a:r>
+              <a:rPr sz="1200"/>
+              <a:t>inherit the metric from sequential detection theory instead of inventing one. We compare against</a:t>
+            </a:r>
+          </a:p>
+          <a:p>
+            <a:r>
+              <a:rPr sz="1200"/>
+              <a:t>a plain k-of-n consecutive-window rule as a baseline.</a:t>
+            </a:r>
+          </a:p>
+          <a:p/>
+          <a:p>
+            <a:r>
+              <a:rPr sz="1200"/>
+              <a:t>Three reported quantities, always together: false alarms per call-minute, detection rate at that</a:t>
+            </a:r>
+          </a:p>
+          <a:p>
+            <a:r>
+              <a:rPr sz="1200"/>
+              <a:t>operating point, and time to detection at median and 90th percentile. Plus milliseconds per window</a:t>
+            </a:r>
+          </a:p>
+          <a:p>
+            <a:r>
+              <a:rPr sz="1200"/>
+              <a:t>on the actual phone.</a:t>
+            </a:r>
+          </a:p>
+          <a:p/>
+          <a:p>
+            <a:r>
+              <a:rPr sz="1200"/>
+              <a:t>Honest caveat if asked: adjacent windows are correlated, which violates the independence</a:t>
+            </a:r>
+          </a:p>
+          <a:p>
+            <a:r>
+              <a:rPr sz="1200"/>
+              <a:t>assumption. We calibrate an effective sample size empirically rather than pretending it holds.</a:t>
+            </a:r>
+          </a:p>
+        </p:txBody>
+      </p:sp>
+      <p:sp>
+        <p:nvSpPr>
+          <p:cNvPr id="4" name="Slide Number Placeholder 3"/>
+          <p:cNvSpPr>
+            <a:spLocks noGrp="1"/>
+          </p:cNvSpPr>
+          <p:nvPr>
+            <p:ph type="sldNum" idx="5" sz="quarter"/>
+          </p:nvPr>
+        </p:nvSpPr>
+        <p:spPr/>
+      </p:sp>
+    </p:spTree>
+  </p:cSld>
+  <p:clrMapOvr>
+    <a:masterClrMapping/>
+  </p:clrMapOvr>
+</p:notes>
+</file>
+
+<file path=ppt/notesSlides/notesSlide11.xml><?xml version="1.0" encoding="utf-8"?>
+<p:notes xmlns:a="http://schemas.openxmlformats.org/drawingml/2006/main" xmlns:p="http://schemas.openxmlformats.org/presentationml/2006/main" xmlns:r="http://schemas.openxmlformats.org/officeDocument/2006/relationships">
+  <p:cSld>
+    <p:spTree>
+      <p:nvGrpSpPr>
+        <p:cNvPr id="1" name=""/>
+        <p:cNvGrpSpPr/>
+        <p:nvPr/>
+      </p:nvGrpSpPr>
+      <p:grpSpPr>
+        <a:xfrm>
+          <a:off x="0" y="0"/>
+          <a:ext cx="0" cy="0"/>
+          <a:chOff x="0" y="0"/>
+          <a:chExt cx="0" cy="0"/>
+        </a:xfrm>
+      </p:grpSpPr>
+      <p:sp>
+        <p:nvSpPr>
+          <p:cNvPr id="2" name="Slide Image Placeholder 1"/>
+          <p:cNvSpPr>
+            <a:spLocks noGrp="1"/>
+          </p:cNvSpPr>
+          <p:nvPr>
+            <p:ph type="sldImg" idx="2"/>
+          </p:nvPr>
+        </p:nvSpPr>
+        <p:spPr/>
+      </p:sp>
+      <p:sp>
+        <p:nvSpPr>
+          <p:cNvPr id="3" name="Notes Placeholder 2"/>
+          <p:cNvSpPr>
+            <a:spLocks noGrp="1"/>
+          </p:cNvSpPr>
+          <p:nvPr>
+            <p:ph type="body" idx="3" sz="quarter"/>
+          </p:nvPr>
+        </p:nvSpPr>
+        <p:spPr/>
+        <p:txBody>
+          <a:bodyPr/>
+          <a:lstStyle/>
+          <a:p>
+            <a:r>
+              <a:rPr sz="1200"/>
+              <a:t>Walk left to right once, then stop. The two amber boxes are the parts that are ours.</a:t>
+            </a:r>
+          </a:p>
+          <a:p/>
+          <a:p>
+            <a:r>
+              <a:rPr sz="1200"/>
+              <a:t>Train on ASVspoof 2019 LA, clean. Our augmentation stack sits between the data and the model:</a:t>
+            </a:r>
+          </a:p>
+          <a:p>
+            <a:r>
+              <a:rPr sz="1200"/>
+              <a:t>codec chains, silence manipulation, additive noise, room impulse responses, and the speakerphone</a:t>
+            </a:r>
+          </a:p>
+          <a:p>
+            <a:r>
+              <a:rPr sz="1200"/>
+              <a:t>re-capture from the last slide. Front-end is raw waveform or CQT, never mel. Detector starts as</a:t>
+            </a:r>
+          </a:p>
+          <a:p>
+            <a:r>
+              <a:rPr sz="1200"/>
+              <a:t>RawNet2 to establish the baseline, then AASIST, an SSL front-end and a one-class variant for</a:t>
+            </a:r>
+          </a:p>
+          <a:p>
+            <a:r>
+              <a:rPr sz="1200"/>
+              <a:t>comparison. The decision layer accumulates evidence over windows. The output is a risk score that</a:t>
+            </a:r>
+          </a:p>
+          <a:p>
+            <a:r>
+              <a:rPr sz="1200"/>
+              <a:t>feeds a multi-layer decision, not a verdict on its own.</a:t>
+            </a:r>
+          </a:p>
+          <a:p/>
+          <a:p>
+            <a:r>
+              <a:rPr sz="1200"/>
+              <a:t>What we sweep: the bandwidth ladder, clean 16k through G.722, Opus, a-law, mu-law, GSM, plus</a:t>
+            </a:r>
+          </a:p>
+          <a:p>
+            <a:r>
+              <a:rPr sz="1200"/>
+              <a:t>AMR-NB and AMR-WB. AMR matters because it is what mobile calls actually use and no ASVspoof</a:t>
+            </a:r>
+          </a:p>
+          <a:p>
+            <a:r>
+              <a:rPr sz="1200"/>
+              <a:t>edition includes it. Window length full, 4 s, 2 s, 1 s, which gives the accuracy-against-latency</a:t>
+            </a:r>
+          </a:p>
+          <a:p>
+            <a:r>
+              <a:rPr sz="1200"/>
+              <a:t>curve.</a:t>
+            </a:r>
+          </a:p>
+          <a:p/>
+          <a:p>
+            <a:r>
+              <a:rPr sz="1200"/>
+              <a:t>Held out and never trained on: In-the-Wild, the held-out attack family, and a few hundred modern</a:t>
+            </a:r>
+          </a:p>
+          <a:p>
+            <a:r>
+              <a:rPr sz="1200"/>
+              <a:t>cloned utterances made only from our own consented recordings, reported per generator.</a:t>
+            </a:r>
+          </a:p>
+          <a:p/>
+          <a:p>
+            <a:r>
+              <a:rPr sz="1200"/>
+              <a:t>Practical point worth making: every codec is already in the ffmpeg build on our laptop, and</a:t>
+            </a:r>
+          </a:p>
+          <a:p>
+            <a:r>
+              <a:rPr sz="1200"/>
+              <a:t>ASVspoof 2021 ships the codec label per trial, so the sweep costs no setup time. Training fits one</a:t>
+            </a:r>
+          </a:p>
+          <a:p>
+            <a:r>
+              <a:rPr sz="1200"/>
+              <a:t>16 GB laptop GPU at roughly 1.5 to 3 hours per run.</a:t>
+            </a:r>
+          </a:p>
+        </p:txBody>
+      </p:sp>
+      <p:sp>
+        <p:nvSpPr>
+          <p:cNvPr id="4" name="Slide Number Placeholder 3"/>
+          <p:cNvSpPr>
+            <a:spLocks noGrp="1"/>
+          </p:cNvSpPr>
+          <p:nvPr>
+            <p:ph type="sldNum" idx="5" sz="quarter"/>
+          </p:nvPr>
+        </p:nvSpPr>
+        <p:spPr/>
+      </p:sp>
+    </p:spTree>
+  </p:cSld>
+  <p:clrMapOvr>
+    <a:masterClrMapping/>
+  </p:clrMapOvr>
+</p:notes>
+</file>
+
+<file path=ppt/notesSlides/notesSlide12.xml><?xml version="1.0" encoding="utf-8"?>
+<p:notes xmlns:a="http://schemas.openxmlformats.org/drawingml/2006/main" xmlns:p="http://schemas.openxmlformats.org/presentationml/2006/main" xmlns:r="http://schemas.openxmlformats.org/officeDocument/2006/relationships">
+  <p:cSld>
+    <p:spTree>
+      <p:nvGrpSpPr>
+        <p:cNvPr id="1" name=""/>
+        <p:cNvGrpSpPr/>
+        <p:nvPr/>
+      </p:nvGrpSpPr>
+      <p:grpSpPr>
+        <a:xfrm>
+          <a:off x="0" y="0"/>
+          <a:ext cx="0" cy="0"/>
+          <a:chOff x="0" y="0"/>
+          <a:chExt cx="0" cy="0"/>
+        </a:xfrm>
+      </p:grpSpPr>
+      <p:sp>
+        <p:nvSpPr>
+          <p:cNvPr id="2" name="Slide Image Placeholder 1"/>
+          <p:cNvSpPr>
+            <a:spLocks noGrp="1"/>
+          </p:cNvSpPr>
+          <p:nvPr>
+            <p:ph type="sldImg" idx="2"/>
+          </p:nvPr>
+        </p:nvSpPr>
+        <p:spPr/>
+      </p:sp>
+      <p:sp>
+        <p:nvSpPr>
+          <p:cNvPr id="3" name="Notes Placeholder 2"/>
+          <p:cNvSpPr>
+            <a:spLocks noGrp="1"/>
+          </p:cNvSpPr>
+          <p:nvPr>
+            <p:ph type="body" idx="3" sz="quarter"/>
+          </p:nvPr>
+        </p:nvSpPr>
+        <p:spPr/>
+        <p:txBody>
+          <a:bodyPr/>
+          <a:lstStyle/>
+          <a:p>
+            <a:r>
+              <a:rPr sz="1200"/>
+              <a:t>Keep this short, maybe sixty seconds. It exists so the panel knows we have thought about time.</a:t>
+            </a:r>
+          </a:p>
+          <a:p/>
+          <a:p>
+            <a:r>
+              <a:rPr sz="1200"/>
+              <a:t>Week 1 is this proposal.</a:t>
+            </a:r>
+          </a:p>
+          <a:p/>
+          <a:p>
+            <a:r>
+              <a:rPr sz="1200"/>
+              <a:t>Weeks 2 to 4, baseline. Get RawNet2 training on ASVspoof 2019 LA and reproduce the published</a:t>
+            </a:r>
+          </a:p>
+          <a:p>
+            <a:r>
+              <a:rPr sz="1200"/>
+              <a:t>clean-condition EER. This is not research, it proves our setup is correct. We can validate</a:t>
+            </a:r>
+          </a:p>
+          <a:p>
+            <a:r>
+              <a:rPr sz="1200"/>
+              <a:t>against the official baseline score files that ship with the 2021 keys, so if our number does not</a:t>
+            </a:r>
+          </a:p>
+          <a:p>
+            <a:r>
+              <a:rPr sz="1200"/>
+              <a:t>match, the bug is ours and we find it in week 3 rather than week 10.</a:t>
+            </a:r>
+          </a:p>
+          <a:p/>
+          <a:p>
+            <a:r>
+              <a:rPr sz="1200"/>
+              <a:t>Weeks 5 to 7, the augmentation stack. Codec chains, silence manipulation, noise, room impulse</a:t>
+            </a:r>
+          </a:p>
+          <a:p>
+            <a:r>
+              <a:rPr sz="1200"/>
+              <a:t>responses, speakerphone re-capture. Then measure the gap per codec across the bandwidth ladder.</a:t>
+            </a:r>
+          </a:p>
+          <a:p/>
+          <a:p>
+            <a:r>
+              <a:rPr sz="1200"/>
+              <a:t>Weeks 8 to 9, the generalisation push. Silence masking, the one-class objective, the SSL</a:t>
+            </a:r>
+          </a:p>
+          <a:p>
+            <a:r>
+              <a:rPr sz="1200"/>
+              <a:t>front-end, compared on the gap rather than on in-domain EER. This is the core contribution.</a:t>
+            </a:r>
+          </a:p>
+          <a:p/>
+          <a:p>
+            <a:r>
+              <a:rPr sz="1200"/>
+              <a:t>Weeks 10 to 11, streaming and the modern-attack probe. SPRT decision rule, latency on the device,</a:t>
+            </a:r>
+          </a:p>
+          <a:p>
+            <a:r>
+              <a:rPr sz="1200"/>
+              <a:t>a few hundred cloned utterances from our own consented voices.</a:t>
+            </a:r>
+          </a:p>
+          <a:p/>
+          <a:p>
+            <a:r>
+              <a:rPr sz="1200"/>
+              <a:t>Week 12, write-up and defence.</a:t>
+            </a:r>
+          </a:p>
+          <a:p/>
+          <a:p>
+            <a:r>
+              <a:rPr sz="1200"/>
+              <a:t>Say the risk out loud: weeks 5 to 9 are where we expect to slip, because building a degradation</a:t>
+            </a:r>
+          </a:p>
+          <a:p>
+            <a:r>
+              <a:rPr sz="1200"/>
+              <a:t>pipeline and chasing generalisation both historically overrun. We are saying it now rather than</a:t>
+            </a:r>
+          </a:p>
+          <a:p>
+            <a:r>
+              <a:rPr sz="1200"/>
+              <a:t>in week 11. Compute is one 16 GB laptop GPU, roughly 1.5 to 3 hours per training run, which</a:t>
+            </a:r>
+          </a:p>
+          <a:p>
+            <a:r>
+              <a:rPr sz="1200"/>
+              <a:t>serialises our experiments and is the main reason the middle phases are the risk.</a:t>
+            </a:r>
+          </a:p>
+        </p:txBody>
+      </p:sp>
+      <p:sp>
+        <p:nvSpPr>
+          <p:cNvPr id="4" name="Slide Number Placeholder 3"/>
+          <p:cNvSpPr>
+            <a:spLocks noGrp="1"/>
+          </p:cNvSpPr>
+          <p:nvPr>
+            <p:ph type="sldNum" idx="5" sz="quarter"/>
+          </p:nvPr>
+        </p:nvSpPr>
+        <p:spPr/>
+      </p:sp>
+    </p:spTree>
+  </p:cSld>
+  <p:clrMapOvr>
+    <a:masterClrMapping/>
+  </p:clrMapOvr>
+</p:notes>
+</file>
+
+<file path=ppt/notesSlides/notesSlide13.xml><?xml version="1.0" encoding="utf-8"?>
+<p:notes xmlns:a="http://schemas.openxmlformats.org/drawingml/2006/main" xmlns:p="http://schemas.openxmlformats.org/presentationml/2006/main" xmlns:r="http://schemas.openxmlformats.org/officeDocument/2006/relationships">
+  <p:cSld>
+    <p:spTree>
+      <p:nvGrpSpPr>
+        <p:cNvPr id="1" name=""/>
+        <p:cNvGrpSpPr/>
+        <p:nvPr/>
+      </p:nvGrpSpPr>
+      <p:grpSpPr>
+        <a:xfrm>
+          <a:off x="0" y="0"/>
+          <a:ext cx="0" cy="0"/>
+          <a:chOff x="0" y="0"/>
+          <a:chExt cx="0" cy="0"/>
+        </a:xfrm>
+      </p:grpSpPr>
+      <p:sp>
+        <p:nvSpPr>
+          <p:cNvPr id="2" name="Slide Image Placeholder 1"/>
+          <p:cNvSpPr>
+            <a:spLocks noGrp="1"/>
+          </p:cNvSpPr>
+          <p:nvPr>
+            <p:ph type="sldImg" idx="2"/>
+          </p:nvPr>
+        </p:nvSpPr>
+        <p:spPr/>
+      </p:sp>
+      <p:sp>
+        <p:nvSpPr>
+          <p:cNvPr id="3" name="Notes Placeholder 2"/>
+          <p:cNvSpPr>
+            <a:spLocks noGrp="1"/>
+          </p:cNvSpPr>
+          <p:nvPr>
+            <p:ph type="body" idx="3" sz="quarter"/>
+          </p:nvPr>
+        </p:nvSpPr>
+        <p:spPr/>
+        <p:txBody>
+          <a:bodyPr/>
+          <a:lstStyle/>
+          <a:p>
+            <a:r>
+              <a:rPr sz="1200"/>
+              <a:t>Close on the claim, not on a summary. Say it as a position you are prepared to argue.</a:t>
+            </a:r>
+          </a:p>
+          <a:p/>
+          <a:p>
+            <a:r>
+              <a:rPr sz="1200"/>
+              <a:t>The target, concretely:</a:t>
+            </a:r>
+          </a:p>
+          <a:p>
+            <a:r>
+              <a:rPr sz="1200"/>
+              <a:t>- An out-of-domain EER well below the 34 to 37% the literature reports on the same held-out data.</a:t>
+            </a:r>
+          </a:p>
+          <a:p>
+            <a:r>
+              <a:rPr sz="1200"/>
+              <a:t>  That is the number we will be judged on.</a:t>
+            </a:r>
+          </a:p>
+          <a:p>
+            <a:r>
+              <a:rPr sz="1200"/>
+              <a:t>- A generalisation gap we reduced AND can attribute, so we can say which design decision bought</a:t>
+            </a:r>
+          </a:p>
+          <a:p>
+            <a:r>
+              <a:rPr sz="1200"/>
+              <a:t>  how much. An ablation, not a single result.</a:t>
+            </a:r>
+          </a:p>
+          <a:p>
+            <a:r>
+              <a:rPr sz="1200"/>
+              <a:t>- A decision within seconds of speech, running on the phone, with the latency cost of every window</a:t>
+            </a:r>
+          </a:p>
+          <a:p>
+            <a:r>
+              <a:rPr sz="1200"/>
+              <a:t>  length measured.</a:t>
+            </a:r>
+          </a:p>
+          <a:p/>
+          <a:p>
+            <a:r>
+              <a:rPr sz="1200"/>
+              <a:t>What we will not do, and say this deliberately because the panel will respect it:</a:t>
+            </a:r>
+          </a:p>
+          <a:p>
+            <a:r>
+              <a:rPr sz="1200"/>
+              <a:t>- Quote one in-domain EER as if it described field performance.</a:t>
+            </a:r>
+          </a:p>
+          <a:p>
+            <a:r>
+              <a:rPr sz="1200"/>
+              <a:t>- Average across corpora or codecs to make a result look better than it is.</a:t>
+            </a:r>
+          </a:p>
+          <a:p>
+            <a:r>
+              <a:rPr sz="1200"/>
+              <a:t>- Claim the problem is solved. A smaller gap is not a closed gap.</a:t>
+            </a:r>
+          </a:p>
+          <a:p/>
+          <a:p>
+            <a:r>
+              <a:rPr sz="1200"/>
+              <a:t>Final line: a detector that travels is worth more than a detector that scores well. We are</a:t>
+            </a:r>
+          </a:p>
+          <a:p>
+            <a:r>
+              <a:rPr sz="1200"/>
+              <a:t>optimising the number that survives a change of dataset.</a:t>
+            </a:r>
+          </a:p>
+          <a:p/>
+          <a:p>
+            <a:r>
+              <a:rPr sz="1200"/>
+              <a:t>If pushed on "will it work in production": it is a risk signal with a measured error rate, fused</a:t>
+            </a:r>
+          </a:p>
+          <a:p>
+            <a:r>
+              <a:rPr sz="1200"/>
+              <a:t>with caller-ID checks, account context and challenge-response. It raises attacker cost. It does</a:t>
+            </a:r>
+          </a:p>
+          <a:p>
+            <a:r>
+              <a:rPr sz="1200"/>
+              <a:t>not authenticate anyone on its own. That is also the framing of the assigned Ige et al. reading on</a:t>
+            </a:r>
+          </a:p>
+          <a:p>
+            <a:r>
+              <a:rPr sz="1200"/>
+              <a:t>multi-layer defence.</a:t>
+            </a:r>
+          </a:p>
+        </p:txBody>
+      </p:sp>
+      <p:sp>
+        <p:nvSpPr>
+          <p:cNvPr id="4" name="Slide Number Placeholder 3"/>
+          <p:cNvSpPr>
+            <a:spLocks noGrp="1"/>
+          </p:cNvSpPr>
+          <p:nvPr>
+            <p:ph type="sldNum" idx="5" sz="quarter"/>
+          </p:nvPr>
+        </p:nvSpPr>
+        <p:spPr/>
+      </p:sp>
+    </p:spTree>
+  </p:cSld>
+  <p:clrMapOvr>
+    <a:masterClrMapping/>
+  </p:clrMapOvr>
+</p:notes>
+</file>
+
+<file path=ppt/notesSlides/notesSlide2.xml><?xml version="1.0" encoding="utf-8"?>
+<p:notes xmlns:a="http://schemas.openxmlformats.org/drawingml/2006/main" xmlns:p="http://schemas.openxmlformats.org/presentationml/2006/main" xmlns:r="http://schemas.openxmlformats.org/officeDocument/2006/relationships">
+  <p:cSld>
+    <p:spTree>
+      <p:nvGrpSpPr>
+        <p:cNvPr id="1" name=""/>
+        <p:cNvGrpSpPr/>
+        <p:nvPr/>
+      </p:nvGrpSpPr>
+      <p:grpSpPr>
+        <a:xfrm>
+          <a:off x="0" y="0"/>
+          <a:ext cx="0" cy="0"/>
+          <a:chOff x="0" y="0"/>
+          <a:chExt cx="0" cy="0"/>
+        </a:xfrm>
+      </p:grpSpPr>
+      <p:sp>
+        <p:nvSpPr>
+          <p:cNvPr id="2" name="Slide Image Placeholder 1"/>
+          <p:cNvSpPr>
+            <a:spLocks noGrp="1"/>
+          </p:cNvSpPr>
+          <p:nvPr>
+            <p:ph type="sldImg" idx="2"/>
+          </p:nvPr>
+        </p:nvSpPr>
+        <p:spPr/>
+      </p:sp>
+      <p:sp>
+        <p:nvSpPr>
+          <p:cNvPr id="3" name="Notes Placeholder 2"/>
+          <p:cNvSpPr>
+            <a:spLocks noGrp="1"/>
+          </p:cNvSpPr>
+          <p:nvPr>
+            <p:ph type="body" idx="3" sz="quarter"/>
+          </p:nvPr>
+        </p:nvSpPr>
+        <p:spPr/>
+        <p:txBody>
+          <a:bodyPr/>
+          <a:lstStyle/>
+          <a:p>
+            <a:r>
+              <a:rPr sz="1200"/>
+              <a:t>Tell it as a story. Thirty seconds, no statistics. Pick one example and stay in it.</a:t>
+            </a:r>
+          </a:p>
+          <a:p/>
+          <a:p>
+            <a:r>
+              <a:rPr sz="1200"/>
+              <a:t>"You get a call. It is your mother's voice and she is upset. Ninety seconds of her speaking in</a:t>
+            </a:r>
+          </a:p>
+          <a:p>
+            <a:r>
+              <a:rPr sz="1200"/>
+              <a:t>public is all the attacker needed. A zero-shot cloning model does the rest in minutes, on a</a:t>
+            </a:r>
+          </a:p>
+          <a:p>
+            <a:r>
+              <a:rPr sz="1200"/>
+              <a:t>laptop, with no expertise."</a:t>
+            </a:r>
+          </a:p>
+          <a:p/>
+          <a:p>
+            <a:r>
+              <a:rPr sz="1200"/>
+              <a:t>Then the pivot: people cannot catch this. In a 472-person study listeners reached 72.8% accuracy</a:t>
+            </a:r>
+          </a:p>
+          <a:p>
+            <a:r>
+              <a:rPr sz="1200"/>
+              <a:t>on ASVspoof attacks where a machine reached 95.5%. arXiv:2107.09667. The human is the weaker</a:t>
+            </a:r>
+          </a:p>
+          <a:p>
+            <a:r>
+              <a:rPr sz="1200"/>
+              <a:t>detector, which is the whole justification for building the machine one.</a:t>
+            </a:r>
+          </a:p>
+        </p:txBody>
+      </p:sp>
+      <p:sp>
+        <p:nvSpPr>
+          <p:cNvPr id="4" name="Slide Number Placeholder 3"/>
+          <p:cNvSpPr>
+            <a:spLocks noGrp="1"/>
+          </p:cNvSpPr>
+          <p:nvPr>
+            <p:ph type="sldNum" idx="5" sz="quarter"/>
+          </p:nvPr>
+        </p:nvSpPr>
+        <p:spPr/>
+      </p:sp>
+    </p:spTree>
+  </p:cSld>
+  <p:clrMapOvr>
+    <a:masterClrMapping/>
+  </p:clrMapOvr>
+</p:notes>
+</file>
+
+<file path=ppt/notesSlides/notesSlide3.xml><?xml version="1.0" encoding="utf-8"?>
+<p:notes xmlns:a="http://schemas.openxmlformats.org/drawingml/2006/main" xmlns:p="http://schemas.openxmlformats.org/presentationml/2006/main" xmlns:r="http://schemas.openxmlformats.org/officeDocument/2006/relationships">
+  <p:cSld>
+    <p:spTree>
+      <p:nvGrpSpPr>
+        <p:cNvPr id="1" name=""/>
+        <p:cNvGrpSpPr/>
+        <p:nvPr/>
+      </p:nvGrpSpPr>
+      <p:grpSpPr>
+        <a:xfrm>
+          <a:off x="0" y="0"/>
+          <a:ext cx="0" cy="0"/>
+          <a:chOff x="0" y="0"/>
+          <a:chExt cx="0" cy="0"/>
+        </a:xfrm>
+      </p:grpSpPr>
+      <p:sp>
+        <p:nvSpPr>
+          <p:cNvPr id="2" name="Slide Image Placeholder 1"/>
+          <p:cNvSpPr>
+            <a:spLocks noGrp="1"/>
+          </p:cNvSpPr>
+          <p:nvPr>
+            <p:ph type="sldImg" idx="2"/>
+          </p:nvPr>
+        </p:nvSpPr>
+        <p:spPr/>
+      </p:sp>
+      <p:sp>
+        <p:nvSpPr>
+          <p:cNvPr id="3" name="Notes Placeholder 2"/>
+          <p:cNvSpPr>
+            <a:spLocks noGrp="1"/>
+          </p:cNvSpPr>
+          <p:nvPr>
+            <p:ph type="body" idx="3" sz="quarter"/>
+          </p:nvPr>
+        </p:nvSpPr>
+        <p:spPr/>
+        <p:txBody>
+          <a:bodyPr/>
+          <a:lstStyle/>
+          <a:p>
+            <a:r>
+              <a:rPr sz="1200"/>
+              <a:t>Deliver this with confidence, as if you believe it. The reversal on the next slide lands harder</a:t>
+            </a:r>
+          </a:p>
+          <a:p>
+            <a:r>
+              <a:rPr sz="1200"/>
+              <a:t>if you sell this one first.</a:t>
+            </a:r>
+          </a:p>
+          <a:p/>
+          <a:p>
+            <a:r>
+              <a:rPr sz="1200"/>
+              <a:t>Numbers: RawGAT-ST 1.23% EER, AASIST 0.71%. Four ASVspoof challenges since 2015, 54 teams in the</a:t>
+            </a:r>
+          </a:p>
+          <a:p>
+            <a:r>
+              <a:rPr sz="1200"/>
+              <a:t>2021 evaluation alone. Mueller et al. re-implemented twelve architectures under one protocol and</a:t>
+            </a:r>
+          </a:p>
+          <a:p>
+            <a:r>
+              <a:rPr sz="1200"/>
+              <a:t>raw-waveform models won consistently.</a:t>
+            </a:r>
+          </a:p>
+          <a:p/>
+          <a:p>
+            <a:r>
+              <a:rPr sz="1200"/>
+              <a:t>Then the catch, slowly. Every one of those numbers is in-domain: train on ASVspoof, test on</a:t>
+            </a:r>
+          </a:p>
+          <a:p>
+            <a:r>
+              <a:rPr sz="1200"/>
+              <a:t>ASVspoof. Nobody is hiding it, that is just how the benchmark is built. What happens when you</a:t>
+            </a:r>
+          </a:p>
+          <a:p>
+            <a:r>
+              <a:rPr sz="1200"/>
+              <a:t>move off it is the next slide, and it is the reason this project exists.</a:t>
+            </a:r>
+          </a:p>
+        </p:txBody>
+      </p:sp>
+      <p:sp>
+        <p:nvSpPr>
+          <p:cNvPr id="4" name="Slide Number Placeholder 3"/>
+          <p:cNvSpPr>
+            <a:spLocks noGrp="1"/>
+          </p:cNvSpPr>
+          <p:nvPr>
+            <p:ph type="sldNum" idx="5" sz="quarter"/>
+          </p:nvPr>
+        </p:nvSpPr>
+        <p:spPr/>
+      </p:sp>
+    </p:spTree>
+  </p:cSld>
+  <p:clrMapOvr>
+    <a:masterClrMapping/>
+  </p:clrMapOvr>
+</p:notes>
+</file>
+
+<file path=ppt/notesSlides/notesSlide4.xml><?xml version="1.0" encoding="utf-8"?>
+<p:notes xmlns:a="http://schemas.openxmlformats.org/drawingml/2006/main" xmlns:p="http://schemas.openxmlformats.org/presentationml/2006/main" xmlns:r="http://schemas.openxmlformats.org/officeDocument/2006/relationships">
+  <p:cSld>
+    <p:spTree>
+      <p:nvGrpSpPr>
+        <p:cNvPr id="1" name=""/>
+        <p:cNvGrpSpPr/>
+        <p:nvPr/>
+      </p:nvGrpSpPr>
+      <p:grpSpPr>
+        <a:xfrm>
+          <a:off x="0" y="0"/>
+          <a:ext cx="0" cy="0"/>
+          <a:chOff x="0" y="0"/>
+          <a:chExt cx="0" cy="0"/>
+        </a:xfrm>
+      </p:grpSpPr>
+      <p:sp>
+        <p:nvSpPr>
+          <p:cNvPr id="2" name="Slide Image Placeholder 1"/>
+          <p:cNvSpPr>
+            <a:spLocks noGrp="1"/>
+          </p:cNvSpPr>
+          <p:nvPr>
+            <p:ph type="sldImg" idx="2"/>
+          </p:nvPr>
+        </p:nvSpPr>
+        <p:spPr/>
+      </p:sp>
+      <p:sp>
+        <p:nvSpPr>
+          <p:cNvPr id="3" name="Notes Placeholder 2"/>
+          <p:cNvSpPr>
+            <a:spLocks noGrp="1"/>
+          </p:cNvSpPr>
+          <p:nvPr>
+            <p:ph type="body" idx="3" sz="quarter"/>
+          </p:nvPr>
+        </p:nvSpPr>
+        <p:spPr/>
+        <p:txBody>
+          <a:bodyPr/>
+          <a:lstStyle/>
+          <a:p>
+            <a:r>
+              <a:rPr sz="1200"/>
+              <a:t>This is the slide the talk turns on. Take three minutes. Walk the bars top to bottom.</a:t>
+            </a:r>
+          </a:p>
+          <a:p/>
+          <a:p>
+            <a:r>
+              <a:rPr sz="1200"/>
+              <a:t>Bar 1: RawGAT-ST, 1.23% EER on ASVspoof 2019 LA eval. The published number.</a:t>
+            </a:r>
+          </a:p>
+          <a:p>
+            <a:r>
+              <a:rPr sz="1200"/>
+              <a:t>Bar 2: the SAME model, same weights, nothing retrained, tested on In-the-Wild, a corpus of found</a:t>
+            </a:r>
+          </a:p>
+          <a:p>
+            <a:r>
+              <a:rPr sz="1200"/>
+              <a:t>celebrity audio. 37.15%. Say "same weights" out loud, that is the point.</a:t>
+            </a:r>
+          </a:p>
+          <a:p>
+            <a:r>
+              <a:rPr sz="1200"/>
+              <a:t>Bar 3: an ASVspoof-trained detector against 2026 cloned voices over a real VoIP call. 50.28%,</a:t>
+            </a:r>
+          </a:p>
+          <a:p>
+            <a:r>
+              <a:rPr sz="1200"/>
+              <a:t>a coin flip. Source is RTCFake, a recent preprint. Say "a recent preprint reports". Do not</a:t>
+            </a:r>
+          </a:p>
+          <a:p>
+            <a:r>
+              <a:rPr sz="1200"/>
+              <a:t>present it as settled.</a:t>
+            </a:r>
+          </a:p>
+          <a:p/>
+          <a:p>
+            <a:r>
+              <a:rPr sz="1200"/>
+              <a:t>Then the blue bar: train the same architecture on modern voices instead and it drops to 5.81%.</a:t>
+            </a:r>
+          </a:p>
+          <a:p>
+            <a:r>
+              <a:rPr sz="1200"/>
+              <a:t>So this is not a law of nature, it is a training problem. That is why the project is worth doing.</a:t>
+            </a:r>
+          </a:p>
+          <a:p/>
+          <a:p>
+            <a:r>
+              <a:rPr sz="1200"/>
+              <a:t>If asked about more data: measured, does not help, 33.9% to 33.1%. Every ASVspoof split derives</a:t>
+            </a:r>
+          </a:p>
+          <a:p>
+            <a:r>
+              <a:rPr sz="1200"/>
+              <a:t>from the same VCTK recordings, so more of it adds no new domain.</a:t>
+            </a:r>
+          </a:p>
+          <a:p/>
+          <a:p>
+            <a:r>
+              <a:rPr sz="1200"/>
+              <a:t>EER means equal error rate. 50% is random guessing.</a:t>
+            </a:r>
+          </a:p>
+        </p:txBody>
+      </p:sp>
+      <p:sp>
+        <p:nvSpPr>
+          <p:cNvPr id="4" name="Slide Number Placeholder 3"/>
+          <p:cNvSpPr>
+            <a:spLocks noGrp="1"/>
+          </p:cNvSpPr>
+          <p:nvPr>
+            <p:ph type="sldNum" idx="5" sz="quarter"/>
+          </p:nvPr>
+        </p:nvSpPr>
+        <p:spPr/>
+      </p:sp>
+    </p:spTree>
+  </p:cSld>
+  <p:clrMapOvr>
+    <a:masterClrMapping/>
+  </p:clrMapOvr>
+</p:notes>
+</file>
+
+<file path=ppt/notesSlides/notesSlide5.xml><?xml version="1.0" encoding="utf-8"?>
+<p:notes xmlns:a="http://schemas.openxmlformats.org/drawingml/2006/main" xmlns:p="http://schemas.openxmlformats.org/presentationml/2006/main" xmlns:r="http://schemas.openxmlformats.org/officeDocument/2006/relationships">
+  <p:cSld>
+    <p:spTree>
+      <p:nvGrpSpPr>
+        <p:cNvPr id="1" name=""/>
+        <p:cNvGrpSpPr/>
+        <p:nvPr/>
+      </p:nvGrpSpPr>
+      <p:grpSpPr>
+        <a:xfrm>
+          <a:off x="0" y="0"/>
+          <a:ext cx="0" cy="0"/>
+          <a:chOff x="0" y="0"/>
+          <a:chExt cx="0" cy="0"/>
+        </a:xfrm>
+      </p:grpSpPr>
+      <p:sp>
+        <p:nvSpPr>
+          <p:cNvPr id="2" name="Slide Image Placeholder 1"/>
+          <p:cNvSpPr>
+            <a:spLocks noGrp="1"/>
+          </p:cNvSpPr>
+          <p:nvPr>
+            <p:ph type="sldImg" idx="2"/>
+          </p:nvPr>
+        </p:nvSpPr>
+        <p:spPr/>
+      </p:sp>
+      <p:sp>
+        <p:nvSpPr>
+          <p:cNvPr id="3" name="Notes Placeholder 2"/>
+          <p:cNvSpPr>
+            <a:spLocks noGrp="1"/>
+          </p:cNvSpPr>
+          <p:nvPr>
+            <p:ph type="body" idx="3" sz="quarter"/>
+          </p:nvPr>
+        </p:nvSpPr>
+        <p:spPr/>
+        <p:txBody>
+          <a:bodyPr/>
+          <a:lstStyle/>
+          <a:p>
+            <a:r>
+              <a:rPr sz="1200"/>
+              <a:t>Three findings, one conclusion. Do not read the cards, explain each in a sentence.</a:t>
+            </a:r>
+          </a:p>
+          <a:p/>
+          <a:p>
+            <a:r>
+              <a:rPr sz="1200"/>
+              <a:t>1. Mueller et al. trained a classifier on nothing but the DURATION of the silence at the start of</a:t>
+            </a:r>
+          </a:p>
+          <a:p>
+            <a:r>
+              <a:rPr sz="1200"/>
+              <a:t>   the clip. 85% accuracy, 15.1% EER. In ASVspoof, real recordings have longer leading silence</a:t>
+            </a:r>
+          </a:p>
+          <a:p>
+            <a:r>
+              <a:rPr sz="1200"/>
+              <a:t>   than fake ones, so silence length leaks the label.</a:t>
+            </a:r>
+          </a:p>
+          <a:p>
+            <a:r>
+              <a:rPr sz="1200"/>
+              <a:t>2. SiFDetectCracker, ACM MM 2023. A black-box attack that changes only the background noise and</a:t>
+            </a:r>
+          </a:p>
+          <a:p>
+            <a:r>
+              <a:rPr sz="1200"/>
+              <a:t>   the mute segments and never touches the speech. 82.2% success against RawNet2, RawGAT-ST and</a:t>
+            </a:r>
+          </a:p>
+          <a:p>
+            <a:r>
+              <a:rPr sz="1200"/>
+              <a:t>   others.</a:t>
+            </a:r>
+          </a:p>
+          <a:p>
+            <a:r>
+              <a:rPr sz="1200"/>
+              <a:t>3. SHAP analysis, arXiv:2110.03309. The classifier attends to non-speech intervals and one narrow</a:t>
+            </a:r>
+          </a:p>
+          <a:p>
+            <a:r>
+              <a:rPr sz="1200"/>
+              <a:t>   band around 0.5 to 0.6 kHz.</a:t>
+            </a:r>
+          </a:p>
+          <a:p/>
+          <a:p>
+            <a:r>
+              <a:rPr sz="1200"/>
+              <a:t>Conclusion, say it out loud: the model is winning on properties of the corpus, not properties of</a:t>
+            </a:r>
+          </a:p>
+          <a:p>
+            <a:r>
+              <a:rPr sz="1200"/>
+              <a:t>the voice. That is exactly why it does not travel. And it is good news, because every one of</a:t>
+            </a:r>
+          </a:p>
+          <a:p>
+            <a:r>
+              <a:rPr sz="1200"/>
+              <a:t>those cues can be removed during training. Slide 7 is how.</a:t>
+            </a:r>
+          </a:p>
+          <a:p/>
+          <a:p>
+            <a:r>
+              <a:rPr sz="1200"/>
+              <a:t>If asked: yes, a chunk of published performance is a dataset artifact, an attacker can strip the</a:t>
+            </a:r>
+          </a:p>
+          <a:p>
+            <a:r>
+              <a:rPr sz="1200"/>
+              <a:t>silence trivially, and a live phone call has no clean studio silence anyway.</a:t>
+            </a:r>
+          </a:p>
+        </p:txBody>
+      </p:sp>
+      <p:sp>
+        <p:nvSpPr>
+          <p:cNvPr id="4" name="Slide Number Placeholder 3"/>
+          <p:cNvSpPr>
+            <a:spLocks noGrp="1"/>
+          </p:cNvSpPr>
+          <p:nvPr>
+            <p:ph type="sldNum" idx="5" sz="quarter"/>
+          </p:nvPr>
+        </p:nvSpPr>
+        <p:spPr/>
+      </p:sp>
+    </p:spTree>
+  </p:cSld>
+  <p:clrMapOvr>
+    <a:masterClrMapping/>
+  </p:clrMapOvr>
+</p:notes>
+</file>
+
+<file path=ppt/notesSlides/notesSlide6.xml><?xml version="1.0" encoding="utf-8"?>
+<p:notes xmlns:a="http://schemas.openxmlformats.org/drawingml/2006/main" xmlns:p="http://schemas.openxmlformats.org/presentationml/2006/main" xmlns:r="http://schemas.openxmlformats.org/officeDocument/2006/relationships">
+  <p:cSld>
+    <p:spTree>
+      <p:nvGrpSpPr>
+        <p:cNvPr id="1" name=""/>
+        <p:cNvGrpSpPr/>
+        <p:nvPr/>
+      </p:nvGrpSpPr>
+      <p:grpSpPr>
+        <a:xfrm>
+          <a:off x="0" y="0"/>
+          <a:ext cx="0" cy="0"/>
+          <a:chOff x="0" y="0"/>
+          <a:chExt cx="0" cy="0"/>
+        </a:xfrm>
+      </p:grpSpPr>
+      <p:sp>
+        <p:nvSpPr>
+          <p:cNvPr id="2" name="Slide Image Placeholder 1"/>
+          <p:cNvSpPr>
+            <a:spLocks noGrp="1"/>
+          </p:cNvSpPr>
+          <p:nvPr>
+            <p:ph type="sldImg" idx="2"/>
+          </p:nvPr>
+        </p:nvSpPr>
+        <p:spPr/>
+      </p:sp>
+      <p:sp>
+        <p:nvSpPr>
+          <p:cNvPr id="3" name="Notes Placeholder 2"/>
+          <p:cNvSpPr>
+            <a:spLocks noGrp="1"/>
+          </p:cNvSpPr>
+          <p:nvPr>
+            <p:ph type="body" idx="3" sz="quarter"/>
+          </p:nvPr>
+        </p:nvSpPr>
+        <p:spPr/>
+        <p:txBody>
+          <a:bodyPr/>
+          <a:lstStyle/>
+          <a:p>
+            <a:r>
+              <a:rPr sz="1200"/>
+              <a:t>Point at the bars as you talk. The picture does the work.</a:t>
+            </a:r>
+          </a:p>
+          <a:p/>
+          <a:p>
+            <a:r>
+              <a:rPr sz="1200"/>
+              <a:t>The synthesis artifact lives at the top of the spectrum, above roughly 4 kHz. A WhatsApp or Teams</a:t>
+            </a:r>
+          </a:p>
+          <a:p>
+            <a:r>
+              <a:rPr sz="1200"/>
+              <a:t>call over Opus keeps all of it. A VoLTE call over AMR-WB keeps most. A normal phone call through</a:t>
+            </a:r>
+          </a:p>
+          <a:p>
+            <a:r>
+              <a:rPr sz="1200"/>
+              <a:t>G.711 or GSM keeps only 300 to 3400 Hz, so the artifact is not damaged, it is gone.</a:t>
+            </a:r>
+          </a:p>
+          <a:p/>
+          <a:p>
+            <a:r>
+              <a:rPr sz="1200"/>
+              <a:t>That sounds fatal. We assumed it was. It is not, for two reasons:</a:t>
+            </a:r>
+          </a:p>
+          <a:p/>
+          <a:p>
+            <a:r>
+              <a:rPr sz="1200"/>
+              <a:t>1. Shim and Wang, arXiv:2211.06546. Deliberately low-passing to the telephone band IMPROVES codec</a:t>
+            </a:r>
+          </a:p>
+          <a:p>
+            <a:r>
+              <a:rPr sz="1200"/>
+              <a:t>   robustness by about 25% relative, because the high-frequency bins are the ones that overfit to</a:t>
+            </a:r>
+          </a:p>
+          <a:p>
+            <a:r>
+              <a:rPr sz="1200"/>
+              <a:t>   the clean training condition.</a:t>
+            </a:r>
+          </a:p>
+          <a:p>
+            <a:r>
+              <a:rPr sz="1200"/>
+              <a:t>2. The F0 sub-band of the log-power spectrogram ALONE reaches 1.15% EER on ASVspoof 2019 LA.</a:t>
+            </a:r>
+          </a:p>
+          <a:p>
+            <a:r>
+              <a:rPr sz="1200"/>
+              <a:t>   arXiv:2208.01214.</a:t>
+            </a:r>
+          </a:p>
+          <a:p/>
+          <a:p>
+            <a:r>
+              <a:rPr sz="1200"/>
+              <a:t>So the band the phone keeps is a band we can build on. That is a design decision, not a</a:t>
+            </a:r>
+          </a:p>
+          <a:p>
+            <a:r>
+              <a:rPr sz="1200"/>
+              <a:t>consolation prize.</a:t>
+            </a:r>
+          </a:p>
+          <a:p/>
+          <a:p>
+            <a:r>
+              <a:rPr sz="1200"/>
+              <a:t>Caveat if pressed: this also means prosody is the load-bearing feature in narrowband, and prosody</a:t>
+            </a:r>
+          </a:p>
+          <a:p>
+            <a:r>
+              <a:rPr sz="1200"/>
+              <a:t>is manipulable by an attacker. We know. It is in the report's limitations.</a:t>
+            </a:r>
+          </a:p>
+        </p:txBody>
+      </p:sp>
+      <p:sp>
+        <p:nvSpPr>
+          <p:cNvPr id="4" name="Slide Number Placeholder 3"/>
+          <p:cNvSpPr>
+            <a:spLocks noGrp="1"/>
+          </p:cNvSpPr>
+          <p:nvPr>
+            <p:ph type="sldNum" idx="5" sz="quarter"/>
+          </p:nvPr>
+        </p:nvSpPr>
+        <p:spPr/>
+      </p:sp>
+    </p:spTree>
+  </p:cSld>
+  <p:clrMapOvr>
+    <a:masterClrMapping/>
+  </p:clrMapOvr>
+</p:notes>
+</file>
+
+<file path=ppt/notesSlides/notesSlide7.xml><?xml version="1.0" encoding="utf-8"?>
+<p:notes xmlns:a="http://schemas.openxmlformats.org/drawingml/2006/main" xmlns:p="http://schemas.openxmlformats.org/presentationml/2006/main" xmlns:r="http://schemas.openxmlformats.org/officeDocument/2006/relationships">
+  <p:cSld>
+    <p:spTree>
+      <p:nvGrpSpPr>
+        <p:cNvPr id="1" name=""/>
+        <p:cNvGrpSpPr/>
+        <p:nvPr/>
+      </p:nvGrpSpPr>
+      <p:grpSpPr>
+        <a:xfrm>
+          <a:off x="0" y="0"/>
+          <a:ext cx="0" cy="0"/>
+          <a:chOff x="0" y="0"/>
+          <a:chExt cx="0" cy="0"/>
+        </a:xfrm>
+      </p:grpSpPr>
+      <p:sp>
+        <p:nvSpPr>
+          <p:cNvPr id="2" name="Slide Image Placeholder 1"/>
+          <p:cNvSpPr>
+            <a:spLocks noGrp="1"/>
+          </p:cNvSpPr>
+          <p:nvPr>
+            <p:ph type="sldImg" idx="2"/>
+          </p:nvPr>
+        </p:nvSpPr>
+        <p:spPr/>
+      </p:sp>
+      <p:sp>
+        <p:nvSpPr>
+          <p:cNvPr id="3" name="Notes Placeholder 2"/>
+          <p:cNvSpPr>
+            <a:spLocks noGrp="1"/>
+          </p:cNvSpPr>
+          <p:nvPr>
+            <p:ph type="body" idx="3" sz="quarter"/>
+          </p:nvPr>
+        </p:nvSpPr>
+        <p:spPr/>
+        <p:txBody>
+          <a:bodyPr/>
+          <a:lstStyle/>
+          <a:p>
+            <a:r>
+              <a:rPr sz="1200"/>
+              <a:t>The "what are you actually going to do" slide. One sentence per row.</a:t>
+            </a:r>
+          </a:p>
+          <a:p/>
+          <a:p>
+            <a:r>
+              <a:rPr sz="1200"/>
+              <a:t>1. Codec and channel augmentation. Every top-5 system in ASVspoof 2021 used data augmentation and</a:t>
+            </a:r>
+          </a:p>
+          <a:p>
+            <a:r>
+              <a:rPr sz="1200"/>
+              <a:t>   every top-5 deepfake-track system used codec augmentation specifically. No counterexample in</a:t>
+            </a:r>
+          </a:p>
+          <a:p>
+            <a:r>
+              <a:rPr sz="1200"/>
+              <a:t>   the literature. The least controversial thing we will do.</a:t>
+            </a:r>
+          </a:p>
+          <a:p>
+            <a:r>
+              <a:rPr sz="1200"/>
+              <a:t>2. Front-end. Swapping mel for CQT improves average EER by 37% with everything else held constant.</a:t>
+            </a:r>
+          </a:p>
+          <a:p>
+            <a:r>
+              <a:rPr sz="1200"/>
+              <a:t>   Mel compresses high-frequency resolution because it models human hearing, and the artifact is</a:t>
+            </a:r>
+          </a:p>
+          <a:p>
+            <a:r>
+              <a:rPr sz="1200"/>
+              <a:t>   not where human hearing is sensitive.</a:t>
+            </a:r>
+          </a:p>
+          <a:p>
+            <a:r>
+              <a:rPr sz="1200"/>
+              <a:t>3. Silence masking and VAD-trimmed training. Directly removes the shortcut from slide 5. Proposed</a:t>
+            </a:r>
+          </a:p>
+          <a:p>
+            <a:r>
+              <a:rPr sz="1200"/>
+              <a:t>   as mitigation by Zhang et al., TASLP 2023. As far as we found, nobody has combined it with</a:t>
+            </a:r>
+          </a:p>
+          <a:p>
+            <a:r>
+              <a:rPr sz="1200"/>
+              <a:t>   channel robustness, which is what we will do.</a:t>
+            </a:r>
+          </a:p>
+          <a:p>
+            <a:r>
+              <a:rPr sz="1200"/>
+              <a:t>4. Telephone-band low-pass, from the previous slide. We test it as a condition, we do not assume it.</a:t>
+            </a:r>
+          </a:p>
+          <a:p>
+            <a:r>
+              <a:rPr sz="1200"/>
+              <a:t>5. wav2vec2 / SSL front-end. The most robust model under the Kassis attack by a wide margin,</a:t>
+            </a:r>
+          </a:p>
+          <a:p>
+            <a:r>
+              <a:rPr sz="1200"/>
+              <a:t>   1.89% to 11.6%, where SSNET goes to 61.81%. Also the heaviest, and the phone has to run it, so</a:t>
+            </a:r>
+          </a:p>
+          <a:p>
+            <a:r>
+              <a:rPr sz="1200"/>
+              <a:t>   we measure what it costs in latency.</a:t>
+            </a:r>
+          </a:p>
+          <a:p>
+            <a:r>
+              <a:rPr sz="1200"/>
+              <a:t>6. One-class objective. Model what bona fide speech is, instead of memorising which attacks we</a:t>
+            </a:r>
+          </a:p>
+          <a:p>
+            <a:r>
+              <a:rPr sz="1200"/>
+              <a:t>   happened to see. The standard answer to unseen-attack generalisation.</a:t>
+            </a:r>
+          </a:p>
+          <a:p/>
+          <a:p>
+            <a:r>
+              <a:rPr sz="1200"/>
+              <a:t>Be honest in the closing line: none of these is novel alone. The contribution is combining them</a:t>
+            </a:r>
+          </a:p>
+          <a:p>
+            <a:r>
+              <a:rPr sz="1200"/>
+              <a:t>against corpus shift and channel shift at the same time, and measuring the result properly.</a:t>
+            </a:r>
+          </a:p>
+        </p:txBody>
+      </p:sp>
+      <p:sp>
+        <p:nvSpPr>
+          <p:cNvPr id="4" name="Slide Number Placeholder 3"/>
+          <p:cNvSpPr>
+            <a:spLocks noGrp="1"/>
+          </p:cNvSpPr>
+          <p:nvPr>
+            <p:ph type="sldNum" idx="5" sz="quarter"/>
+          </p:nvPr>
+        </p:nvSpPr>
+        <p:spPr/>
+      </p:sp>
+    </p:spTree>
+  </p:cSld>
+  <p:clrMapOvr>
+    <a:masterClrMapping/>
+  </p:clrMapOvr>
+</p:notes>
+</file>
+
+<file path=ppt/notesSlides/notesSlide8.xml><?xml version="1.0" encoding="utf-8"?>
+<p:notes xmlns:a="http://schemas.openxmlformats.org/drawingml/2006/main" xmlns:p="http://schemas.openxmlformats.org/presentationml/2006/main" xmlns:r="http://schemas.openxmlformats.org/officeDocument/2006/relationships">
+  <p:cSld>
+    <p:spTree>
+      <p:nvGrpSpPr>
+        <p:cNvPr id="1" name=""/>
+        <p:cNvGrpSpPr/>
+        <p:nvPr/>
+      </p:nvGrpSpPr>
+      <p:grpSpPr>
+        <a:xfrm>
+          <a:off x="0" y="0"/>
+          <a:ext cx="0" cy="0"/>
+          <a:chOff x="0" y="0"/>
+          <a:chExt cx="0" cy="0"/>
+        </a:xfrm>
+      </p:grpSpPr>
+      <p:sp>
+        <p:nvSpPr>
+          <p:cNvPr id="2" name="Slide Image Placeholder 1"/>
+          <p:cNvSpPr>
+            <a:spLocks noGrp="1"/>
+          </p:cNvSpPr>
+          <p:nvPr>
+            <p:ph type="sldImg" idx="2"/>
+          </p:nvPr>
+        </p:nvSpPr>
+        <p:spPr/>
+      </p:sp>
+      <p:sp>
+        <p:nvSpPr>
+          <p:cNvPr id="3" name="Notes Placeholder 2"/>
+          <p:cNvSpPr>
+            <a:spLocks noGrp="1"/>
+          </p:cNvSpPr>
+          <p:nvPr>
+            <p:ph type="body" idx="3" sz="quarter"/>
+          </p:nvPr>
+        </p:nvSpPr>
+        <p:spPr/>
+        <p:txBody>
+          <a:bodyPr/>
+          <a:lstStyle/>
+          <a:p>
+            <a:r>
+              <a:rPr sz="1200"/>
+              <a:t>Short slide, but it is the one that protects you in questions. If someone asks "what EER are you</a:t>
+            </a:r>
+          </a:p>
+          <a:p>
+            <a:r>
+              <a:rPr sz="1200"/>
+              <a:t>targeting", this is the answer.</a:t>
+            </a:r>
+          </a:p>
+          <a:p/>
+          <a:p>
+            <a:r>
+              <a:rPr sz="1200"/>
+              <a:t>Train: ASVspoof 2019 LA, clean, 25,380 utterances, with our augmentation stack on top. We hold out</a:t>
+            </a:r>
+          </a:p>
+          <a:p>
+            <a:r>
+              <a:rPr sz="1200"/>
+              <a:t>one attack family so unseen-attack performance is measured before we ever touch another corpus.</a:t>
+            </a:r>
+          </a:p>
+          <a:p/>
+          <a:p>
+            <a:r>
+              <a:rPr sz="1200"/>
+              <a:t>Test, and each isolates a different shift:</a:t>
+            </a:r>
+          </a:p>
+          <a:p>
+            <a:r>
+              <a:rPr sz="1200"/>
+              <a:t>- ASVspoof 2021 LA isolates the CHANNEL. Real VoIP and PSTN transmission, seven codec conditions,</a:t>
+            </a:r>
+          </a:p>
+          <a:p>
+            <a:r>
+              <a:rPr sz="1200"/>
+              <a:t>  25,938 trials each, perfectly balanced, and the codec is labelled per trial so we do not have to</a:t>
+            </a:r>
+          </a:p>
+          <a:p>
+            <a:r>
+              <a:rPr sz="1200"/>
+              <a:t>  simulate anything.</a:t>
+            </a:r>
+          </a:p>
+          <a:p>
+            <a:r>
+              <a:rPr sz="1200"/>
+              <a:t>- In-the-Wild isolates the CORPUS. New speakers, new attacks, different recording provenance,</a:t>
+            </a:r>
+          </a:p>
+          <a:p>
+            <a:r>
+              <a:rPr sz="1200"/>
+              <a:t>  31,779 clips. The hardest published case.</a:t>
+            </a:r>
+          </a:p>
+          <a:p/>
+          <a:p>
+            <a:r>
+              <a:rPr sz="1200"/>
+              <a:t>The metric: gap equals out-of-domain EER minus in-domain EER. A detector at 1% and 37% has a</a:t>
+            </a:r>
+          </a:p>
+          <a:p>
+            <a:r>
+              <a:rPr sz="1200"/>
+              <a:t>36-point gap. We report in-domain, out-of-domain and the gap, per condition, never pooled, and we</a:t>
+            </a:r>
+          </a:p>
+          <a:p>
+            <a:r>
+              <a:rPr sz="1200"/>
+              <a:t>optimise the gap rather than the headline number.</a:t>
+            </a:r>
+          </a:p>
+          <a:p/>
+          <a:p>
+            <a:r>
+              <a:rPr sz="1200"/>
+              <a:t>Why never pooled: averaging hides exactly the effect we are trying to reduce.</a:t>
+            </a:r>
+          </a:p>
+        </p:txBody>
+      </p:sp>
+      <p:sp>
+        <p:nvSpPr>
+          <p:cNvPr id="4" name="Slide Number Placeholder 3"/>
+          <p:cNvSpPr>
+            <a:spLocks noGrp="1"/>
+          </p:cNvSpPr>
+          <p:nvPr>
+            <p:ph type="sldNum" idx="5" sz="quarter"/>
+          </p:nvPr>
+        </p:nvSpPr>
+        <p:spPr/>
+      </p:sp>
+    </p:spTree>
+  </p:cSld>
+  <p:clrMapOvr>
+    <a:masterClrMapping/>
+  </p:clrMapOvr>
+</p:notes>
+</file>
+
+<file path=ppt/notesSlides/notesSlide9.xml><?xml version="1.0" encoding="utf-8"?>
+<p:notes xmlns:a="http://schemas.openxmlformats.org/drawingml/2006/main" xmlns:p="http://schemas.openxmlformats.org/presentationml/2006/main" xmlns:r="http://schemas.openxmlformats.org/officeDocument/2006/relationships">
+  <p:cSld>
+    <p:spTree>
+      <p:nvGrpSpPr>
+        <p:cNvPr id="1" name=""/>
+        <p:cNvGrpSpPr/>
+        <p:nvPr/>
+      </p:nvGrpSpPr>
+      <p:grpSpPr>
+        <a:xfrm>
+          <a:off x="0" y="0"/>
+          <a:ext cx="0" cy="0"/>
+          <a:chOff x="0" y="0"/>
+          <a:chExt cx="0" cy="0"/>
+        </a:xfrm>
+      </p:grpSpPr>
+      <p:sp>
+        <p:nvSpPr>
+          <p:cNvPr id="2" name="Slide Image Placeholder 1"/>
+          <p:cNvSpPr>
+            <a:spLocks noGrp="1"/>
+          </p:cNvSpPr>
+          <p:nvPr>
+            <p:ph type="sldImg" idx="2"/>
+          </p:nvPr>
+        </p:nvSpPr>
+        <p:spPr/>
+      </p:sp>
+      <p:sp>
+        <p:nvSpPr>
+          <p:cNvPr id="3" name="Notes Placeholder 2"/>
+          <p:cNvSpPr>
+            <a:spLocks noGrp="1"/>
+          </p:cNvSpPr>
+          <p:nvPr>
+            <p:ph type="body" idx="3" sz="quarter"/>
+          </p:nvPr>
+        </p:nvSpPr>
+        <p:spPr/>
+        <p:txBody>
+          <a:bodyPr/>
+          <a:lstStyle/>
+          <a:p>
+            <a:r>
+              <a:rPr sz="1200"/>
+              <a:t>Say the good part briefly, then spend the time on the honest part. Volunteering the weakness here</a:t>
+            </a:r>
+          </a:p>
+          <a:p>
+            <a:r>
+              <a:rPr sz="1200"/>
+              <a:t>buys real credit with a panel.</a:t>
+            </a:r>
+          </a:p>
+          <a:p/>
+          <a:p>
+            <a:r>
+              <a:rPr sz="1200"/>
+              <a:t>The good part. A human reads the alarm and needs seconds to react, so our latency budget is</a:t>
+            </a:r>
+          </a:p>
+          <a:p>
+            <a:r>
+              <a:rPr sz="1200"/>
+              <a:t>seconds, not the 200 ms an authentication gate would need. And the cost asymmetry is clear: an app</a:t>
+            </a:r>
+          </a:p>
+          <a:p>
+            <a:r>
+              <a:rPr sz="1200"/>
+              <a:t>that cries wolf gets deleted, so false alarms cost more than misses. That decides where we sit on</a:t>
+            </a:r>
+          </a:p>
+          <a:p>
+            <a:r>
+              <a:rPr sz="1200"/>
+              <a:t>the operating curve, which is why EER alone is not our target.</a:t>
+            </a:r>
+          </a:p>
+          <a:p/>
+          <a:p>
+            <a:r>
+              <a:rPr sz="1200"/>
+              <a:t>The honest part, and say it before they ask. Android has required privileged access for the</a:t>
+            </a:r>
+          </a:p>
+          <a:p>
+            <a:r>
+              <a:rPr sz="1200"/>
+              <a:t>VOICE_CALL audio source since Android 10, so a third-party app cannot record the downlink. iOS is</a:t>
+            </a:r>
+          </a:p>
+          <a:p>
+            <a:r>
+              <a:rPr sz="1200"/>
+              <a:t>closed outright. The realistic capture path is speakerphone into the microphone, which puts a room</a:t>
+            </a:r>
+          </a:p>
+          <a:p>
+            <a:r>
+              <a:rPr sz="1200"/>
+              <a:t>between the caller and our model.</a:t>
+            </a:r>
+          </a:p>
+          <a:p/>
+          <a:p>
+            <a:r>
+              <a:rPr sz="1200"/>
+              <a:t>That costs real accuracy and it is measured: ReplayDF, Interspeech 2025. W2V2-AASIST goes from</a:t>
+            </a:r>
+          </a:p>
+          <a:p>
+            <a:r>
+              <a:rPr sz="1200"/>
+              <a:t>4.7% to 18.2% EER under replay, and is still at 11.0% after retraining with room impulse responses.</a:t>
+            </a:r>
+          </a:p>
+          <a:p/>
+          <a:p>
+            <a:r>
+              <a:rPr sz="1200"/>
+              <a:t>Our position: re-capture is simply a third distribution shift alongside corpus and channel, and it</a:t>
+            </a:r>
+          </a:p>
+          <a:p>
+            <a:r>
+              <a:rPr sz="1200"/>
+              <a:t>is the one an actual deployment forces on us. So it goes in the augmentation stack, not the</a:t>
+            </a:r>
+          </a:p>
+          <a:p>
+            <a:r>
+              <a:rPr sz="1200"/>
+              <a:t>limitations section. No published number accounts for it, which is what makes measuring it worth</a:t>
+            </a:r>
+          </a:p>
+          <a:p>
+            <a:r>
+              <a:rPr sz="1200"/>
+              <a:t>doing.</a:t>
+            </a:r>
+          </a:p>
+        </p:txBody>
+      </p:sp>
+      <p:sp>
+        <p:nvSpPr>
+          <p:cNvPr id="4" name="Slide Number Placeholder 3"/>
+          <p:cNvSpPr>
+            <a:spLocks noGrp="1"/>
+          </p:cNvSpPr>
+          <p:nvPr>
+            <p:ph type="sldNum" idx="5" sz="quarter"/>
+          </p:nvPr>
+        </p:nvSpPr>
+        <p:spPr/>
+      </p:sp>
+    </p:spTree>
+  </p:cSld>
+  <p:clrMapOvr>
+    <a:masterClrMapping/>
+  </p:clrMapOvr>
+</p:notes>
 </file>
 
 <file path=ppt/slideLayouts/slideLayout1.xml><?xml version="1.0" encoding="utf-8"?>
@@ -3157,8 +5488,8 @@
         </p:nvSpPr>
         <p:spPr>
           <a:xfrm>
-            <a:off x="795528" y="1325880"/>
-            <a:ext cx="9052560" cy="2011680"/>
+            <a:off x="795528" y="1417320"/>
+            <a:ext cx="9326880" cy="2011680"/>
           </a:xfrm>
           <a:prstGeom prst="rect">
             <a:avLst/>
@@ -3183,7 +5514,7 @@
               </a:spcAft>
             </a:pPr>
             <a:r>
-              <a:rPr sz="4600" b="1" i="0">
+              <a:rPr sz="5000" b="1" i="0">
                 <a:solidFill>
                   <a:srgbClr val="151A21"/>
                 </a:solidFill>
@@ -3203,7 +5534,7 @@
         </p:nvSpPr>
         <p:spPr>
           <a:xfrm>
-            <a:off x="795528" y="3703320"/>
+            <a:off x="795528" y="3886200"/>
             <a:ext cx="27432" cy="868680"/>
           </a:xfrm>
           <a:prstGeom prst="rect">
@@ -3245,8 +5576,8 @@
         </p:nvSpPr>
         <p:spPr>
           <a:xfrm>
-            <a:off x="1042415" y="3703320"/>
-            <a:ext cx="7863840" cy="868680"/>
+            <a:off x="1042415" y="3886200"/>
+            <a:ext cx="8595360" cy="868680"/>
           </a:xfrm>
           <a:prstGeom prst="rect">
             <a:avLst/>
@@ -3271,43 +5602,34 @@
               </a:spcAft>
             </a:pPr>
             <a:r>
-              <a:rPr sz="1600" b="0" i="0">
+              <a:rPr sz="1900" b="1" i="0">
+                <a:solidFill>
+                  <a:srgbClr val="1A6AA8"/>
+                </a:solidFill>
+                <a:latin typeface="Consolas"/>
+              </a:rPr>
+              <a:t>1.23%</a:t>
+            </a:r>
+            <a:r>
+              <a:rPr sz="1900" b="0" i="0">
                 <a:solidFill>
                   <a:srgbClr val="3C4551"/>
                 </a:solidFill>
                 <a:latin typeface="Calibri"/>
               </a:rPr>
-              <a:t>Detectors score </a:t>
-            </a:r>
-            <a:r>
-              <a:rPr sz="1600" b="1" i="0">
-                <a:solidFill>
-                  <a:srgbClr val="1A6AA8"/>
+              <a:t> on their own benchmark.   </a:t>
+            </a:r>
+            <a:r>
+              <a:rPr sz="1900" b="1" i="0">
+                <a:solidFill>
+                  <a:srgbClr val="B0392E"/>
                 </a:solidFill>
                 <a:latin typeface="Consolas"/>
               </a:rPr>
-              <a:t>1.23%</a:t>
-            </a:r>
-            <a:r>
-              <a:rPr sz="1600" b="0" i="0">
-                <a:solidFill>
-                  <a:srgbClr val="3C4551"/>
-                </a:solidFill>
-                <a:latin typeface="Calibri"/>
-              </a:rPr>
-              <a:t> on their own benchmark and </a:t>
-            </a:r>
-            <a:r>
-              <a:rPr sz="1600" b="1" i="0">
-                <a:solidFill>
-                  <a:srgbClr val="B0392E"/>
-                </a:solidFill>
-                <a:latin typeface="Consolas"/>
-              </a:rPr>
               <a:t>37%</a:t>
             </a:r>
             <a:r>
-              <a:rPr sz="1600" b="0" i="0">
+              <a:rPr sz="1900" b="0" i="0">
                 <a:solidFill>
                   <a:srgbClr val="3C4551"/>
                 </a:solidFill>
@@ -3327,8 +5649,8 @@
         </p:nvSpPr>
         <p:spPr>
           <a:xfrm>
-            <a:off x="795528" y="5212080"/>
-            <a:ext cx="2606040" cy="731520"/>
+            <a:off x="795528" y="5577840"/>
+            <a:ext cx="9144000" cy="365760"/>
           </a:xfrm>
           <a:prstGeom prst="rect">
             <a:avLst/>
@@ -3349,39 +5671,17 @@
                 <a:spcPts val="0"/>
               </a:spcBef>
               <a:spcAft>
-                <a:spcPts val="400"/>
+                <a:spcPts val="0"/>
               </a:spcAft>
             </a:pPr>
             <a:r>
-              <a:rPr sz="950" b="1" i="0">
+              <a:rPr sz="1200" b="0" i="0">
                 <a:solidFill>
                   <a:srgbClr val="6B7684"/>
                 </a:solidFill>
-                <a:latin typeface="Consolas"/>
-              </a:rPr>
-              <a:t>TEAM</a:t>
-            </a:r>
-          </a:p>
-          <a:p>
-            <a:pPr>
-              <a:lnSpc>
-                <a:spcPct val="120000"/>
-              </a:lnSpc>
-              <a:spcBef>
-                <a:spcPts val="0"/>
-              </a:spcBef>
-              <a:spcAft>
-                <a:spcPts val="0"/>
-              </a:spcAft>
-            </a:pPr>
-            <a:r>
-              <a:rPr sz="1200" b="0" i="0">
-                <a:solidFill>
-                  <a:srgbClr val="3C4551"/>
-                </a:solidFill>
                 <a:latin typeface="Calibri"/>
               </a:rPr>
-              <a:t>[names]</a:t>
+              <a:t>[names]          September 2026</a:t>
             </a:r>
           </a:p>
         </p:txBody>
@@ -3389,207 +5689,6 @@
       <p:sp>
         <p:nvSpPr>
           <p:cNvPr id="7" name="TextBox 6"/>
-          <p:cNvSpPr txBox="1"/>
-          <p:nvPr/>
-        </p:nvSpPr>
-        <p:spPr>
-          <a:xfrm>
-            <a:off x="3557016" y="5212080"/>
-            <a:ext cx="2606040" cy="731520"/>
-          </a:xfrm>
-          <a:prstGeom prst="rect">
-            <a:avLst/>
-          </a:prstGeom>
-          <a:noFill/>
-        </p:spPr>
-        <p:txBody>
-          <a:bodyPr wrap="square" lIns="0" rIns="0" tIns="0" bIns="0" anchor="t">
-            <a:spAutoFit/>
-          </a:bodyPr>
-          <a:lstStyle/>
-          <a:p>
-            <a:pPr algn="l">
-              <a:lnSpc>
-                <a:spcPct val="115000"/>
-              </a:lnSpc>
-              <a:spcBef>
-                <a:spcPts val="0"/>
-              </a:spcBef>
-              <a:spcAft>
-                <a:spcPts val="400"/>
-              </a:spcAft>
-            </a:pPr>
-            <a:r>
-              <a:rPr sz="950" b="1" i="0">
-                <a:solidFill>
-                  <a:srgbClr val="6B7684"/>
-                </a:solidFill>
-                <a:latin typeface="Consolas"/>
-              </a:rPr>
-              <a:t>RUNS ON</a:t>
-            </a:r>
-          </a:p>
-          <a:p>
-            <a:pPr>
-              <a:lnSpc>
-                <a:spcPct val="120000"/>
-              </a:lnSpc>
-              <a:spcBef>
-                <a:spcPts val="0"/>
-              </a:spcBef>
-              <a:spcAft>
-                <a:spcPts val="0"/>
-              </a:spcAft>
-            </a:pPr>
-            <a:r>
-              <a:rPr sz="1200" b="0" i="0">
-                <a:solidFill>
-                  <a:srgbClr val="3C4551"/>
-                </a:solidFill>
-                <a:latin typeface="Calibri"/>
-              </a:rPr>
-              <a:t>The callee's phone, during the call</a:t>
-            </a:r>
-          </a:p>
-        </p:txBody>
-      </p:sp>
-      <p:sp>
-        <p:nvSpPr>
-          <p:cNvPr id="8" name="TextBox 7"/>
-          <p:cNvSpPr txBox="1"/>
-          <p:nvPr/>
-        </p:nvSpPr>
-        <p:spPr>
-          <a:xfrm>
-            <a:off x="6318504" y="5212080"/>
-            <a:ext cx="2606040" cy="731520"/>
-          </a:xfrm>
-          <a:prstGeom prst="rect">
-            <a:avLst/>
-          </a:prstGeom>
-          <a:noFill/>
-        </p:spPr>
-        <p:txBody>
-          <a:bodyPr wrap="square" lIns="0" rIns="0" tIns="0" bIns="0" anchor="t">
-            <a:spAutoFit/>
-          </a:bodyPr>
-          <a:lstStyle/>
-          <a:p>
-            <a:pPr algn="l">
-              <a:lnSpc>
-                <a:spcPct val="115000"/>
-              </a:lnSpc>
-              <a:spcBef>
-                <a:spcPts val="0"/>
-              </a:spcBef>
-              <a:spcAft>
-                <a:spcPts val="400"/>
-              </a:spcAft>
-            </a:pPr>
-            <a:r>
-              <a:rPr sz="950" b="1" i="0">
-                <a:solidFill>
-                  <a:srgbClr val="6B7684"/>
-                </a:solidFill>
-                <a:latin typeface="Consolas"/>
-              </a:rPr>
-              <a:t>CORPORA</a:t>
-            </a:r>
-          </a:p>
-          <a:p>
-            <a:pPr>
-              <a:lnSpc>
-                <a:spcPct val="120000"/>
-              </a:lnSpc>
-              <a:spcBef>
-                <a:spcPts val="0"/>
-              </a:spcBef>
-              <a:spcAft>
-                <a:spcPts val="0"/>
-              </a:spcAft>
-            </a:pPr>
-            <a:r>
-              <a:rPr sz="1200" b="0" i="0">
-                <a:solidFill>
-                  <a:srgbClr val="3C4551"/>
-                </a:solidFill>
-                <a:latin typeface="Calibri"/>
-              </a:rPr>
-              <a:t>ASVspoof 2019 LA, 2021 LA, In-the-Wild</a:t>
-            </a:r>
-          </a:p>
-        </p:txBody>
-      </p:sp>
-      <p:sp>
-        <p:nvSpPr>
-          <p:cNvPr id="9" name="TextBox 8"/>
-          <p:cNvSpPr txBox="1"/>
-          <p:nvPr/>
-        </p:nvSpPr>
-        <p:spPr>
-          <a:xfrm>
-            <a:off x="9079992" y="5212080"/>
-            <a:ext cx="2606040" cy="731520"/>
-          </a:xfrm>
-          <a:prstGeom prst="rect">
-            <a:avLst/>
-          </a:prstGeom>
-          <a:noFill/>
-        </p:spPr>
-        <p:txBody>
-          <a:bodyPr wrap="square" lIns="0" rIns="0" tIns="0" bIns="0" anchor="t">
-            <a:spAutoFit/>
-          </a:bodyPr>
-          <a:lstStyle/>
-          <a:p>
-            <a:pPr algn="l">
-              <a:lnSpc>
-                <a:spcPct val="115000"/>
-              </a:lnSpc>
-              <a:spcBef>
-                <a:spcPts val="0"/>
-              </a:spcBef>
-              <a:spcAft>
-                <a:spcPts val="400"/>
-              </a:spcAft>
-            </a:pPr>
-            <a:r>
-              <a:rPr sz="950" b="1" i="0">
-                <a:solidFill>
-                  <a:srgbClr val="6B7684"/>
-                </a:solidFill>
-                <a:latin typeface="Consolas"/>
-              </a:rPr>
-              <a:t>DATE</a:t>
-            </a:r>
-          </a:p>
-          <a:p>
-            <a:pPr>
-              <a:lnSpc>
-                <a:spcPct val="120000"/>
-              </a:lnSpc>
-              <a:spcBef>
-                <a:spcPts val="0"/>
-              </a:spcBef>
-              <a:spcAft>
-                <a:spcPts val="0"/>
-              </a:spcAft>
-            </a:pPr>
-            <a:r>
-              <a:rPr sz="1200" b="0" i="0">
-                <a:solidFill>
-                  <a:srgbClr val="3C4551"/>
-                </a:solidFill>
-                <a:latin typeface="Calibri"/>
-              </a:rPr>
-              <a:t>September 2026</a:t>
-            </a:r>
-          </a:p>
-        </p:txBody>
-      </p:sp>
-      <p:sp>
-        <p:nvSpPr>
-          <p:cNvPr id="10" name="TextBox 9"/>
           <p:cNvSpPr txBox="1"/>
           <p:nvPr/>
         </p:nvSpPr>
@@ -3783,8 +5882,8 @@
         </p:nvSpPr>
         <p:spPr>
           <a:xfrm>
-            <a:off x="658368" y="2103120"/>
-            <a:ext cx="10874959" cy="1051560"/>
+            <a:off x="658368" y="2286000"/>
+            <a:ext cx="10874959" cy="1143000"/>
           </a:xfrm>
           <a:prstGeom prst="rect">
             <a:avLst/>
@@ -3825,8 +5924,8 @@
         </p:nvSpPr>
         <p:spPr>
           <a:xfrm>
-            <a:off x="658368" y="2103120"/>
-            <a:ext cx="32004" cy="1051560"/>
+            <a:off x="658368" y="2286000"/>
+            <a:ext cx="32004" cy="1143000"/>
           </a:xfrm>
           <a:prstGeom prst="rect">
             <a:avLst/>
@@ -3867,8 +5966,8 @@
         </p:nvSpPr>
         <p:spPr>
           <a:xfrm>
-            <a:off x="932688" y="2286000"/>
-            <a:ext cx="10344607" cy="685799"/>
+            <a:off x="932688" y="2468880"/>
+            <a:ext cx="10344607" cy="777240"/>
           </a:xfrm>
           <a:prstGeom prst="rect">
             <a:avLst/>
@@ -3921,7 +6020,7 @@
                 </a:solidFill>
                 <a:latin typeface="Calibri"/>
               </a:rPr>
-              <a:t>Alarm whenever one window crosses a threshold, at 5% per window and 2-second windows, and a </a:t>
+              <a:t>5% error per window, 2-second windows, and a 60-second call false-alarms </a:t>
             </a:r>
             <a:r>
               <a:rPr sz="1400" b="1" i="0">
@@ -3930,7 +6029,7 @@
                 </a:solidFill>
                 <a:latin typeface="Calibri"/>
               </a:rPr>
-              <a:t>60-second call false-alarms 79% of the time</a:t>
+              <a:t>79% of the time</a:t>
             </a:r>
             <a:r>
               <a:rPr sz="1400" b="0" i="0">
@@ -3939,7 +6038,7 @@
                 </a:solidFill>
                 <a:latin typeface="Calibri"/>
               </a:rPr>
-              <a:t>. Per-window error is the wrong number to report.</a:t>
+              <a:t>.</a:t>
             </a:r>
           </a:p>
         </p:txBody>
@@ -3952,8 +6051,8 @@
         </p:nvSpPr>
         <p:spPr>
           <a:xfrm>
-            <a:off x="658368" y="3401568"/>
-            <a:ext cx="5282031" cy="2240280"/>
+            <a:off x="658368" y="3703320"/>
+            <a:ext cx="5282031" cy="1920240"/>
           </a:xfrm>
           <a:prstGeom prst="rect">
             <a:avLst/>
@@ -3996,8 +6095,8 @@
         </p:nvSpPr>
         <p:spPr>
           <a:xfrm>
-            <a:off x="896112" y="3602736"/>
-            <a:ext cx="4806543" cy="1837944"/>
+            <a:off x="896112" y="3904487"/>
+            <a:ext cx="4806543" cy="1517904"/>
           </a:xfrm>
           <a:prstGeom prst="rect">
             <a:avLst/>
@@ -4040,11 +6139,11 @@
                 <a:spcPts val="0"/>
               </a:spcBef>
               <a:spcAft>
-                <a:spcPts val="900"/>
+                <a:spcPts val="1200"/>
               </a:spcAft>
             </a:pPr>
             <a:r>
-              <a:rPr sz="1700" b="1" i="0">
+              <a:rPr sz="1900" b="1" i="0">
                 <a:solidFill>
                   <a:srgbClr val="151A21"/>
                 </a:solidFill>
@@ -4056,45 +6155,23 @@
           <a:p>
             <a:pPr>
               <a:lnSpc>
-                <a:spcPct val="130000"/>
+                <a:spcPct val="132000"/>
               </a:lnSpc>
               <a:spcBef>
                 <a:spcPts val="0"/>
               </a:spcBef>
               <a:spcAft>
-                <a:spcPts val="900"/>
+                <a:spcPts val="0"/>
               </a:spcAft>
             </a:pPr>
             <a:r>
-              <a:rPr sz="1250" b="0" i="0">
+              <a:rPr sz="1500" b="0" i="0">
                 <a:solidFill>
                   <a:srgbClr val="3C4551"/>
                 </a:solidFill>
                 <a:latin typeface="Calibri"/>
               </a:rPr>
-              <a:t>Accumulate a likelihood ratio across windows and alarm when it crosses a boundary. Wald's sequential test, with separate raise and clear thresholds and a three-second floor.</a:t>
-            </a:r>
-          </a:p>
-          <a:p>
-            <a:pPr>
-              <a:lnSpc>
-                <a:spcPct val="130000"/>
-              </a:lnSpc>
-              <a:spcBef>
-                <a:spcPts val="0"/>
-              </a:spcBef>
-              <a:spcAft>
-                <a:spcPts val="0"/>
-              </a:spcAft>
-            </a:pPr>
-            <a:r>
-              <a:rPr sz="1250" b="1" i="0">
-                <a:solidFill>
-                  <a:srgbClr val="151A21"/>
-                </a:solidFill>
-                <a:latin typeface="Calibri"/>
-              </a:rPr>
-              <a:t>The decision arrives as soon as the evidence is enough, which is what real-time means here.</a:t>
+              <a:t>Alarm when the total crosses a boundary, not when one window does.</a:t>
             </a:r>
           </a:p>
         </p:txBody>
@@ -4107,8 +6184,8 @@
         </p:nvSpPr>
         <p:spPr>
           <a:xfrm>
-            <a:off x="6251295" y="3401568"/>
-            <a:ext cx="5282031" cy="2240280"/>
+            <a:off x="6251295" y="3703320"/>
+            <a:ext cx="5282031" cy="1920240"/>
           </a:xfrm>
           <a:prstGeom prst="rect">
             <a:avLst/>
@@ -4149,8 +6226,8 @@
         </p:nvSpPr>
         <p:spPr>
           <a:xfrm>
-            <a:off x="6489039" y="3602736"/>
-            <a:ext cx="4806543" cy="1837944"/>
+            <a:off x="6489039" y="3904487"/>
+            <a:ext cx="4806543" cy="1517904"/>
           </a:xfrm>
           <a:prstGeom prst="rect">
             <a:avLst/>
@@ -4193,110 +6270,39 @@
                 <a:spcPts val="0"/>
               </a:spcBef>
               <a:spcAft>
-                <a:spcPts val="900"/>
+                <a:spcPts val="1200"/>
               </a:spcAft>
             </a:pPr>
             <a:r>
-              <a:rPr sz="1700" b="1" i="0">
+              <a:rPr sz="1900" b="1" i="0">
                 <a:solidFill>
                   <a:srgbClr val="151A21"/>
                 </a:solidFill>
                 <a:latin typeface="Arial"/>
               </a:rPr>
-              <a:t>Three numbers, always together</a:t>
+              <a:t>Per call-minute</a:t>
             </a:r>
           </a:p>
           <a:p>
             <a:pPr>
               <a:lnSpc>
-                <a:spcPct val="130000"/>
+                <a:spcPct val="132000"/>
               </a:lnSpc>
               <a:spcBef>
                 <a:spcPts val="0"/>
               </a:spcBef>
               <a:spcAft>
-                <a:spcPts val="700"/>
+                <a:spcPts val="0"/>
               </a:spcAft>
             </a:pPr>
             <a:r>
-              <a:rPr sz="1250" b="1" i="0">
-                <a:solidFill>
-                  <a:srgbClr val="151A21"/>
+              <a:rPr sz="1500" b="0" i="0">
+                <a:solidFill>
+                  <a:srgbClr val="3C4551"/>
                 </a:solidFill>
                 <a:latin typeface="Calibri"/>
               </a:rPr>
-              <a:t>False alarms per call-minute</a:t>
-            </a:r>
-            <a:r>
-              <a:rPr sz="1250" b="0" i="0">
-                <a:solidFill>
-                  <a:srgbClr val="3C4551"/>
-                </a:solidFill>
-                <a:latin typeface="Calibri"/>
-              </a:rPr>
-              <a:t>, which is the unit that exposes the trap above.</a:t>
-            </a:r>
-          </a:p>
-          <a:p>
-            <a:pPr>
-              <a:lnSpc>
-                <a:spcPct val="130000"/>
-              </a:lnSpc>
-              <a:spcBef>
-                <a:spcPts val="0"/>
-              </a:spcBef>
-              <a:spcAft>
-                <a:spcPts val="700"/>
-              </a:spcAft>
-            </a:pPr>
-            <a:r>
-              <a:rPr sz="1250" b="1" i="0">
-                <a:solidFill>
-                  <a:srgbClr val="151A21"/>
-                </a:solidFill>
-                <a:latin typeface="Calibri"/>
-              </a:rPr>
-              <a:t>Detection rate</a:t>
-            </a:r>
-            <a:r>
-              <a:rPr sz="1250" b="0" i="0">
-                <a:solidFill>
-                  <a:srgbClr val="3C4551"/>
-                </a:solidFill>
-                <a:latin typeface="Calibri"/>
-              </a:rPr>
-              <a:t> at that operating point.</a:t>
-            </a:r>
-          </a:p>
-          <a:p>
-            <a:pPr>
-              <a:lnSpc>
-                <a:spcPct val="130000"/>
-              </a:lnSpc>
-              <a:spcBef>
-                <a:spcPts val="0"/>
-              </a:spcBef>
-              <a:spcAft>
-                <a:spcPts val="0"/>
-              </a:spcAft>
-            </a:pPr>
-            <a:r>
-              <a:rPr sz="1250" b="1" i="0">
-                <a:solidFill>
-                  <a:srgbClr val="151A21"/>
-                </a:solidFill>
-                <a:latin typeface="Calibri"/>
-              </a:rPr>
-              <a:t>Time to detection</a:t>
-            </a:r>
-            <a:r>
-              <a:rPr sz="1250" b="0" i="0">
-                <a:solidFill>
-                  <a:srgbClr val="3C4551"/>
-                </a:solidFill>
-                <a:latin typeface="Calibri"/>
-              </a:rPr>
-              <a:t>, and milliseconds per window on the phone.</a:t>
+              <a:t>False alarms, detection rate, time to detection.</a:t>
             </a:r>
           </a:p>
         </p:txBody>
@@ -4443,8 +6449,8 @@
         </p:nvSpPr>
         <p:spPr>
           <a:xfrm>
-            <a:off x="700887" y="2148840"/>
-            <a:ext cx="1645920" cy="1325880"/>
+            <a:off x="700887" y="2468880"/>
+            <a:ext cx="1645920" cy="1417320"/>
           </a:xfrm>
           <a:prstGeom prst="rect">
             <a:avLst/>
@@ -4487,8 +6493,8 @@
         </p:nvSpPr>
         <p:spPr>
           <a:xfrm>
-            <a:off x="847191" y="2295144"/>
-            <a:ext cx="1353312" cy="1051560"/>
+            <a:off x="847191" y="2651760"/>
+            <a:ext cx="1353312" cy="1097280"/>
           </a:xfrm>
           <a:prstGeom prst="rect">
             <a:avLst/>
@@ -4509,11 +6515,11 @@
                 <a:spcPts val="0"/>
               </a:spcBef>
               <a:spcAft>
-                <a:spcPts val="600"/>
+                <a:spcPts val="700"/>
               </a:spcAft>
             </a:pPr>
             <a:r>
-              <a:rPr sz="900" b="1" i="0">
+              <a:rPr sz="950" b="1" i="0">
                 <a:solidFill>
                   <a:srgbClr val="6B7684"/>
                 </a:solidFill>
@@ -4525,7 +6531,7 @@
           <a:p>
             <a:pPr>
               <a:lnSpc>
-                <a:spcPct val="124000"/>
+                <a:spcPct val="126000"/>
               </a:lnSpc>
               <a:spcBef>
                 <a:spcPts val="0"/>
@@ -4535,13 +6541,13 @@
               </a:spcAft>
             </a:pPr>
             <a:r>
-              <a:rPr sz="1100" b="0" i="0">
+              <a:rPr sz="1250" b="0" i="0">
                 <a:solidFill>
                   <a:srgbClr val="151A21"/>
                 </a:solidFill>
                 <a:latin typeface="Calibri"/>
               </a:rPr>
-              <a:t>ASVspoof 2019 LA, clean</a:t>
+              <a:t>ASVspoof 2019 LA</a:t>
             </a:r>
           </a:p>
         </p:txBody>
@@ -4554,7 +6560,7 @@
         </p:nvSpPr>
         <p:spPr>
           <a:xfrm>
-            <a:off x="2346807" y="2679192"/>
+            <a:off x="2346807" y="3063240"/>
             <a:ext cx="182880" cy="274320"/>
           </a:xfrm>
           <a:prstGeom prst="rect">
@@ -4580,7 +6586,7 @@
               </a:spcAft>
             </a:pPr>
             <a:r>
-              <a:rPr sz="1300" b="0" i="0">
+              <a:rPr sz="1400" b="0" i="0">
                 <a:solidFill>
                   <a:srgbClr val="D0D6DE"/>
                 </a:solidFill>
@@ -4599,8 +6605,8 @@
         </p:nvSpPr>
         <p:spPr>
           <a:xfrm>
-            <a:off x="2529687" y="2148840"/>
-            <a:ext cx="1645920" cy="1325880"/>
+            <a:off x="2529687" y="2468880"/>
+            <a:ext cx="1645920" cy="1417320"/>
           </a:xfrm>
           <a:prstGeom prst="rect">
             <a:avLst/>
@@ -4643,8 +6649,8 @@
         </p:nvSpPr>
         <p:spPr>
           <a:xfrm>
-            <a:off x="2675991" y="2295144"/>
-            <a:ext cx="1353312" cy="1051560"/>
+            <a:off x="2675991" y="2651760"/>
+            <a:ext cx="1353312" cy="1097280"/>
           </a:xfrm>
           <a:prstGeom prst="rect">
             <a:avLst/>
@@ -4665,11 +6671,11 @@
                 <a:spcPts val="0"/>
               </a:spcBef>
               <a:spcAft>
-                <a:spcPts val="600"/>
+                <a:spcPts val="700"/>
               </a:spcAft>
             </a:pPr>
             <a:r>
-              <a:rPr sz="900" b="1" i="0">
+              <a:rPr sz="950" b="1" i="0">
                 <a:solidFill>
                   <a:srgbClr val="9E6712"/>
                 </a:solidFill>
@@ -4681,7 +6687,7 @@
           <a:p>
             <a:pPr>
               <a:lnSpc>
-                <a:spcPct val="124000"/>
+                <a:spcPct val="126000"/>
               </a:lnSpc>
               <a:spcBef>
                 <a:spcPts val="0"/>
@@ -4691,13 +6697,13 @@
               </a:spcAft>
             </a:pPr>
             <a:r>
-              <a:rPr sz="1100" b="0" i="0">
+              <a:rPr sz="1250" b="0" i="0">
                 <a:solidFill>
                   <a:srgbClr val="151A21"/>
                 </a:solidFill>
                 <a:latin typeface="Calibri"/>
               </a:rPr>
-              <a:t>Augmentation: codec, silence, noise, room, re-capture</a:t>
+              <a:t>Augmentation: codec, silence, room</a:t>
             </a:r>
           </a:p>
         </p:txBody>
@@ -4710,7 +6716,7 @@
         </p:nvSpPr>
         <p:spPr>
           <a:xfrm>
-            <a:off x="4175607" y="2679192"/>
+            <a:off x="4175607" y="3063240"/>
             <a:ext cx="182880" cy="274320"/>
           </a:xfrm>
           <a:prstGeom prst="rect">
@@ -4736,7 +6742,7 @@
               </a:spcAft>
             </a:pPr>
             <a:r>
-              <a:rPr sz="1300" b="0" i="0">
+              <a:rPr sz="1400" b="0" i="0">
                 <a:solidFill>
                   <a:srgbClr val="D0D6DE"/>
                 </a:solidFill>
@@ -4755,8 +6761,8 @@
         </p:nvSpPr>
         <p:spPr>
           <a:xfrm>
-            <a:off x="4358487" y="2148840"/>
-            <a:ext cx="1645920" cy="1325880"/>
+            <a:off x="4358487" y="2468880"/>
+            <a:ext cx="1645920" cy="1417320"/>
           </a:xfrm>
           <a:prstGeom prst="rect">
             <a:avLst/>
@@ -4799,8 +6805,8 @@
         </p:nvSpPr>
         <p:spPr>
           <a:xfrm>
-            <a:off x="4504791" y="2295144"/>
-            <a:ext cx="1353312" cy="1051560"/>
+            <a:off x="4504791" y="2651760"/>
+            <a:ext cx="1353312" cy="1097280"/>
           </a:xfrm>
           <a:prstGeom prst="rect">
             <a:avLst/>
@@ -4821,11 +6827,11 @@
                 <a:spcPts val="0"/>
               </a:spcBef>
               <a:spcAft>
-                <a:spcPts val="600"/>
+                <a:spcPts val="700"/>
               </a:spcAft>
             </a:pPr>
             <a:r>
-              <a:rPr sz="900" b="1" i="0">
+              <a:rPr sz="950" b="1" i="0">
                 <a:solidFill>
                   <a:srgbClr val="6B7684"/>
                 </a:solidFill>
@@ -4837,7 +6843,7 @@
           <a:p>
             <a:pPr>
               <a:lnSpc>
-                <a:spcPct val="124000"/>
+                <a:spcPct val="126000"/>
               </a:lnSpc>
               <a:spcBef>
                 <a:spcPts val="0"/>
@@ -4847,7 +6853,7 @@
               </a:spcAft>
             </a:pPr>
             <a:r>
-              <a:rPr sz="1100" b="0" i="0">
+              <a:rPr sz="1250" b="0" i="0">
                 <a:solidFill>
                   <a:srgbClr val="151A21"/>
                 </a:solidFill>
@@ -4866,7 +6872,7 @@
         </p:nvSpPr>
         <p:spPr>
           <a:xfrm>
-            <a:off x="6004407" y="2679192"/>
+            <a:off x="6004407" y="3063240"/>
             <a:ext cx="182880" cy="274320"/>
           </a:xfrm>
           <a:prstGeom prst="rect">
@@ -4892,7 +6898,7 @@
               </a:spcAft>
             </a:pPr>
             <a:r>
-              <a:rPr sz="1300" b="0" i="0">
+              <a:rPr sz="1400" b="0" i="0">
                 <a:solidFill>
                   <a:srgbClr val="D0D6DE"/>
                 </a:solidFill>
@@ -4911,8 +6917,8 @@
         </p:nvSpPr>
         <p:spPr>
           <a:xfrm>
-            <a:off x="6187287" y="2148840"/>
-            <a:ext cx="1645920" cy="1325880"/>
+            <a:off x="6187287" y="2468880"/>
+            <a:ext cx="1645920" cy="1417320"/>
           </a:xfrm>
           <a:prstGeom prst="rect">
             <a:avLst/>
@@ -4955,8 +6961,8 @@
         </p:nvSpPr>
         <p:spPr>
           <a:xfrm>
-            <a:off x="6333591" y="2295144"/>
-            <a:ext cx="1353312" cy="1051560"/>
+            <a:off x="6333591" y="2651760"/>
+            <a:ext cx="1353312" cy="1097280"/>
           </a:xfrm>
           <a:prstGeom prst="rect">
             <a:avLst/>
@@ -4977,11 +6983,11 @@
                 <a:spcPts val="0"/>
               </a:spcBef>
               <a:spcAft>
-                <a:spcPts val="600"/>
+                <a:spcPts val="700"/>
               </a:spcAft>
             </a:pPr>
             <a:r>
-              <a:rPr sz="900" b="1" i="0">
+              <a:rPr sz="950" b="1" i="0">
                 <a:solidFill>
                   <a:srgbClr val="9E6712"/>
                 </a:solidFill>
@@ -4993,7 +6999,7 @@
           <a:p>
             <a:pPr>
               <a:lnSpc>
-                <a:spcPct val="124000"/>
+                <a:spcPct val="126000"/>
               </a:lnSpc>
               <a:spcBef>
                 <a:spcPts val="0"/>
@@ -5003,13 +7009,13 @@
               </a:spcAft>
             </a:pPr>
             <a:r>
-              <a:rPr sz="1100" b="0" i="0">
+              <a:rPr sz="1250" b="0" i="0">
                 <a:solidFill>
                   <a:srgbClr val="151A21"/>
                 </a:solidFill>
                 <a:latin typeface="Calibri"/>
               </a:rPr>
-              <a:t>RawNet2, then AASIST, SSL, one-class</a:t>
+              <a:t>RawNet2, AASIST, SSL</a:t>
             </a:r>
           </a:p>
         </p:txBody>
@@ -5022,7 +7028,7 @@
         </p:nvSpPr>
         <p:spPr>
           <a:xfrm>
-            <a:off x="7833207" y="2679192"/>
+            <a:off x="7833207" y="3063240"/>
             <a:ext cx="182880" cy="274320"/>
           </a:xfrm>
           <a:prstGeom prst="rect">
@@ -5048,7 +7054,7 @@
               </a:spcAft>
             </a:pPr>
             <a:r>
-              <a:rPr sz="1300" b="0" i="0">
+              <a:rPr sz="1400" b="0" i="0">
                 <a:solidFill>
                   <a:srgbClr val="D0D6DE"/>
                 </a:solidFill>
@@ -5067,8 +7073,8 @@
         </p:nvSpPr>
         <p:spPr>
           <a:xfrm>
-            <a:off x="8016087" y="2148840"/>
-            <a:ext cx="1645920" cy="1325880"/>
+            <a:off x="8016087" y="2468880"/>
+            <a:ext cx="1645920" cy="1417320"/>
           </a:xfrm>
           <a:prstGeom prst="rect">
             <a:avLst/>
@@ -5111,8 +7117,8 @@
         </p:nvSpPr>
         <p:spPr>
           <a:xfrm>
-            <a:off x="8162391" y="2295144"/>
-            <a:ext cx="1353312" cy="1051560"/>
+            <a:off x="8162391" y="2651760"/>
+            <a:ext cx="1353312" cy="1097280"/>
           </a:xfrm>
           <a:prstGeom prst="rect">
             <a:avLst/>
@@ -5133,11 +7139,11 @@
                 <a:spcPts val="0"/>
               </a:spcBef>
               <a:spcAft>
-                <a:spcPts val="600"/>
+                <a:spcPts val="700"/>
               </a:spcAft>
             </a:pPr>
             <a:r>
-              <a:rPr sz="900" b="1" i="0">
+              <a:rPr sz="950" b="1" i="0">
                 <a:solidFill>
                   <a:srgbClr val="9E6712"/>
                 </a:solidFill>
@@ -5149,7 +7155,7 @@
           <a:p>
             <a:pPr>
               <a:lnSpc>
-                <a:spcPct val="124000"/>
+                <a:spcPct val="126000"/>
               </a:lnSpc>
               <a:spcBef>
                 <a:spcPts val="0"/>
@@ -5159,13 +7165,13 @@
               </a:spcAft>
             </a:pPr>
             <a:r>
-              <a:rPr sz="1100" b="0" i="0">
+              <a:rPr sz="1250" b="0" i="0">
                 <a:solidFill>
                   <a:srgbClr val="151A21"/>
                 </a:solidFill>
                 <a:latin typeface="Calibri"/>
               </a:rPr>
-              <a:t>Evidence accumulated over windows</a:t>
+              <a:t>Evidence over windows</a:t>
             </a:r>
           </a:p>
         </p:txBody>
@@ -5178,7 +7184,7 @@
         </p:nvSpPr>
         <p:spPr>
           <a:xfrm>
-            <a:off x="9662007" y="2679192"/>
+            <a:off x="9662007" y="3063240"/>
             <a:ext cx="182880" cy="274320"/>
           </a:xfrm>
           <a:prstGeom prst="rect">
@@ -5204,7 +7210,7 @@
               </a:spcAft>
             </a:pPr>
             <a:r>
-              <a:rPr sz="1300" b="0" i="0">
+              <a:rPr sz="1400" b="0" i="0">
                 <a:solidFill>
                   <a:srgbClr val="D0D6DE"/>
                 </a:solidFill>
@@ -5223,8 +7229,8 @@
         </p:nvSpPr>
         <p:spPr>
           <a:xfrm>
-            <a:off x="9844887" y="2148840"/>
-            <a:ext cx="1645920" cy="1325880"/>
+            <a:off x="9844887" y="2468880"/>
+            <a:ext cx="1645920" cy="1417320"/>
           </a:xfrm>
           <a:prstGeom prst="rect">
             <a:avLst/>
@@ -5267,8 +7273,8 @@
         </p:nvSpPr>
         <p:spPr>
           <a:xfrm>
-            <a:off x="9991191" y="2295144"/>
-            <a:ext cx="1353312" cy="1051560"/>
+            <a:off x="9991191" y="2651760"/>
+            <a:ext cx="1353312" cy="1097280"/>
           </a:xfrm>
           <a:prstGeom prst="rect">
             <a:avLst/>
@@ -5289,11 +7295,11 @@
                 <a:spcPts val="0"/>
               </a:spcBef>
               <a:spcAft>
-                <a:spcPts val="600"/>
+                <a:spcPts val="700"/>
               </a:spcAft>
             </a:pPr>
             <a:r>
-              <a:rPr sz="900" b="1" i="0">
+              <a:rPr sz="950" b="1" i="0">
                 <a:solidFill>
                   <a:srgbClr val="6B7684"/>
                 </a:solidFill>
@@ -5305,7 +7311,7 @@
           <a:p>
             <a:pPr>
               <a:lnSpc>
-                <a:spcPct val="124000"/>
+                <a:spcPct val="126000"/>
               </a:lnSpc>
               <a:spcBef>
                 <a:spcPts val="0"/>
@@ -5315,13 +7321,13 @@
               </a:spcAft>
             </a:pPr>
             <a:r>
-              <a:rPr sz="1100" b="0" i="0">
+              <a:rPr sz="1250" b="0" i="0">
                 <a:solidFill>
                   <a:srgbClr val="151A21"/>
                 </a:solidFill>
                 <a:latin typeface="Calibri"/>
               </a:rPr>
-              <a:t>A risk score, not a verdict</a:t>
+              <a:t>A risk score</a:t>
             </a:r>
           </a:p>
         </p:txBody>
@@ -5334,8 +7340,8 @@
         </p:nvSpPr>
         <p:spPr>
           <a:xfrm>
-            <a:off x="658368" y="3794760"/>
-            <a:ext cx="5282031" cy="1783080"/>
+            <a:off x="658368" y="4315968"/>
+            <a:ext cx="5282031" cy="1664208"/>
           </a:xfrm>
           <a:prstGeom prst="rect">
             <a:avLst/>
@@ -5376,8 +7382,8 @@
         </p:nvSpPr>
         <p:spPr>
           <a:xfrm>
-            <a:off x="896112" y="3995928"/>
-            <a:ext cx="4806543" cy="1380744"/>
+            <a:off x="896112" y="4517136"/>
+            <a:ext cx="4806543" cy="1261872"/>
           </a:xfrm>
           <a:prstGeom prst="rect">
             <a:avLst/>
@@ -5414,81 +7420,42 @@
           <a:p>
             <a:pPr>
               <a:lnSpc>
-                <a:spcPct val="130000"/>
+                <a:spcPct val="134000"/>
               </a:lnSpc>
               <a:spcBef>
                 <a:spcPts val="0"/>
               </a:spcBef>
               <a:spcAft>
-                <a:spcPts val="900"/>
+                <a:spcPts val="0"/>
               </a:spcAft>
             </a:pPr>
             <a:r>
-              <a:rPr sz="1300" b="1" i="0">
+              <a:rPr sz="1600" b="0" i="0">
+                <a:solidFill>
+                  <a:srgbClr val="3C4551"/>
+                </a:solidFill>
+                <a:latin typeface="Calibri"/>
+              </a:rPr>
+              <a:t>Seven codecs plus </a:t>
+            </a:r>
+            <a:r>
+              <a:rPr sz="1600" b="1" i="0">
                 <a:solidFill>
                   <a:srgbClr val="151A21"/>
                 </a:solidFill>
                 <a:latin typeface="Calibri"/>
               </a:rPr>
-              <a:t>Bandwidth: </a:t>
-            </a:r>
-            <a:r>
-              <a:rPr sz="1300" b="0" i="0">
+              <a:t>AMR</a:t>
+            </a:r>
+            <a:r>
+              <a:rPr sz="1600" b="0" i="0">
                 <a:solidFill>
                   <a:srgbClr val="3C4551"/>
                 </a:solidFill>
                 <a:latin typeface="Calibri"/>
               </a:rPr>
-              <a:t>clean 16k, G.722, Opus, a-law, μ-law, GSM, and </a:t>
-            </a:r>
-            <a:r>
-              <a:rPr sz="1300" b="1" i="0">
-                <a:solidFill>
-                  <a:srgbClr val="151A21"/>
-                </a:solidFill>
-                <a:latin typeface="Calibri"/>
-              </a:rPr>
-              <a:t>AMR</a:t>
-            </a:r>
-            <a:r>
-              <a:rPr sz="1300" b="0" i="0">
-                <a:solidFill>
-                  <a:srgbClr val="3C4551"/>
-                </a:solidFill>
-                <a:latin typeface="Calibri"/>
-              </a:rPr>
-              <a:t>, which no ASVspoof edition covers and which is what mobile calls actually use.</a:t>
-            </a:r>
-          </a:p>
-          <a:p>
-            <a:pPr>
-              <a:lnSpc>
-                <a:spcPct val="130000"/>
-              </a:lnSpc>
-              <a:spcBef>
-                <a:spcPts val="0"/>
-              </a:spcBef>
-              <a:spcAft>
-                <a:spcPts val="0"/>
-              </a:spcAft>
-            </a:pPr>
-            <a:r>
-              <a:rPr sz="1300" b="1" i="0">
-                <a:solidFill>
-                  <a:srgbClr val="151A21"/>
-                </a:solidFill>
-                <a:latin typeface="Calibri"/>
-              </a:rPr>
-              <a:t>Window length: </a:t>
-            </a:r>
-            <a:r>
-              <a:rPr sz="1300" b="0" i="0">
-                <a:solidFill>
-                  <a:srgbClr val="3C4551"/>
-                </a:solidFill>
-                <a:latin typeface="Calibri"/>
-              </a:rPr>
-              <a:t>full, 4 s, 2 s, 1 s. Accuracy against latency.</a:t>
+              <a:t>, which no ASVspoof edition covers.
+Window length: full, 4 s, 2 s, 1 s.</a:t>
             </a:r>
           </a:p>
         </p:txBody>
@@ -5501,8 +7468,8 @@
         </p:nvSpPr>
         <p:spPr>
           <a:xfrm>
-            <a:off x="6251295" y="3794760"/>
-            <a:ext cx="5282031" cy="1783080"/>
+            <a:off x="6251295" y="4315968"/>
+            <a:ext cx="5282031" cy="1664208"/>
           </a:xfrm>
           <a:prstGeom prst="rect">
             <a:avLst/>
@@ -5543,8 +7510,8 @@
         </p:nvSpPr>
         <p:spPr>
           <a:xfrm>
-            <a:off x="6489039" y="3995928"/>
-            <a:ext cx="4806543" cy="1380744"/>
+            <a:off x="6489039" y="4517136"/>
+            <a:ext cx="4806543" cy="1261872"/>
           </a:xfrm>
           <a:prstGeom prst="rect">
             <a:avLst/>
@@ -5581,90 +7548,23 @@
           <a:p>
             <a:pPr>
               <a:lnSpc>
-                <a:spcPct val="130000"/>
+                <a:spcPct val="134000"/>
               </a:lnSpc>
               <a:spcBef>
                 <a:spcPts val="0"/>
               </a:spcBef>
               <a:spcAft>
-                <a:spcPts val="900"/>
+                <a:spcPts val="0"/>
               </a:spcAft>
             </a:pPr>
             <a:r>
-              <a:rPr sz="1300" b="0" i="0">
+              <a:rPr sz="1600" b="0" i="0">
                 <a:solidFill>
                   <a:srgbClr val="3C4551"/>
                 </a:solidFill>
                 <a:latin typeface="Calibri"/>
               </a:rPr>
-              <a:t>In-the-Wild, the held-out attack family, and a small probe of modern cloned voices built from our own consented recordings.</a:t>
-            </a:r>
-          </a:p>
-          <a:p>
-            <a:pPr>
-              <a:lnSpc>
-                <a:spcPct val="130000"/>
-              </a:lnSpc>
-              <a:spcBef>
-                <a:spcPts val="0"/>
-              </a:spcBef>
-              <a:spcAft>
-                <a:spcPts val="0"/>
-              </a:spcAft>
-            </a:pPr>
-            <a:r>
-              <a:rPr sz="1300" b="1" i="0">
-                <a:solidFill>
-                  <a:srgbClr val="151A21"/>
-                </a:solidFill>
-                <a:latin typeface="Calibri"/>
-              </a:rPr>
-              <a:t>Reported per generator, never pooled.</a:t>
-            </a:r>
-          </a:p>
-        </p:txBody>
-      </p:sp>
-      <p:sp>
-        <p:nvSpPr>
-          <p:cNvPr id="25" name="TextBox 24"/>
-          <p:cNvSpPr txBox="1"/>
-          <p:nvPr/>
-        </p:nvSpPr>
-        <p:spPr>
-          <a:xfrm>
-            <a:off x="658368" y="6144768"/>
-            <a:ext cx="10874959" cy="502920"/>
-          </a:xfrm>
-          <a:prstGeom prst="rect">
-            <a:avLst/>
-          </a:prstGeom>
-          <a:noFill/>
-        </p:spPr>
-        <p:txBody>
-          <a:bodyPr wrap="square" lIns="0" rIns="0" tIns="0" bIns="0" anchor="t">
-            <a:spAutoFit/>
-          </a:bodyPr>
-          <a:lstStyle/>
-          <a:p>
-            <a:pPr algn="l">
-              <a:lnSpc>
-                <a:spcPct val="125000"/>
-              </a:lnSpc>
-              <a:spcBef>
-                <a:spcPts val="0"/>
-              </a:spcBef>
-              <a:spcAft>
-                <a:spcPts val="0"/>
-              </a:spcAft>
-            </a:pPr>
-            <a:r>
-              <a:rPr sz="1050" b="0" i="0">
-                <a:solidFill>
-                  <a:srgbClr val="6B7684"/>
-                </a:solidFill>
-                <a:latin typeface="Calibri"/>
-              </a:rPr>
-              <a:t>Every codec is already in the ffmpeg build on our machine, and 2021 LA ships the codec label per trial. The sweep costs us no setup.</a:t>
+              <a:t>In-the-Wild, the held-out attacks, and a small probe of modern cloned voices.</a:t>
             </a:r>
           </a:p>
         </p:txBody>
@@ -5753,7 +7653,7 @@
                 </a:solidFill>
                 <a:latin typeface="Consolas"/>
               </a:rPr>
-              <a:t>CONCLUSION</a:t>
+              <a:t>PLAN</a:t>
             </a:r>
           </a:p>
         </p:txBody>
@@ -5798,6 +7698,1112 @@
                 </a:solidFill>
                 <a:latin typeface="Arial"/>
               </a:rPr>
+              <a:t>Twelve weeks.</a:t>
+            </a:r>
+          </a:p>
+        </p:txBody>
+      </p:sp>
+      <p:sp>
+        <p:nvSpPr>
+          <p:cNvPr id="4" name="TextBox 3"/>
+          <p:cNvSpPr txBox="1"/>
+          <p:nvPr/>
+        </p:nvSpPr>
+        <p:spPr>
+          <a:xfrm>
+            <a:off x="658368" y="2999232"/>
+            <a:ext cx="906246" cy="219456"/>
+          </a:xfrm>
+          <a:prstGeom prst="rect">
+            <a:avLst/>
+          </a:prstGeom>
+          <a:noFill/>
+        </p:spPr>
+        <p:txBody>
+          <a:bodyPr wrap="square" lIns="0" rIns="0" tIns="0" bIns="0" anchor="t">
+            <a:spAutoFit/>
+          </a:bodyPr>
+          <a:lstStyle/>
+          <a:p>
+            <a:pPr algn="ctr">
+              <a:lnSpc>
+                <a:spcPct val="115000"/>
+              </a:lnSpc>
+              <a:spcBef>
+                <a:spcPts val="0"/>
+              </a:spcBef>
+              <a:spcAft>
+                <a:spcPts val="0"/>
+              </a:spcAft>
+            </a:pPr>
+            <a:r>
+              <a:rPr sz="950" b="0" i="0">
+                <a:solidFill>
+                  <a:srgbClr val="6B7684"/>
+                </a:solidFill>
+                <a:latin typeface="Consolas"/>
+              </a:rPr>
+              <a:t>WEEK 1</a:t>
+            </a:r>
+          </a:p>
+        </p:txBody>
+      </p:sp>
+      <p:sp>
+        <p:nvSpPr>
+          <p:cNvPr id="5" name="Rectangle 4"/>
+          <p:cNvSpPr/>
+          <p:nvPr/>
+        </p:nvSpPr>
+        <p:spPr>
+          <a:xfrm>
+            <a:off x="685800" y="3291840"/>
+            <a:ext cx="851382" cy="1051560"/>
+          </a:xfrm>
+          <a:prstGeom prst="rect">
+            <a:avLst/>
+          </a:prstGeom>
+          <a:solidFill>
+            <a:srgbClr val="F1F3F6"/>
+          </a:solidFill>
+          <a:ln>
+            <a:noFill/>
+          </a:ln>
+          <a:effectLst/>
+        </p:spPr>
+        <p:style>
+          <a:lnRef idx="1">
+            <a:schemeClr val="accent1"/>
+          </a:lnRef>
+          <a:fillRef idx="3">
+            <a:schemeClr val="accent1"/>
+          </a:fillRef>
+          <a:effectRef idx="2">
+            <a:schemeClr val="accent1"/>
+          </a:effectRef>
+          <a:fontRef idx="minor">
+            <a:schemeClr val="lt1"/>
+          </a:fontRef>
+        </p:style>
+        <p:txBody>
+          <a:bodyPr rtlCol="0" anchor="ctr"/>
+          <a:lstStyle/>
+          <a:p/>
+        </p:txBody>
+      </p:sp>
+      <p:sp>
+        <p:nvSpPr>
+          <p:cNvPr id="6" name="TextBox 5"/>
+          <p:cNvSpPr txBox="1"/>
+          <p:nvPr/>
+        </p:nvSpPr>
+        <p:spPr>
+          <a:xfrm>
+            <a:off x="749808" y="3657600"/>
+            <a:ext cx="723366" cy="365760"/>
+          </a:xfrm>
+          <a:prstGeom prst="rect">
+            <a:avLst/>
+          </a:prstGeom>
+          <a:noFill/>
+        </p:spPr>
+        <p:txBody>
+          <a:bodyPr wrap="square" lIns="0" rIns="0" tIns="0" bIns="0" anchor="t">
+            <a:spAutoFit/>
+          </a:bodyPr>
+          <a:lstStyle/>
+          <a:p>
+            <a:pPr algn="ctr">
+              <a:lnSpc>
+                <a:spcPct val="115000"/>
+              </a:lnSpc>
+              <a:spcBef>
+                <a:spcPts val="0"/>
+              </a:spcBef>
+              <a:spcAft>
+                <a:spcPts val="0"/>
+              </a:spcAft>
+            </a:pPr>
+            <a:r>
+              <a:rPr sz="1450" b="1" i="0">
+                <a:solidFill>
+                  <a:srgbClr val="6B7684"/>
+                </a:solidFill>
+                <a:latin typeface="Calibri"/>
+              </a:rPr>
+              <a:t>Proposal</a:t>
+            </a:r>
+          </a:p>
+        </p:txBody>
+      </p:sp>
+      <p:sp>
+        <p:nvSpPr>
+          <p:cNvPr id="7" name="TextBox 6"/>
+          <p:cNvSpPr txBox="1"/>
+          <p:nvPr/>
+        </p:nvSpPr>
+        <p:spPr>
+          <a:xfrm>
+            <a:off x="1564614" y="2999232"/>
+            <a:ext cx="2718739" cy="219456"/>
+          </a:xfrm>
+          <a:prstGeom prst="rect">
+            <a:avLst/>
+          </a:prstGeom>
+          <a:noFill/>
+        </p:spPr>
+        <p:txBody>
+          <a:bodyPr wrap="square" lIns="0" rIns="0" tIns="0" bIns="0" anchor="t">
+            <a:spAutoFit/>
+          </a:bodyPr>
+          <a:lstStyle/>
+          <a:p>
+            <a:pPr algn="ctr">
+              <a:lnSpc>
+                <a:spcPct val="115000"/>
+              </a:lnSpc>
+              <a:spcBef>
+                <a:spcPts val="0"/>
+              </a:spcBef>
+              <a:spcAft>
+                <a:spcPts val="0"/>
+              </a:spcAft>
+            </a:pPr>
+            <a:r>
+              <a:rPr sz="950" b="0" i="0">
+                <a:solidFill>
+                  <a:srgbClr val="6B7684"/>
+                </a:solidFill>
+                <a:latin typeface="Consolas"/>
+              </a:rPr>
+              <a:t>WEEKS 2-4</a:t>
+            </a:r>
+          </a:p>
+        </p:txBody>
+      </p:sp>
+      <p:sp>
+        <p:nvSpPr>
+          <p:cNvPr id="8" name="Rectangle 7"/>
+          <p:cNvSpPr/>
+          <p:nvPr/>
+        </p:nvSpPr>
+        <p:spPr>
+          <a:xfrm>
+            <a:off x="1592046" y="3291840"/>
+            <a:ext cx="2663875" cy="1051560"/>
+          </a:xfrm>
+          <a:prstGeom prst="rect">
+            <a:avLst/>
+          </a:prstGeom>
+          <a:solidFill>
+            <a:srgbClr val="E6EEF6"/>
+          </a:solidFill>
+          <a:ln>
+            <a:noFill/>
+          </a:ln>
+          <a:effectLst/>
+        </p:spPr>
+        <p:style>
+          <a:lnRef idx="1">
+            <a:schemeClr val="accent1"/>
+          </a:lnRef>
+          <a:fillRef idx="3">
+            <a:schemeClr val="accent1"/>
+          </a:fillRef>
+          <a:effectRef idx="2">
+            <a:schemeClr val="accent1"/>
+          </a:effectRef>
+          <a:fontRef idx="minor">
+            <a:schemeClr val="lt1"/>
+          </a:fontRef>
+        </p:style>
+        <p:txBody>
+          <a:bodyPr rtlCol="0" anchor="ctr"/>
+          <a:lstStyle/>
+          <a:p/>
+        </p:txBody>
+      </p:sp>
+      <p:sp>
+        <p:nvSpPr>
+          <p:cNvPr id="9" name="TextBox 8"/>
+          <p:cNvSpPr txBox="1"/>
+          <p:nvPr/>
+        </p:nvSpPr>
+        <p:spPr>
+          <a:xfrm>
+            <a:off x="1656054" y="3657600"/>
+            <a:ext cx="2535859" cy="365760"/>
+          </a:xfrm>
+          <a:prstGeom prst="rect">
+            <a:avLst/>
+          </a:prstGeom>
+          <a:noFill/>
+        </p:spPr>
+        <p:txBody>
+          <a:bodyPr wrap="square" lIns="0" rIns="0" tIns="0" bIns="0" anchor="t">
+            <a:spAutoFit/>
+          </a:bodyPr>
+          <a:lstStyle/>
+          <a:p>
+            <a:pPr algn="ctr">
+              <a:lnSpc>
+                <a:spcPct val="115000"/>
+              </a:lnSpc>
+              <a:spcBef>
+                <a:spcPts val="0"/>
+              </a:spcBef>
+              <a:spcAft>
+                <a:spcPts val="0"/>
+              </a:spcAft>
+            </a:pPr>
+            <a:r>
+              <a:rPr sz="1450" b="1" i="0">
+                <a:solidFill>
+                  <a:srgbClr val="1A6AA8"/>
+                </a:solidFill>
+                <a:latin typeface="Calibri"/>
+              </a:rPr>
+              <a:t>Baseline</a:t>
+            </a:r>
+          </a:p>
+        </p:txBody>
+      </p:sp>
+      <p:sp>
+        <p:nvSpPr>
+          <p:cNvPr id="10" name="TextBox 9"/>
+          <p:cNvSpPr txBox="1"/>
+          <p:nvPr/>
+        </p:nvSpPr>
+        <p:spPr>
+          <a:xfrm>
+            <a:off x="1619478" y="4480560"/>
+            <a:ext cx="2609011" cy="457200"/>
+          </a:xfrm>
+          <a:prstGeom prst="rect">
+            <a:avLst/>
+          </a:prstGeom>
+          <a:noFill/>
+        </p:spPr>
+        <p:txBody>
+          <a:bodyPr wrap="square" lIns="0" rIns="0" tIns="0" bIns="0" anchor="t">
+            <a:spAutoFit/>
+          </a:bodyPr>
+          <a:lstStyle/>
+          <a:p>
+            <a:pPr algn="ctr">
+              <a:lnSpc>
+                <a:spcPct val="125000"/>
+              </a:lnSpc>
+              <a:spcBef>
+                <a:spcPts val="0"/>
+              </a:spcBef>
+              <a:spcAft>
+                <a:spcPts val="0"/>
+              </a:spcAft>
+            </a:pPr>
+            <a:r>
+              <a:rPr sz="1200" b="0" i="0">
+                <a:solidFill>
+                  <a:srgbClr val="3C4551"/>
+                </a:solidFill>
+                <a:latin typeface="Calibri"/>
+              </a:rPr>
+              <a:t>reproduce published EER</a:t>
+            </a:r>
+          </a:p>
+        </p:txBody>
+      </p:sp>
+      <p:sp>
+        <p:nvSpPr>
+          <p:cNvPr id="11" name="TextBox 10"/>
+          <p:cNvSpPr txBox="1"/>
+          <p:nvPr/>
+        </p:nvSpPr>
+        <p:spPr>
+          <a:xfrm>
+            <a:off x="4283354" y="2999232"/>
+            <a:ext cx="2718739" cy="219456"/>
+          </a:xfrm>
+          <a:prstGeom prst="rect">
+            <a:avLst/>
+          </a:prstGeom>
+          <a:noFill/>
+        </p:spPr>
+        <p:txBody>
+          <a:bodyPr wrap="square" lIns="0" rIns="0" tIns="0" bIns="0" anchor="t">
+            <a:spAutoFit/>
+          </a:bodyPr>
+          <a:lstStyle/>
+          <a:p>
+            <a:pPr algn="ctr">
+              <a:lnSpc>
+                <a:spcPct val="115000"/>
+              </a:lnSpc>
+              <a:spcBef>
+                <a:spcPts val="0"/>
+              </a:spcBef>
+              <a:spcAft>
+                <a:spcPts val="0"/>
+              </a:spcAft>
+            </a:pPr>
+            <a:r>
+              <a:rPr sz="950" b="0" i="0">
+                <a:solidFill>
+                  <a:srgbClr val="6B7684"/>
+                </a:solidFill>
+                <a:latin typeface="Consolas"/>
+              </a:rPr>
+              <a:t>WEEKS 5-7</a:t>
+            </a:r>
+          </a:p>
+        </p:txBody>
+      </p:sp>
+      <p:sp>
+        <p:nvSpPr>
+          <p:cNvPr id="12" name="Rectangle 11"/>
+          <p:cNvSpPr/>
+          <p:nvPr/>
+        </p:nvSpPr>
+        <p:spPr>
+          <a:xfrm>
+            <a:off x="4310786" y="3291840"/>
+            <a:ext cx="2663875" cy="1051560"/>
+          </a:xfrm>
+          <a:prstGeom prst="rect">
+            <a:avLst/>
+          </a:prstGeom>
+          <a:solidFill>
+            <a:srgbClr val="9E6712"/>
+          </a:solidFill>
+          <a:ln>
+            <a:noFill/>
+          </a:ln>
+          <a:effectLst/>
+        </p:spPr>
+        <p:style>
+          <a:lnRef idx="1">
+            <a:schemeClr val="accent1"/>
+          </a:lnRef>
+          <a:fillRef idx="3">
+            <a:schemeClr val="accent1"/>
+          </a:fillRef>
+          <a:effectRef idx="2">
+            <a:schemeClr val="accent1"/>
+          </a:effectRef>
+          <a:fontRef idx="minor">
+            <a:schemeClr val="lt1"/>
+          </a:fontRef>
+        </p:style>
+        <p:txBody>
+          <a:bodyPr rtlCol="0" anchor="ctr"/>
+          <a:lstStyle/>
+          <a:p/>
+        </p:txBody>
+      </p:sp>
+      <p:sp>
+        <p:nvSpPr>
+          <p:cNvPr id="13" name="TextBox 12"/>
+          <p:cNvSpPr txBox="1"/>
+          <p:nvPr/>
+        </p:nvSpPr>
+        <p:spPr>
+          <a:xfrm>
+            <a:off x="4374794" y="3657600"/>
+            <a:ext cx="2535859" cy="365760"/>
+          </a:xfrm>
+          <a:prstGeom prst="rect">
+            <a:avLst/>
+          </a:prstGeom>
+          <a:noFill/>
+        </p:spPr>
+        <p:txBody>
+          <a:bodyPr wrap="square" lIns="0" rIns="0" tIns="0" bIns="0" anchor="t">
+            <a:spAutoFit/>
+          </a:bodyPr>
+          <a:lstStyle/>
+          <a:p>
+            <a:pPr algn="ctr">
+              <a:lnSpc>
+                <a:spcPct val="115000"/>
+              </a:lnSpc>
+              <a:spcBef>
+                <a:spcPts val="0"/>
+              </a:spcBef>
+              <a:spcAft>
+                <a:spcPts val="0"/>
+              </a:spcAft>
+            </a:pPr>
+            <a:r>
+              <a:rPr sz="1450" b="1" i="0">
+                <a:solidFill>
+                  <a:srgbClr val="FFFFFF"/>
+                </a:solidFill>
+                <a:latin typeface="Calibri"/>
+              </a:rPr>
+              <a:t>Augmentation</a:t>
+            </a:r>
+          </a:p>
+        </p:txBody>
+      </p:sp>
+      <p:sp>
+        <p:nvSpPr>
+          <p:cNvPr id="14" name="TextBox 13"/>
+          <p:cNvSpPr txBox="1"/>
+          <p:nvPr/>
+        </p:nvSpPr>
+        <p:spPr>
+          <a:xfrm>
+            <a:off x="4338218" y="4480560"/>
+            <a:ext cx="2609011" cy="457200"/>
+          </a:xfrm>
+          <a:prstGeom prst="rect">
+            <a:avLst/>
+          </a:prstGeom>
+          <a:noFill/>
+        </p:spPr>
+        <p:txBody>
+          <a:bodyPr wrap="square" lIns="0" rIns="0" tIns="0" bIns="0" anchor="t">
+            <a:spAutoFit/>
+          </a:bodyPr>
+          <a:lstStyle/>
+          <a:p>
+            <a:pPr algn="ctr">
+              <a:lnSpc>
+                <a:spcPct val="125000"/>
+              </a:lnSpc>
+              <a:spcBef>
+                <a:spcPts val="0"/>
+              </a:spcBef>
+              <a:spcAft>
+                <a:spcPts val="0"/>
+              </a:spcAft>
+            </a:pPr>
+            <a:r>
+              <a:rPr sz="1200" b="0" i="0">
+                <a:solidFill>
+                  <a:srgbClr val="3C4551"/>
+                </a:solidFill>
+                <a:latin typeface="Calibri"/>
+              </a:rPr>
+              <a:t>gap measured per codec</a:t>
+            </a:r>
+          </a:p>
+        </p:txBody>
+      </p:sp>
+      <p:sp>
+        <p:nvSpPr>
+          <p:cNvPr id="15" name="TextBox 14"/>
+          <p:cNvSpPr txBox="1"/>
+          <p:nvPr/>
+        </p:nvSpPr>
+        <p:spPr>
+          <a:xfrm>
+            <a:off x="7002094" y="2999232"/>
+            <a:ext cx="1812493" cy="219456"/>
+          </a:xfrm>
+          <a:prstGeom prst="rect">
+            <a:avLst/>
+          </a:prstGeom>
+          <a:noFill/>
+        </p:spPr>
+        <p:txBody>
+          <a:bodyPr wrap="square" lIns="0" rIns="0" tIns="0" bIns="0" anchor="t">
+            <a:spAutoFit/>
+          </a:bodyPr>
+          <a:lstStyle/>
+          <a:p>
+            <a:pPr algn="ctr">
+              <a:lnSpc>
+                <a:spcPct val="115000"/>
+              </a:lnSpc>
+              <a:spcBef>
+                <a:spcPts val="0"/>
+              </a:spcBef>
+              <a:spcAft>
+                <a:spcPts val="0"/>
+              </a:spcAft>
+            </a:pPr>
+            <a:r>
+              <a:rPr sz="950" b="0" i="0">
+                <a:solidFill>
+                  <a:srgbClr val="6B7684"/>
+                </a:solidFill>
+                <a:latin typeface="Consolas"/>
+              </a:rPr>
+              <a:t>WEEKS 8-9</a:t>
+            </a:r>
+          </a:p>
+        </p:txBody>
+      </p:sp>
+      <p:sp>
+        <p:nvSpPr>
+          <p:cNvPr id="16" name="Rectangle 15"/>
+          <p:cNvSpPr/>
+          <p:nvPr/>
+        </p:nvSpPr>
+        <p:spPr>
+          <a:xfrm>
+            <a:off x="7029526" y="3291840"/>
+            <a:ext cx="1757629" cy="1051560"/>
+          </a:xfrm>
+          <a:prstGeom prst="rect">
+            <a:avLst/>
+          </a:prstGeom>
+          <a:solidFill>
+            <a:srgbClr val="9E6712"/>
+          </a:solidFill>
+          <a:ln>
+            <a:noFill/>
+          </a:ln>
+          <a:effectLst/>
+        </p:spPr>
+        <p:style>
+          <a:lnRef idx="1">
+            <a:schemeClr val="accent1"/>
+          </a:lnRef>
+          <a:fillRef idx="3">
+            <a:schemeClr val="accent1"/>
+          </a:fillRef>
+          <a:effectRef idx="2">
+            <a:schemeClr val="accent1"/>
+          </a:effectRef>
+          <a:fontRef idx="minor">
+            <a:schemeClr val="lt1"/>
+          </a:fontRef>
+        </p:style>
+        <p:txBody>
+          <a:bodyPr rtlCol="0" anchor="ctr"/>
+          <a:lstStyle/>
+          <a:p/>
+        </p:txBody>
+      </p:sp>
+      <p:sp>
+        <p:nvSpPr>
+          <p:cNvPr id="17" name="TextBox 16"/>
+          <p:cNvSpPr txBox="1"/>
+          <p:nvPr/>
+        </p:nvSpPr>
+        <p:spPr>
+          <a:xfrm>
+            <a:off x="7093534" y="3657600"/>
+            <a:ext cx="1629613" cy="365760"/>
+          </a:xfrm>
+          <a:prstGeom prst="rect">
+            <a:avLst/>
+          </a:prstGeom>
+          <a:noFill/>
+        </p:spPr>
+        <p:txBody>
+          <a:bodyPr wrap="square" lIns="0" rIns="0" tIns="0" bIns="0" anchor="t">
+            <a:spAutoFit/>
+          </a:bodyPr>
+          <a:lstStyle/>
+          <a:p>
+            <a:pPr algn="ctr">
+              <a:lnSpc>
+                <a:spcPct val="115000"/>
+              </a:lnSpc>
+              <a:spcBef>
+                <a:spcPts val="0"/>
+              </a:spcBef>
+              <a:spcAft>
+                <a:spcPts val="0"/>
+              </a:spcAft>
+            </a:pPr>
+            <a:r>
+              <a:rPr sz="1450" b="1" i="0">
+                <a:solidFill>
+                  <a:srgbClr val="FFFFFF"/>
+                </a:solidFill>
+                <a:latin typeface="Calibri"/>
+              </a:rPr>
+              <a:t>Generalisation</a:t>
+            </a:r>
+          </a:p>
+        </p:txBody>
+      </p:sp>
+      <p:sp>
+        <p:nvSpPr>
+          <p:cNvPr id="18" name="TextBox 17"/>
+          <p:cNvSpPr txBox="1"/>
+          <p:nvPr/>
+        </p:nvSpPr>
+        <p:spPr>
+          <a:xfrm>
+            <a:off x="7056958" y="4480560"/>
+            <a:ext cx="1702765" cy="457200"/>
+          </a:xfrm>
+          <a:prstGeom prst="rect">
+            <a:avLst/>
+          </a:prstGeom>
+          <a:noFill/>
+        </p:spPr>
+        <p:txBody>
+          <a:bodyPr wrap="square" lIns="0" rIns="0" tIns="0" bIns="0" anchor="t">
+            <a:spAutoFit/>
+          </a:bodyPr>
+          <a:lstStyle/>
+          <a:p>
+            <a:pPr algn="ctr">
+              <a:lnSpc>
+                <a:spcPct val="125000"/>
+              </a:lnSpc>
+              <a:spcBef>
+                <a:spcPts val="0"/>
+              </a:spcBef>
+              <a:spcAft>
+                <a:spcPts val="0"/>
+              </a:spcAft>
+            </a:pPr>
+            <a:r>
+              <a:rPr sz="1200" b="0" i="0">
+                <a:solidFill>
+                  <a:srgbClr val="3C4551"/>
+                </a:solidFill>
+                <a:latin typeface="Calibri"/>
+              </a:rPr>
+              <a:t>gap reduced</a:t>
+            </a:r>
+          </a:p>
+        </p:txBody>
+      </p:sp>
+      <p:sp>
+        <p:nvSpPr>
+          <p:cNvPr id="19" name="TextBox 18"/>
+          <p:cNvSpPr txBox="1"/>
+          <p:nvPr/>
+        </p:nvSpPr>
+        <p:spPr>
+          <a:xfrm>
+            <a:off x="8814587" y="2999232"/>
+            <a:ext cx="1812493" cy="219456"/>
+          </a:xfrm>
+          <a:prstGeom prst="rect">
+            <a:avLst/>
+          </a:prstGeom>
+          <a:noFill/>
+        </p:spPr>
+        <p:txBody>
+          <a:bodyPr wrap="square" lIns="0" rIns="0" tIns="0" bIns="0" anchor="t">
+            <a:spAutoFit/>
+          </a:bodyPr>
+          <a:lstStyle/>
+          <a:p>
+            <a:pPr algn="ctr">
+              <a:lnSpc>
+                <a:spcPct val="115000"/>
+              </a:lnSpc>
+              <a:spcBef>
+                <a:spcPts val="0"/>
+              </a:spcBef>
+              <a:spcAft>
+                <a:spcPts val="0"/>
+              </a:spcAft>
+            </a:pPr>
+            <a:r>
+              <a:rPr sz="950" b="0" i="0">
+                <a:solidFill>
+                  <a:srgbClr val="6B7684"/>
+                </a:solidFill>
+                <a:latin typeface="Consolas"/>
+              </a:rPr>
+              <a:t>WEEKS 10-11</a:t>
+            </a:r>
+          </a:p>
+        </p:txBody>
+      </p:sp>
+      <p:sp>
+        <p:nvSpPr>
+          <p:cNvPr id="20" name="Rectangle 19"/>
+          <p:cNvSpPr/>
+          <p:nvPr/>
+        </p:nvSpPr>
+        <p:spPr>
+          <a:xfrm>
+            <a:off x="8842019" y="3291840"/>
+            <a:ext cx="1757629" cy="1051560"/>
+          </a:xfrm>
+          <a:prstGeom prst="rect">
+            <a:avLst/>
+          </a:prstGeom>
+          <a:solidFill>
+            <a:srgbClr val="E6EEF6"/>
+          </a:solidFill>
+          <a:ln>
+            <a:noFill/>
+          </a:ln>
+          <a:effectLst/>
+        </p:spPr>
+        <p:style>
+          <a:lnRef idx="1">
+            <a:schemeClr val="accent1"/>
+          </a:lnRef>
+          <a:fillRef idx="3">
+            <a:schemeClr val="accent1"/>
+          </a:fillRef>
+          <a:effectRef idx="2">
+            <a:schemeClr val="accent1"/>
+          </a:effectRef>
+          <a:fontRef idx="minor">
+            <a:schemeClr val="lt1"/>
+          </a:fontRef>
+        </p:style>
+        <p:txBody>
+          <a:bodyPr rtlCol="0" anchor="ctr"/>
+          <a:lstStyle/>
+          <a:p/>
+        </p:txBody>
+      </p:sp>
+      <p:sp>
+        <p:nvSpPr>
+          <p:cNvPr id="21" name="TextBox 20"/>
+          <p:cNvSpPr txBox="1"/>
+          <p:nvPr/>
+        </p:nvSpPr>
+        <p:spPr>
+          <a:xfrm>
+            <a:off x="8906027" y="3657600"/>
+            <a:ext cx="1629613" cy="365760"/>
+          </a:xfrm>
+          <a:prstGeom prst="rect">
+            <a:avLst/>
+          </a:prstGeom>
+          <a:noFill/>
+        </p:spPr>
+        <p:txBody>
+          <a:bodyPr wrap="square" lIns="0" rIns="0" tIns="0" bIns="0" anchor="t">
+            <a:spAutoFit/>
+          </a:bodyPr>
+          <a:lstStyle/>
+          <a:p>
+            <a:pPr algn="ctr">
+              <a:lnSpc>
+                <a:spcPct val="115000"/>
+              </a:lnSpc>
+              <a:spcBef>
+                <a:spcPts val="0"/>
+              </a:spcBef>
+              <a:spcAft>
+                <a:spcPts val="0"/>
+              </a:spcAft>
+            </a:pPr>
+            <a:r>
+              <a:rPr sz="1450" b="1" i="0">
+                <a:solidFill>
+                  <a:srgbClr val="1A6AA8"/>
+                </a:solidFill>
+                <a:latin typeface="Calibri"/>
+              </a:rPr>
+              <a:t>Streaming</a:t>
+            </a:r>
+          </a:p>
+        </p:txBody>
+      </p:sp>
+      <p:sp>
+        <p:nvSpPr>
+          <p:cNvPr id="22" name="TextBox 21"/>
+          <p:cNvSpPr txBox="1"/>
+          <p:nvPr/>
+        </p:nvSpPr>
+        <p:spPr>
+          <a:xfrm>
+            <a:off x="8869451" y="4480560"/>
+            <a:ext cx="1702765" cy="457200"/>
+          </a:xfrm>
+          <a:prstGeom prst="rect">
+            <a:avLst/>
+          </a:prstGeom>
+          <a:noFill/>
+        </p:spPr>
+        <p:txBody>
+          <a:bodyPr wrap="square" lIns="0" rIns="0" tIns="0" bIns="0" anchor="t">
+            <a:spAutoFit/>
+          </a:bodyPr>
+          <a:lstStyle/>
+          <a:p>
+            <a:pPr algn="ctr">
+              <a:lnSpc>
+                <a:spcPct val="125000"/>
+              </a:lnSpc>
+              <a:spcBef>
+                <a:spcPts val="0"/>
+              </a:spcBef>
+              <a:spcAft>
+                <a:spcPts val="0"/>
+              </a:spcAft>
+            </a:pPr>
+            <a:r>
+              <a:rPr sz="1200" b="0" i="0">
+                <a:solidFill>
+                  <a:srgbClr val="3C4551"/>
+                </a:solidFill>
+                <a:latin typeface="Calibri"/>
+              </a:rPr>
+              <a:t>latency curve</a:t>
+            </a:r>
+          </a:p>
+        </p:txBody>
+      </p:sp>
+      <p:sp>
+        <p:nvSpPr>
+          <p:cNvPr id="23" name="TextBox 22"/>
+          <p:cNvSpPr txBox="1"/>
+          <p:nvPr/>
+        </p:nvSpPr>
+        <p:spPr>
+          <a:xfrm>
+            <a:off x="10627080" y="2999232"/>
+            <a:ext cx="906246" cy="219456"/>
+          </a:xfrm>
+          <a:prstGeom prst="rect">
+            <a:avLst/>
+          </a:prstGeom>
+          <a:noFill/>
+        </p:spPr>
+        <p:txBody>
+          <a:bodyPr wrap="square" lIns="0" rIns="0" tIns="0" bIns="0" anchor="t">
+            <a:spAutoFit/>
+          </a:bodyPr>
+          <a:lstStyle/>
+          <a:p>
+            <a:pPr algn="ctr">
+              <a:lnSpc>
+                <a:spcPct val="115000"/>
+              </a:lnSpc>
+              <a:spcBef>
+                <a:spcPts val="0"/>
+              </a:spcBef>
+              <a:spcAft>
+                <a:spcPts val="0"/>
+              </a:spcAft>
+            </a:pPr>
+            <a:r>
+              <a:rPr sz="950" b="0" i="0">
+                <a:solidFill>
+                  <a:srgbClr val="6B7684"/>
+                </a:solidFill>
+                <a:latin typeface="Consolas"/>
+              </a:rPr>
+              <a:t>WEEK 12</a:t>
+            </a:r>
+          </a:p>
+        </p:txBody>
+      </p:sp>
+      <p:sp>
+        <p:nvSpPr>
+          <p:cNvPr id="24" name="Rectangle 23"/>
+          <p:cNvSpPr/>
+          <p:nvPr/>
+        </p:nvSpPr>
+        <p:spPr>
+          <a:xfrm>
+            <a:off x="10654512" y="3291840"/>
+            <a:ext cx="851382" cy="1051560"/>
+          </a:xfrm>
+          <a:prstGeom prst="rect">
+            <a:avLst/>
+          </a:prstGeom>
+          <a:solidFill>
+            <a:srgbClr val="F1F3F6"/>
+          </a:solidFill>
+          <a:ln>
+            <a:noFill/>
+          </a:ln>
+          <a:effectLst/>
+        </p:spPr>
+        <p:style>
+          <a:lnRef idx="1">
+            <a:schemeClr val="accent1"/>
+          </a:lnRef>
+          <a:fillRef idx="3">
+            <a:schemeClr val="accent1"/>
+          </a:fillRef>
+          <a:effectRef idx="2">
+            <a:schemeClr val="accent1"/>
+          </a:effectRef>
+          <a:fontRef idx="minor">
+            <a:schemeClr val="lt1"/>
+          </a:fontRef>
+        </p:style>
+        <p:txBody>
+          <a:bodyPr rtlCol="0" anchor="ctr"/>
+          <a:lstStyle/>
+          <a:p/>
+        </p:txBody>
+      </p:sp>
+      <p:sp>
+        <p:nvSpPr>
+          <p:cNvPr id="25" name="TextBox 24"/>
+          <p:cNvSpPr txBox="1"/>
+          <p:nvPr/>
+        </p:nvSpPr>
+        <p:spPr>
+          <a:xfrm>
+            <a:off x="10718520" y="3657600"/>
+            <a:ext cx="723366" cy="365760"/>
+          </a:xfrm>
+          <a:prstGeom prst="rect">
+            <a:avLst/>
+          </a:prstGeom>
+          <a:noFill/>
+        </p:spPr>
+        <p:txBody>
+          <a:bodyPr wrap="square" lIns="0" rIns="0" tIns="0" bIns="0" anchor="t">
+            <a:spAutoFit/>
+          </a:bodyPr>
+          <a:lstStyle/>
+          <a:p>
+            <a:pPr algn="ctr">
+              <a:lnSpc>
+                <a:spcPct val="115000"/>
+              </a:lnSpc>
+              <a:spcBef>
+                <a:spcPts val="0"/>
+              </a:spcBef>
+              <a:spcAft>
+                <a:spcPts val="0"/>
+              </a:spcAft>
+            </a:pPr>
+            <a:r>
+              <a:rPr sz="1450" b="1" i="0">
+                <a:solidFill>
+                  <a:srgbClr val="6B7684"/>
+                </a:solidFill>
+                <a:latin typeface="Calibri"/>
+              </a:rPr>
+              <a:t>Write-up</a:t>
+            </a:r>
+          </a:p>
+        </p:txBody>
+      </p:sp>
+    </p:spTree>
+  </p:cSld>
+  <p:clrMapOvr>
+    <a:masterClrMapping/>
+  </p:clrMapOvr>
+</p:sld>
+</file>
+
+<file path=ppt/slides/slide13.xml><?xml version="1.0" encoding="utf-8"?>
+<p:sld xmlns:a="http://schemas.openxmlformats.org/drawingml/2006/main" xmlns:p="http://schemas.openxmlformats.org/presentationml/2006/main" xmlns:r="http://schemas.openxmlformats.org/officeDocument/2006/relationships">
+  <p:cSld>
+    <p:bg>
+      <p:bgPr>
+        <a:solidFill>
+          <a:srgbClr val="FFFFFF"/>
+        </a:solidFill>
+        <a:effectLst/>
+      </p:bgPr>
+    </p:bg>
+    <p:spTree>
+      <p:nvGrpSpPr>
+        <p:cNvPr id="1" name=""/>
+        <p:cNvGrpSpPr/>
+        <p:nvPr/>
+      </p:nvGrpSpPr>
+      <p:grpSpPr/>
+      <p:sp>
+        <p:nvSpPr>
+          <p:cNvPr id="2" name="TextBox 1"/>
+          <p:cNvSpPr txBox="1"/>
+          <p:nvPr/>
+        </p:nvSpPr>
+        <p:spPr>
+          <a:xfrm>
+            <a:off x="658368" y="384048"/>
+            <a:ext cx="10874959" cy="274320"/>
+          </a:xfrm>
+          <a:prstGeom prst="rect">
+            <a:avLst/>
+          </a:prstGeom>
+          <a:noFill/>
+        </p:spPr>
+        <p:txBody>
+          <a:bodyPr wrap="square" lIns="0" rIns="0" tIns="0" bIns="0" anchor="t">
+            <a:spAutoFit/>
+          </a:bodyPr>
+          <a:lstStyle/>
+          <a:p>
+            <a:pPr algn="l">
+              <a:lnSpc>
+                <a:spcPct val="115000"/>
+              </a:lnSpc>
+              <a:spcBef>
+                <a:spcPts val="0"/>
+              </a:spcBef>
+              <a:spcAft>
+                <a:spcPts val="0"/>
+              </a:spcAft>
+            </a:pPr>
+            <a:r>
+              <a:rPr sz="1100" b="1" i="0">
+                <a:solidFill>
+                  <a:srgbClr val="9E6712"/>
+                </a:solidFill>
+                <a:latin typeface="Consolas"/>
+              </a:rPr>
+              <a:t>ACT 4</a:t>
+            </a:r>
+            <a:r>
+              <a:rPr sz="1100" b="0" i="0">
+                <a:solidFill>
+                  <a:srgbClr val="D0D6DE"/>
+                </a:solidFill>
+                <a:latin typeface="Consolas"/>
+              </a:rPr>
+              <a:t>     |     </a:t>
+            </a:r>
+            <a:r>
+              <a:rPr sz="1100" b="0" i="0">
+                <a:solidFill>
+                  <a:srgbClr val="6B7684"/>
+                </a:solidFill>
+                <a:latin typeface="Consolas"/>
+              </a:rPr>
+              <a:t>CONCLUSION</a:t>
+            </a:r>
+          </a:p>
+        </p:txBody>
+      </p:sp>
+      <p:sp>
+        <p:nvSpPr>
+          <p:cNvPr id="3" name="TextBox 2"/>
+          <p:cNvSpPr txBox="1"/>
+          <p:nvPr/>
+        </p:nvSpPr>
+        <p:spPr>
+          <a:xfrm>
+            <a:off x="658368" y="749808"/>
+            <a:ext cx="10509199" cy="914400"/>
+          </a:xfrm>
+          <a:prstGeom prst="rect">
+            <a:avLst/>
+          </a:prstGeom>
+          <a:noFill/>
+        </p:spPr>
+        <p:txBody>
+          <a:bodyPr wrap="square" lIns="0" rIns="0" tIns="0" bIns="0" anchor="t">
+            <a:spAutoFit/>
+          </a:bodyPr>
+          <a:lstStyle/>
+          <a:p>
+            <a:pPr algn="l">
+              <a:lnSpc>
+                <a:spcPct val="106000"/>
+              </a:lnSpc>
+              <a:spcBef>
+                <a:spcPts val="0"/>
+              </a:spcBef>
+              <a:spcAft>
+                <a:spcPts val="0"/>
+              </a:spcAft>
+            </a:pPr>
+            <a:r>
+              <a:rPr sz="3400" b="1" i="0">
+                <a:solidFill>
+                  <a:srgbClr val="151A21"/>
+                </a:solidFill>
+                <a:latin typeface="Arial"/>
+              </a:rPr>
               <a:t>What success looks like.</a:t>
             </a:r>
           </a:p>
@@ -5811,8 +8817,8 @@
         </p:nvSpPr>
         <p:spPr>
           <a:xfrm>
-            <a:off x="658368" y="2148840"/>
-            <a:ext cx="5282031" cy="2240280"/>
+            <a:off x="658368" y="2286000"/>
+            <a:ext cx="5282031" cy="2103120"/>
           </a:xfrm>
           <a:prstGeom prst="rect">
             <a:avLst/>
@@ -5855,8 +8861,8 @@
         </p:nvSpPr>
         <p:spPr>
           <a:xfrm>
-            <a:off x="896112" y="2350008"/>
-            <a:ext cx="4806543" cy="1837944"/>
+            <a:off x="896112" y="2487168"/>
+            <a:ext cx="4806543" cy="1700784"/>
           </a:xfrm>
           <a:prstGeom prst="rect">
             <a:avLst/>
@@ -5899,35 +8905,26 @@
                 <a:spcPts val="0"/>
               </a:spcBef>
               <a:spcAft>
-                <a:spcPts val="1100"/>
+                <a:spcPts val="1400"/>
               </a:spcAft>
             </a:pPr>
             <a:r>
-              <a:rPr sz="1350" b="0" i="0">
+              <a:rPr sz="1600" b="0" i="0">
                 <a:solidFill>
                   <a:srgbClr val="3C4551"/>
                 </a:solidFill>
                 <a:latin typeface="Calibri"/>
               </a:rPr>
-              <a:t>An </a:t>
-            </a:r>
-            <a:r>
-              <a:rPr sz="1350" b="1" i="0">
+              <a:t>Out-of-domain EER </a:t>
+            </a:r>
+            <a:r>
+              <a:rPr sz="1600" b="1" i="0">
                 <a:solidFill>
                   <a:srgbClr val="151A21"/>
                 </a:solidFill>
                 <a:latin typeface="Calibri"/>
               </a:rPr>
-              <a:t>out-of-domain EER well below the 34 to 37%</a:t>
-            </a:r>
-            <a:r>
-              <a:rPr sz="1350" b="0" i="0">
-                <a:solidFill>
-                  <a:srgbClr val="3C4551"/>
-                </a:solidFill>
-                <a:latin typeface="Calibri"/>
-              </a:rPr>
-              <a:t> the literature reports on the same held-out data.</a:t>
+              <a:t>well below 34%.</a:t>
             </a:r>
           </a:p>
           <a:p>
@@ -5939,11 +8936,11 @@
                 <a:spcPts val="0"/>
               </a:spcBef>
               <a:spcAft>
-                <a:spcPts val="1100"/>
+                <a:spcPts val="1400"/>
               </a:spcAft>
             </a:pPr>
             <a:r>
-              <a:rPr sz="1350" b="0" i="0">
+              <a:rPr sz="1600" b="0" i="0">
                 <a:solidFill>
                   <a:srgbClr val="3C4551"/>
                 </a:solidFill>
@@ -5952,22 +8949,13 @@
               <a:t>A gap we </a:t>
             </a:r>
             <a:r>
-              <a:rPr sz="1350" b="1" i="0">
+              <a:rPr sz="1600" b="1" i="0">
                 <a:solidFill>
                   <a:srgbClr val="151A21"/>
                 </a:solidFill>
                 <a:latin typeface="Calibri"/>
               </a:rPr>
-              <a:t>reduced and can attribute</a:t>
-            </a:r>
-            <a:r>
-              <a:rPr sz="1350" b="0" i="0">
-                <a:solidFill>
-                  <a:srgbClr val="3C4551"/>
-                </a:solidFill>
-                <a:latin typeface="Calibri"/>
-              </a:rPr>
-              <a:t>. Which decision bought how much.</a:t>
+              <a:t>reduced, and can explain.</a:t>
             </a:r>
           </a:p>
           <a:p>
@@ -5979,11 +8967,11 @@
                 <a:spcPts val="0"/>
               </a:spcBef>
               <a:spcAft>
-                <a:spcPts val="1100"/>
+                <a:spcPts val="1400"/>
               </a:spcAft>
             </a:pPr>
             <a:r>
-              <a:rPr sz="1350" b="0" i="0">
+              <a:rPr sz="1600" b="0" i="0">
                 <a:solidFill>
                   <a:srgbClr val="3C4551"/>
                 </a:solidFill>
@@ -5992,22 +8980,13 @@
               <a:t>A decision </a:t>
             </a:r>
             <a:r>
-              <a:rPr sz="1350" b="1" i="0">
+              <a:rPr sz="1600" b="1" i="0">
                 <a:solidFill>
                   <a:srgbClr val="151A21"/>
                 </a:solidFill>
                 <a:latin typeface="Calibri"/>
               </a:rPr>
-              <a:t>within seconds of speech</a:t>
-            </a:r>
-            <a:r>
-              <a:rPr sz="1350" b="0" i="0">
-                <a:solidFill>
-                  <a:srgbClr val="3C4551"/>
-                </a:solidFill>
-                <a:latin typeface="Calibri"/>
-              </a:rPr>
-              <a:t>, on the phone, with the cost of every window length measured.</a:t>
+              <a:t>in seconds, on the phone.</a:t>
             </a:r>
           </a:p>
         </p:txBody>
@@ -6020,8 +8999,8 @@
         </p:nvSpPr>
         <p:spPr>
           <a:xfrm>
-            <a:off x="6251295" y="2148840"/>
-            <a:ext cx="5282031" cy="2240280"/>
+            <a:off x="6251295" y="2286000"/>
+            <a:ext cx="5282031" cy="2103120"/>
           </a:xfrm>
           <a:prstGeom prst="rect">
             <a:avLst/>
@@ -6062,8 +9041,8 @@
         </p:nvSpPr>
         <p:spPr>
           <a:xfrm>
-            <a:off x="6489039" y="2350008"/>
-            <a:ext cx="4806543" cy="1837944"/>
+            <a:off x="6489039" y="2487168"/>
+            <a:ext cx="4806543" cy="1700784"/>
           </a:xfrm>
           <a:prstGeom prst="rect">
             <a:avLst/>
@@ -6106,17 +9085,17 @@
                 <a:spcPts val="0"/>
               </a:spcBef>
               <a:spcAft>
-                <a:spcPts val="1100"/>
+                <a:spcPts val="1400"/>
               </a:spcAft>
             </a:pPr>
             <a:r>
-              <a:rPr sz="1350" b="0" i="0">
+              <a:rPr sz="1600" b="0" i="0">
                 <a:solidFill>
                   <a:srgbClr val="3C4551"/>
                 </a:solidFill>
                 <a:latin typeface="Calibri"/>
               </a:rPr>
-              <a:t>Quote one in-domain number as if it described the field.</a:t>
+              <a:t>Quote one in-domain number.</a:t>
             </a:r>
           </a:p>
           <a:p>
@@ -6128,17 +9107,17 @@
                 <a:spcPts val="0"/>
               </a:spcBef>
               <a:spcAft>
-                <a:spcPts val="1100"/>
+                <a:spcPts val="1400"/>
               </a:spcAft>
             </a:pPr>
             <a:r>
-              <a:rPr sz="1350" b="0" i="0">
+              <a:rPr sz="1600" b="0" i="0">
                 <a:solidFill>
                   <a:srgbClr val="3C4551"/>
                 </a:solidFill>
                 <a:latin typeface="Calibri"/>
               </a:rPr>
-              <a:t>Average across corpora or codecs to make a result look better.</a:t>
+              <a:t>Average across corpora or codecs.</a:t>
             </a:r>
           </a:p>
           <a:p>
@@ -6150,17 +9129,17 @@
                 <a:spcPts val="0"/>
               </a:spcBef>
               <a:spcAft>
-                <a:spcPts val="1100"/>
+                <a:spcPts val="1400"/>
               </a:spcAft>
             </a:pPr>
             <a:r>
-              <a:rPr sz="1350" b="0" i="0">
+              <a:rPr sz="1600" b="0" i="0">
                 <a:solidFill>
                   <a:srgbClr val="3C4551"/>
                 </a:solidFill>
                 <a:latin typeface="Calibri"/>
               </a:rPr>
-              <a:t>Say the problem is solved. A smaller gap is not a closed gap.</a:t>
+              <a:t>Say the problem is solved.</a:t>
             </a:r>
           </a:p>
         </p:txBody>
@@ -6173,8 +9152,8 @@
         </p:nvSpPr>
         <p:spPr>
           <a:xfrm>
-            <a:off x="658368" y="4617720"/>
-            <a:ext cx="10874959" cy="1234440"/>
+            <a:off x="658368" y="4709160"/>
+            <a:ext cx="10874959" cy="1097280"/>
           </a:xfrm>
           <a:prstGeom prst="rect">
             <a:avLst/>
@@ -6215,8 +9194,8 @@
         </p:nvSpPr>
         <p:spPr>
           <a:xfrm>
-            <a:off x="658368" y="4617720"/>
-            <a:ext cx="32004" cy="1234440"/>
+            <a:off x="658368" y="4709160"/>
+            <a:ext cx="32004" cy="1097280"/>
           </a:xfrm>
           <a:prstGeom prst="rect">
             <a:avLst/>
@@ -6257,8 +9236,8 @@
         </p:nvSpPr>
         <p:spPr>
           <a:xfrm>
-            <a:off x="932688" y="4800600"/>
-            <a:ext cx="10344607" cy="868680"/>
+            <a:off x="932688" y="4892040"/>
+            <a:ext cx="10344607" cy="731519"/>
           </a:xfrm>
           <a:prstGeom prst="rect">
             <a:avLst/>
@@ -6305,22 +9284,13 @@
               </a:spcAft>
             </a:pPr>
             <a:r>
-              <a:rPr sz="1400" b="0" i="0">
-                <a:solidFill>
-                  <a:srgbClr val="3C4551"/>
+              <a:rPr sz="1400" b="1" i="0">
+                <a:solidFill>
+                  <a:srgbClr val="1A6AA8"/>
                 </a:solidFill>
                 <a:latin typeface="Calibri"/>
               </a:rPr>
-              <a:t>A detector that travels is worth more than a detector that scores well. </a:t>
-            </a:r>
-            <a:r>
-              <a:rPr sz="1400" b="1" i="0">
-                <a:solidFill>
-                  <a:srgbClr val="1A6AA8"/>
-                </a:solidFill>
-                <a:latin typeface="Calibri"/>
-              </a:rPr>
-              <a:t>We are optimising the number that survives a change of dataset.</a:t>
+              <a:t>A detector that travels is worth more than a detector that scores well.</a:t>
             </a:r>
           </a:p>
         </p:txBody>
@@ -6454,7 +9424,7 @@
                 </a:solidFill>
                 <a:latin typeface="Arial"/>
               </a:rPr>
-              <a:t>Ninety seconds of public audio is enough.</a:t>
+              <a:t>Ninety seconds of audio is enough.</a:t>
             </a:r>
           </a:p>
         </p:txBody>
@@ -6467,8 +9437,8 @@
         </p:nvSpPr>
         <p:spPr>
           <a:xfrm>
-            <a:off x="658368" y="2148840"/>
-            <a:ext cx="5760720" cy="2560320"/>
+            <a:off x="658368" y="2377440"/>
+            <a:ext cx="6035040" cy="2377440"/>
           </a:xfrm>
           <a:prstGeom prst="rect">
             <a:avLst/>
@@ -6489,11 +9459,11 @@
                 <a:spcPts val="0"/>
               </a:spcBef>
               <a:spcAft>
-                <a:spcPts val="1500"/>
+                <a:spcPts val="2200"/>
               </a:spcAft>
             </a:pPr>
             <a:r>
-              <a:rPr sz="1600" b="1" i="0">
+              <a:rPr sz="2000" b="1" i="0">
                 <a:solidFill>
                   <a:srgbClr val="9E6712"/>
                 </a:solidFill>
@@ -6502,13 +9472,13 @@
               <a:t>•   </a:t>
             </a:r>
             <a:r>
-              <a:rPr sz="1600" b="0" i="0">
+              <a:rPr sz="2000" b="0" i="0">
                 <a:solidFill>
                   <a:srgbClr val="3C4551"/>
                 </a:solidFill>
                 <a:latin typeface="Calibri"/>
               </a:rPr>
-              <a:t>An attacker takes a voice from a podcast or a voicemail.</a:t>
+              <a:t>A voice from a podcast or a voicemail.</a:t>
             </a:r>
           </a:p>
           <a:p>
@@ -6520,11 +9490,11 @@
                 <a:spcPts val="0"/>
               </a:spcBef>
               <a:spcAft>
-                <a:spcPts val="1500"/>
+                <a:spcPts val="2200"/>
               </a:spcAft>
             </a:pPr>
             <a:r>
-              <a:rPr sz="1600" b="1" i="0">
+              <a:rPr sz="2000" b="1" i="0">
                 <a:solidFill>
                   <a:srgbClr val="9E6712"/>
                 </a:solidFill>
@@ -6533,22 +9503,22 @@
               <a:t>•   </a:t>
             </a:r>
             <a:r>
-              <a:rPr sz="1600" b="0" i="0">
+              <a:rPr sz="2000" b="1" i="0">
+                <a:solidFill>
+                  <a:srgbClr val="151A21"/>
+                </a:solidFill>
+                <a:latin typeface="Calibri"/>
+              </a:rPr>
+              <a:t>Cloned in minutes.</a:t>
+            </a:r>
+            <a:r>
+              <a:rPr sz="2000" b="0" i="0">
                 <a:solidFill>
                   <a:srgbClr val="3C4551"/>
                 </a:solidFill>
                 <a:latin typeface="Calibri"/>
               </a:rPr>
-              <a:t>A cloning model copies it. </a:t>
-            </a:r>
-            <a:r>
-              <a:rPr sz="1600" b="1" i="0">
-                <a:solidFill>
-                  <a:srgbClr val="151A21"/>
-                </a:solidFill>
-                <a:latin typeface="Calibri"/>
-              </a:rPr>
-              <a:t>Minutes of work, no GPU farm.</a:t>
+              <a:t> No GPU farm, no expertise.</a:t>
             </a:r>
           </a:p>
           <a:p>
@@ -6560,11 +9530,11 @@
                 <a:spcPts val="0"/>
               </a:spcBef>
               <a:spcAft>
-                <a:spcPts val="1500"/>
+                <a:spcPts val="2200"/>
               </a:spcAft>
             </a:pPr>
             <a:r>
-              <a:rPr sz="1600" b="1" i="0">
+              <a:rPr sz="2000" b="1" i="0">
                 <a:solidFill>
                   <a:srgbClr val="9E6712"/>
                 </a:solidFill>
@@ -6573,44 +9543,13 @@
               <a:t>•   </a:t>
             </a:r>
             <a:r>
-              <a:rPr sz="1600" b="0" i="0">
+              <a:rPr sz="2000" b="0" i="0">
                 <a:solidFill>
                   <a:srgbClr val="3C4551"/>
                 </a:solidFill>
                 <a:latin typeface="Calibri"/>
               </a:rPr>
-              <a:t>The call reaches a family member, an employee, or a bank.</a:t>
-            </a:r>
-          </a:p>
-          <a:p>
-            <a:pPr>
-              <a:lnSpc>
-                <a:spcPct val="130000"/>
-              </a:lnSpc>
-              <a:spcBef>
-                <a:spcPts val="0"/>
-              </a:spcBef>
-              <a:spcAft>
-                <a:spcPts val="1500"/>
-              </a:spcAft>
-            </a:pPr>
-            <a:r>
-              <a:rPr sz="1600" b="1" i="0">
-                <a:solidFill>
-                  <a:srgbClr val="9E6712"/>
-                </a:solidFill>
-                <a:latin typeface="Calibri"/>
-              </a:rPr>
-              <a:t>•   </a:t>
-            </a:r>
-            <a:r>
-              <a:rPr sz="1600" b="0" i="0">
-                <a:solidFill>
-                  <a:srgbClr val="3C4551"/>
-                </a:solidFill>
-                <a:latin typeface="Calibri"/>
-              </a:rPr>
-              <a:t>The victim hears someone they know.</a:t>
+              <a:t>A call to a parent, an employee, or a bank.</a:t>
             </a:r>
           </a:p>
         </p:txBody>
@@ -6623,8 +9562,8 @@
         </p:nvSpPr>
         <p:spPr>
           <a:xfrm>
-            <a:off x="6720840" y="2148840"/>
-            <a:ext cx="4812487" cy="1920240"/>
+            <a:off x="7178040" y="2377440"/>
+            <a:ext cx="4355287" cy="1737360"/>
           </a:xfrm>
           <a:prstGeom prst="rect">
             <a:avLst/>
@@ -6665,8 +9604,8 @@
         </p:nvSpPr>
         <p:spPr>
           <a:xfrm>
-            <a:off x="6720840" y="2148840"/>
-            <a:ext cx="32004" cy="1920240"/>
+            <a:off x="7178040" y="2377440"/>
+            <a:ext cx="32004" cy="1737360"/>
           </a:xfrm>
           <a:prstGeom prst="rect">
             <a:avLst/>
@@ -6707,8 +9646,8 @@
         </p:nvSpPr>
         <p:spPr>
           <a:xfrm>
-            <a:off x="6995159" y="2331720"/>
-            <a:ext cx="4282135" cy="1554480"/>
+            <a:off x="7452360" y="2560320"/>
+            <a:ext cx="3824935" cy="1371600"/>
           </a:xfrm>
           <a:prstGeom prst="rect">
             <a:avLst/>
@@ -6739,7 +9678,7 @@
                 </a:solidFill>
                 <a:latin typeface="Consolas"/>
               </a:rPr>
-              <a:t>THE QUESTION THIS TALK ANSWERS</a:t>
+              <a:t>THE QUESTION</a:t>
             </a:r>
           </a:p>
           <a:p>
@@ -6755,76 +9694,13 @@
               </a:spcAft>
             </a:pPr>
             <a:r>
-              <a:rPr sz="1400" b="0" i="0">
-                <a:solidFill>
-                  <a:srgbClr val="3C4551"/>
+              <a:rPr sz="1400" b="1" i="0">
+                <a:solidFill>
+                  <a:srgbClr val="B0392E"/>
                 </a:solidFill>
                 <a:latin typeface="Calibri"/>
               </a:rPr>
-              <a:t>A human hears a familiar voice and believes it. </a:t>
-            </a:r>
-            <a:r>
-              <a:rPr sz="1400" b="1" i="0">
-                <a:solidFill>
-                  <a:srgbClr val="B0392E"/>
-                </a:solidFill>
-                <a:latin typeface="Calibri"/>
-              </a:rPr>
               <a:t>Can a machine tell that it is synthetic?</a:t>
-            </a:r>
-          </a:p>
-        </p:txBody>
-      </p:sp>
-      <p:sp>
-        <p:nvSpPr>
-          <p:cNvPr id="8" name="TextBox 7"/>
-          <p:cNvSpPr txBox="1"/>
-          <p:nvPr/>
-        </p:nvSpPr>
-        <p:spPr>
-          <a:xfrm>
-            <a:off x="658368" y="6144768"/>
-            <a:ext cx="10874959" cy="502920"/>
-          </a:xfrm>
-          <a:prstGeom prst="rect">
-            <a:avLst/>
-          </a:prstGeom>
-          <a:noFill/>
-        </p:spPr>
-        <p:txBody>
-          <a:bodyPr wrap="square" lIns="0" rIns="0" tIns="0" bIns="0" anchor="t">
-            <a:spAutoFit/>
-          </a:bodyPr>
-          <a:lstStyle/>
-          <a:p>
-            <a:pPr algn="l">
-              <a:lnSpc>
-                <a:spcPct val="125000"/>
-              </a:lnSpc>
-              <a:spcBef>
-                <a:spcPts val="0"/>
-              </a:spcBef>
-              <a:spcAft>
-                <a:spcPts val="0"/>
-              </a:spcAft>
-            </a:pPr>
-            <a:r>
-              <a:rPr sz="1050" b="0" i="0">
-                <a:solidFill>
-                  <a:srgbClr val="6B7684"/>
-                </a:solidFill>
-                <a:latin typeface="Calibri"/>
-              </a:rPr>
-              <a:t>In a 472-person study, listeners reached 72.8% accuracy where a machine reached 95.5%. People are the weaker detector.  </a:t>
-            </a:r>
-            <a:r>
-              <a:rPr sz="1050" b="0" i="0">
-                <a:solidFill>
-                  <a:srgbClr val="6B7684"/>
-                </a:solidFill>
-                <a:latin typeface="Consolas"/>
-              </a:rPr>
-              <a:t>arXiv:2107.09667</a:t>
             </a:r>
           </a:p>
         </p:txBody>
@@ -6989,8 +9865,8 @@
         </p:nvSpPr>
         <p:spPr>
           <a:xfrm>
-            <a:off x="658368" y="2148840"/>
-            <a:ext cx="3417722" cy="1920240"/>
+            <a:off x="658368" y="2286000"/>
+            <a:ext cx="3417722" cy="1783080"/>
           </a:xfrm>
           <a:prstGeom prst="rect">
             <a:avLst/>
@@ -7031,8 +9907,8 @@
         </p:nvSpPr>
         <p:spPr>
           <a:xfrm>
-            <a:off x="896112" y="2350008"/>
-            <a:ext cx="2942234" cy="1517904"/>
+            <a:off x="896112" y="2487168"/>
+            <a:ext cx="2942234" cy="1380744"/>
           </a:xfrm>
           <a:prstGeom prst="rect">
             <a:avLst/>
@@ -7075,11 +9951,11 @@
                 <a:spcPts val="0"/>
               </a:spcBef>
               <a:spcAft>
-                <a:spcPts val="1000"/>
+                <a:spcPts val="1200"/>
               </a:spcAft>
             </a:pPr>
             <a:r>
-              <a:rPr sz="3600" b="1" i="0">
+              <a:rPr sz="4400" b="1" i="0">
                 <a:solidFill>
                   <a:srgbClr val="1A6AA8"/>
                 </a:solidFill>
@@ -7101,13 +9977,13 @@
               </a:spcAft>
             </a:pPr>
             <a:r>
-              <a:rPr sz="1300" b="0" i="0">
+              <a:rPr sz="1400" b="0" i="0">
                 <a:solidFill>
                   <a:srgbClr val="3C4551"/>
                 </a:solidFill>
                 <a:latin typeface="Calibri"/>
               </a:rPr>
-              <a:t>RawGAT-ST, equal error rate on ASVspoof 2019 LA.</a:t>
+              <a:t>RawGAT-ST on ASVspoof 2019 LA</a:t>
             </a:r>
           </a:p>
         </p:txBody>
@@ -7120,8 +9996,8 @@
         </p:nvSpPr>
         <p:spPr>
           <a:xfrm>
-            <a:off x="4386986" y="2148840"/>
-            <a:ext cx="3417722" cy="1920240"/>
+            <a:off x="4386986" y="2286000"/>
+            <a:ext cx="3417722" cy="1783080"/>
           </a:xfrm>
           <a:prstGeom prst="rect">
             <a:avLst/>
@@ -7162,8 +10038,8 @@
         </p:nvSpPr>
         <p:spPr>
           <a:xfrm>
-            <a:off x="4624730" y="2350008"/>
-            <a:ext cx="2942234" cy="1517904"/>
+            <a:off x="4624730" y="2487168"/>
+            <a:ext cx="2942234" cy="1380744"/>
           </a:xfrm>
           <a:prstGeom prst="rect">
             <a:avLst/>
@@ -7194,7 +10070,7 @@
                 </a:solidFill>
                 <a:latin typeface="Consolas"/>
               </a:rPr>
-              <a:t>BENCHMARK MATURITY</a:t>
+              <a:t>CHALLENGES RUN</a:t>
             </a:r>
           </a:p>
           <a:p>
@@ -7206,11 +10082,11 @@
                 <a:spcPts val="0"/>
               </a:spcBef>
               <a:spcAft>
-                <a:spcPts val="1000"/>
+                <a:spcPts val="1200"/>
               </a:spcAft>
             </a:pPr>
             <a:r>
-              <a:rPr sz="3600" b="1" i="0">
+              <a:rPr sz="4400" b="1" i="0">
                 <a:solidFill>
                   <a:srgbClr val="151A21"/>
                 </a:solidFill>
@@ -7232,13 +10108,13 @@
               </a:spcAft>
             </a:pPr>
             <a:r>
-              <a:rPr sz="1300" b="0" i="0">
+              <a:rPr sz="1400" b="0" i="0">
                 <a:solidFill>
                   <a:srgbClr val="3C4551"/>
                 </a:solidFill>
                 <a:latin typeface="Calibri"/>
               </a:rPr>
-              <a:t>ASVspoof challenges since 2015. 54 teams entered the 2021 evaluation.</a:t>
+              <a:t>ASVspoof, biennial since 2015</a:t>
             </a:r>
           </a:p>
         </p:txBody>
@@ -7251,8 +10127,8 @@
         </p:nvSpPr>
         <p:spPr>
           <a:xfrm>
-            <a:off x="8115604" y="2148840"/>
-            <a:ext cx="3417722" cy="1920240"/>
+            <a:off x="8115604" y="2286000"/>
+            <a:ext cx="3417722" cy="1783080"/>
           </a:xfrm>
           <a:prstGeom prst="rect">
             <a:avLst/>
@@ -7293,8 +10169,8 @@
         </p:nvSpPr>
         <p:spPr>
           <a:xfrm>
-            <a:off x="8353348" y="2350008"/>
-            <a:ext cx="2942234" cy="1517904"/>
+            <a:off x="8353348" y="2487168"/>
+            <a:ext cx="2942234" cy="1380744"/>
           </a:xfrm>
           <a:prstGeom prst="rect">
             <a:avLst/>
@@ -7337,11 +10213,11 @@
                 <a:spcPts val="0"/>
               </a:spcBef>
               <a:spcAft>
-                <a:spcPts val="1000"/>
+                <a:spcPts val="1200"/>
               </a:spcAft>
             </a:pPr>
             <a:r>
-              <a:rPr sz="3600" b="1" i="0">
+              <a:rPr sz="4400" b="1" i="0">
                 <a:solidFill>
                   <a:srgbClr val="151A21"/>
                 </a:solidFill>
@@ -7363,13 +10239,13 @@
               </a:spcAft>
             </a:pPr>
             <a:r>
-              <a:rPr sz="1300" b="0" i="0">
+              <a:rPr sz="1400" b="0" i="0">
                 <a:solidFill>
                   <a:srgbClr val="3C4551"/>
                 </a:solidFill>
                 <a:latin typeface="Calibri"/>
               </a:rPr>
-              <a:t>Re-implemented under one protocol. Raw-waveform models win.</a:t>
+              <a:t>One protocol, raw waveform wins</a:t>
             </a:r>
           </a:p>
         </p:txBody>
@@ -7382,8 +10258,8 @@
         </p:nvSpPr>
         <p:spPr>
           <a:xfrm>
-            <a:off x="658368" y="4434840"/>
-            <a:ext cx="10874959" cy="1325880"/>
+            <a:off x="658368" y="4526280"/>
+            <a:ext cx="10874959" cy="1188720"/>
           </a:xfrm>
           <a:prstGeom prst="rect">
             <a:avLst/>
@@ -7424,8 +10300,8 @@
         </p:nvSpPr>
         <p:spPr>
           <a:xfrm>
-            <a:off x="658368" y="4434840"/>
-            <a:ext cx="32004" cy="1325880"/>
+            <a:off x="658368" y="4526280"/>
+            <a:ext cx="32004" cy="1188720"/>
           </a:xfrm>
           <a:prstGeom prst="rect">
             <a:avLst/>
@@ -7466,8 +10342,8 @@
         </p:nvSpPr>
         <p:spPr>
           <a:xfrm>
-            <a:off x="932688" y="4617720"/>
-            <a:ext cx="10344607" cy="960119"/>
+            <a:off x="932688" y="4709160"/>
+            <a:ext cx="10344607" cy="822960"/>
           </a:xfrm>
           <a:prstGeom prst="rect">
             <a:avLst/>
@@ -7514,22 +10390,13 @@
               </a:spcAft>
             </a:pPr>
             <a:r>
-              <a:rPr sz="1400" b="0" i="0">
-                <a:solidFill>
-                  <a:srgbClr val="3C4551"/>
+              <a:rPr sz="1400" b="1" i="0">
+                <a:solidFill>
+                  <a:srgbClr val="151A21"/>
                 </a:solidFill>
                 <a:latin typeface="Calibri"/>
               </a:rPr>
-              <a:t>Every number here comes from the same corpus the model trained on. Change the dataset and they fall apart. </a:t>
-            </a:r>
-            <a:r>
-              <a:rPr sz="1400" b="1" i="0">
-                <a:solidFill>
-                  <a:srgbClr val="151A21"/>
-                </a:solidFill>
-                <a:latin typeface="Calibri"/>
-              </a:rPr>
-              <a:t>That is the problem we are fixing.</a:t>
+              <a:t>Every number here is measured on the corpus the model trained on.</a:t>
             </a:r>
           </a:p>
         </p:txBody>
@@ -7694,8 +10561,8 @@
         </p:nvSpPr>
         <p:spPr>
           <a:xfrm>
-            <a:off x="9875520" y="2103120"/>
-            <a:ext cx="1143000" cy="1572768"/>
+            <a:off x="9875520" y="2148840"/>
+            <a:ext cx="1143000" cy="1737360"/>
           </a:xfrm>
           <a:prstGeom prst="rect">
             <a:avLst/>
@@ -7736,7 +10603,7 @@
         </p:nvSpPr>
         <p:spPr>
           <a:xfrm>
-            <a:off x="9875520" y="1865376"/>
+            <a:off x="9875520" y="1901952"/>
             <a:ext cx="1143000" cy="219456"/>
           </a:xfrm>
           <a:prstGeom prst="rect">
@@ -7762,7 +10629,7 @@
               </a:spcAft>
             </a:pPr>
             <a:r>
-              <a:rPr sz="950" b="1" i="0">
+              <a:rPr sz="1000" b="1" i="0">
                 <a:solidFill>
                   <a:srgbClr val="B0392E"/>
                 </a:solidFill>
@@ -7781,8 +10648,8 @@
         </p:nvSpPr>
         <p:spPr>
           <a:xfrm>
-            <a:off x="658368" y="1865376"/>
-            <a:ext cx="3291840" cy="237744"/>
+            <a:off x="658368" y="1901952"/>
+            <a:ext cx="3474720" cy="237744"/>
           </a:xfrm>
           <a:prstGeom prst="rect">
             <a:avLst/>
@@ -7807,13 +10674,13 @@
               </a:spcAft>
             </a:pPr>
             <a:r>
-              <a:rPr sz="950" b="1" i="0">
+              <a:rPr sz="1000" b="1" i="0">
                 <a:solidFill>
                   <a:srgbClr val="6B7684"/>
                 </a:solidFill>
                 <a:latin typeface="Consolas"/>
               </a:rPr>
-              <a:t>TRAINED ON ASVSPOOF 2019, THEN TESTED ON:</a:t>
+              <a:t>TRAINED ON ASVSPOOF 2019, TESTED ON:</a:t>
             </a:r>
           </a:p>
         </p:txBody>
@@ -7826,8 +10693,8 @@
         </p:nvSpPr>
         <p:spPr>
           <a:xfrm>
-            <a:off x="658368" y="2221991"/>
-            <a:ext cx="3291840" cy="457200"/>
+            <a:off x="658368" y="2258568"/>
+            <a:ext cx="3383280" cy="457200"/>
           </a:xfrm>
           <a:prstGeom prst="rect">
             <a:avLst/>
@@ -7852,7 +10719,7 @@
               </a:spcAft>
             </a:pPr>
             <a:r>
-              <a:rPr sz="1400" b="1" i="0">
+              <a:rPr sz="1500" b="1" i="0">
                 <a:solidFill>
                   <a:srgbClr val="151A21"/>
                 </a:solidFill>
@@ -7871,8 +10738,8 @@
         </p:nvSpPr>
         <p:spPr>
           <a:xfrm>
-            <a:off x="4160520" y="2212848"/>
-            <a:ext cx="140588" cy="292608"/>
+            <a:off x="4160520" y="2249424"/>
+            <a:ext cx="140588" cy="329184"/>
           </a:xfrm>
           <a:prstGeom prst="rect">
             <a:avLst/>
@@ -7913,7 +10780,7 @@
         </p:nvSpPr>
         <p:spPr>
           <a:xfrm>
-            <a:off x="4447413" y="2231136"/>
+            <a:off x="4447413" y="2276856"/>
             <a:ext cx="1280160" cy="274320"/>
           </a:xfrm>
           <a:prstGeom prst="rect">
@@ -7939,7 +10806,7 @@
               </a:spcAft>
             </a:pPr>
             <a:r>
-              <a:rPr sz="1700" b="1" i="0">
+              <a:rPr sz="1800" b="1" i="0">
                 <a:solidFill>
                   <a:srgbClr val="1A6AA8"/>
                 </a:solidFill>
@@ -7958,8 +10825,8 @@
         </p:nvSpPr>
         <p:spPr>
           <a:xfrm>
-            <a:off x="658368" y="2734056"/>
-            <a:ext cx="3291840" cy="457200"/>
+            <a:off x="658368" y="2807208"/>
+            <a:ext cx="3383280" cy="457200"/>
           </a:xfrm>
           <a:prstGeom prst="rect">
             <a:avLst/>
@@ -7984,7 +10851,7 @@
               </a:spcAft>
             </a:pPr>
             <a:r>
-              <a:rPr sz="1400" b="1" i="0">
+              <a:rPr sz="1500" b="1" i="0">
                 <a:solidFill>
                   <a:srgbClr val="151A21"/>
                 </a:solidFill>
@@ -8006,13 +10873,13 @@
               </a:spcAft>
             </a:pPr>
             <a:r>
-              <a:rPr sz="950" b="0" i="0">
+              <a:rPr sz="1000" b="0" i="0">
                 <a:solidFill>
                   <a:srgbClr val="6B7684"/>
                 </a:solidFill>
                 <a:latin typeface="Consolas"/>
               </a:rPr>
-              <a:t>In-the-Wild, new speakers</a:t>
+              <a:t>In-the-Wild</a:t>
             </a:r>
           </a:p>
         </p:txBody>
@@ -8025,8 +10892,8 @@
         </p:nvSpPr>
         <p:spPr>
           <a:xfrm>
-            <a:off x="4160520" y="2724912"/>
-            <a:ext cx="4246245" cy="292608"/>
+            <a:off x="4160520" y="2798064"/>
+            <a:ext cx="4246245" cy="329184"/>
           </a:xfrm>
           <a:prstGeom prst="rect">
             <a:avLst/>
@@ -8067,7 +10934,7 @@
         </p:nvSpPr>
         <p:spPr>
           <a:xfrm>
-            <a:off x="8553069" y="2743200"/>
+            <a:off x="8553069" y="2825496"/>
             <a:ext cx="1280160" cy="274320"/>
           </a:xfrm>
           <a:prstGeom prst="rect">
@@ -8093,7 +10960,7 @@
               </a:spcAft>
             </a:pPr>
             <a:r>
-              <a:rPr sz="1700" b="1" i="0">
+              <a:rPr sz="1800" b="1" i="0">
                 <a:solidFill>
                   <a:srgbClr val="B0392E"/>
                 </a:solidFill>
@@ -8112,8 +10979,8 @@
         </p:nvSpPr>
         <p:spPr>
           <a:xfrm>
-            <a:off x="658368" y="3246120"/>
-            <a:ext cx="3291840" cy="457200"/>
+            <a:off x="658368" y="3355848"/>
+            <a:ext cx="3383280" cy="457200"/>
           </a:xfrm>
           <a:prstGeom prst="rect">
             <a:avLst/>
@@ -8138,7 +11005,7 @@
               </a:spcAft>
             </a:pPr>
             <a:r>
-              <a:rPr sz="1400" b="1" i="0">
+              <a:rPr sz="1500" b="1" i="0">
                 <a:solidFill>
                   <a:srgbClr val="151A21"/>
                 </a:solidFill>
@@ -8160,7 +11027,7 @@
               </a:spcAft>
             </a:pPr>
             <a:r>
-              <a:rPr sz="950" b="0" i="0">
+              <a:rPr sz="1000" b="0" i="0">
                 <a:solidFill>
                   <a:srgbClr val="6B7684"/>
                 </a:solidFill>
@@ -8179,8 +11046,8 @@
         </p:nvSpPr>
         <p:spPr>
           <a:xfrm>
-            <a:off x="4160520" y="3236976"/>
-            <a:ext cx="5747004" cy="292608"/>
+            <a:off x="4160520" y="3346704"/>
+            <a:ext cx="5747004" cy="329184"/>
           </a:xfrm>
           <a:prstGeom prst="rect">
             <a:avLst/>
@@ -8221,8 +11088,8 @@
         </p:nvSpPr>
         <p:spPr>
           <a:xfrm>
-            <a:off x="8764524" y="3264408"/>
-            <a:ext cx="1005840" cy="274320"/>
+            <a:off x="8718804" y="3383280"/>
+            <a:ext cx="1051560" cy="274320"/>
           </a:xfrm>
           <a:prstGeom prst="rect">
             <a:avLst/>
@@ -8247,7 +11114,7 @@
               </a:spcAft>
             </a:pPr>
             <a:r>
-              <a:rPr sz="1700" b="1" i="0">
+              <a:rPr sz="1800" b="1" i="0">
                 <a:solidFill>
                   <a:srgbClr val="FFFFFF"/>
                 </a:solidFill>
@@ -8266,7 +11133,7 @@
         </p:nvCxnSpPr>
         <p:spPr>
           <a:xfrm>
-            <a:off x="658368" y="3858768"/>
+            <a:off x="658368" y="4005072"/>
             <a:ext cx="10360152" cy="0"/>
           </a:xfrm>
           <a:prstGeom prst="line">
@@ -8301,8 +11168,8 @@
         </p:nvSpPr>
         <p:spPr>
           <a:xfrm>
-            <a:off x="658368" y="3968496"/>
-            <a:ext cx="3291840" cy="457200"/>
+            <a:off x="658368" y="4133087"/>
+            <a:ext cx="3383280" cy="457200"/>
           </a:xfrm>
           <a:prstGeom prst="rect">
             <a:avLst/>
@@ -8327,7 +11194,7 @@
               </a:spcAft>
             </a:pPr>
             <a:r>
-              <a:rPr sz="1400" b="1" i="0">
+              <a:rPr sz="1500" b="1" i="0">
                 <a:solidFill>
                   <a:srgbClr val="1A6AA8"/>
                 </a:solidFill>
@@ -8349,7 +11216,7 @@
               </a:spcAft>
             </a:pPr>
             <a:r>
-              <a:rPr sz="950" b="0" i="0">
+              <a:rPr sz="1000" b="0" i="0">
                 <a:solidFill>
                   <a:srgbClr val="6B7684"/>
                 </a:solidFill>
@@ -8368,8 +11235,8 @@
         </p:nvSpPr>
         <p:spPr>
           <a:xfrm>
-            <a:off x="4160520" y="3959352"/>
-            <a:ext cx="664083" cy="292608"/>
+            <a:off x="4160520" y="4123944"/>
+            <a:ext cx="664083" cy="329184"/>
           </a:xfrm>
           <a:prstGeom prst="rect">
             <a:avLst/>
@@ -8410,8 +11277,8 @@
         </p:nvSpPr>
         <p:spPr>
           <a:xfrm>
-            <a:off x="4970907" y="3977639"/>
-            <a:ext cx="2377440" cy="274320"/>
+            <a:off x="4970907" y="4151376"/>
+            <a:ext cx="3108960" cy="274320"/>
           </a:xfrm>
           <a:prstGeom prst="rect">
             <a:avLst/>
@@ -8436,7 +11303,7 @@
               </a:spcAft>
             </a:pPr>
             <a:r>
-              <a:rPr sz="1700" b="1" i="0">
+              <a:rPr sz="1800" b="1" i="0">
                 <a:solidFill>
                   <a:srgbClr val="1A6AA8"/>
                 </a:solidFill>
@@ -8445,13 +11312,13 @@
               <a:t>5.81%</a:t>
             </a:r>
             <a:r>
-              <a:rPr sz="1200" b="0" i="0">
+              <a:rPr sz="1400" b="0" i="0">
                 <a:solidFill>
                   <a:srgbClr val="6B7684"/>
                 </a:solidFill>
                 <a:latin typeface="Calibri"/>
               </a:rPr>
-              <a:t>    the problem is fixable</a:t>
+              <a:t>    so it can be fixed</a:t>
             </a:r>
           </a:p>
         </p:txBody>
@@ -8464,7 +11331,7 @@
         </p:nvCxnSpPr>
         <p:spPr>
           <a:xfrm>
-            <a:off x="4160520" y="4389120"/>
+            <a:off x="4160520" y="4608576"/>
             <a:ext cx="6858000" cy="0"/>
           </a:xfrm>
           <a:prstGeom prst="line">
@@ -8499,7 +11366,7 @@
         </p:nvSpPr>
         <p:spPr>
           <a:xfrm>
-            <a:off x="3794759" y="4443984"/>
+            <a:off x="3794759" y="4663440"/>
             <a:ext cx="731520" cy="219456"/>
           </a:xfrm>
           <a:prstGeom prst="rect">
@@ -8544,7 +11411,7 @@
         </p:nvSpPr>
         <p:spPr>
           <a:xfrm>
-            <a:off x="5509259" y="4443984"/>
+            <a:off x="5509259" y="4663440"/>
             <a:ext cx="731520" cy="219456"/>
           </a:xfrm>
           <a:prstGeom prst="rect">
@@ -8589,7 +11456,7 @@
         </p:nvSpPr>
         <p:spPr>
           <a:xfrm>
-            <a:off x="7223760" y="4443984"/>
+            <a:off x="7223760" y="4663440"/>
             <a:ext cx="731520" cy="219456"/>
           </a:xfrm>
           <a:prstGeom prst="rect">
@@ -8634,7 +11501,7 @@
         </p:nvSpPr>
         <p:spPr>
           <a:xfrm>
-            <a:off x="8938260" y="4443984"/>
+            <a:off x="8938260" y="4663440"/>
             <a:ext cx="731520" cy="219456"/>
           </a:xfrm>
           <a:prstGeom prst="rect">
@@ -8679,7 +11546,7 @@
         </p:nvSpPr>
         <p:spPr>
           <a:xfrm>
-            <a:off x="10652760" y="4443984"/>
+            <a:off x="10652760" y="4663440"/>
             <a:ext cx="731520" cy="219456"/>
           </a:xfrm>
           <a:prstGeom prst="rect">
@@ -8724,8 +11591,8 @@
         </p:nvSpPr>
         <p:spPr>
           <a:xfrm>
-            <a:off x="658368" y="4443984"/>
-            <a:ext cx="3291840" cy="219456"/>
+            <a:off x="658368" y="4663440"/>
+            <a:ext cx="3383280" cy="219456"/>
           </a:xfrm>
           <a:prstGeom prst="rect">
             <a:avLst/>
@@ -8750,7 +11617,7 @@
               </a:spcAft>
             </a:pPr>
             <a:r>
-              <a:rPr sz="950" b="0" i="0">
+              <a:rPr sz="1000" b="0" i="0">
                 <a:solidFill>
                   <a:srgbClr val="6B7684"/>
                 </a:solidFill>
@@ -8769,8 +11636,8 @@
         </p:nvSpPr>
         <p:spPr>
           <a:xfrm>
-            <a:off x="658368" y="4956048"/>
-            <a:ext cx="10874959" cy="1024128"/>
+            <a:off x="658368" y="5138928"/>
+            <a:ext cx="10874959" cy="868680"/>
           </a:xfrm>
           <a:prstGeom prst="rect">
             <a:avLst/>
@@ -8811,8 +11678,8 @@
         </p:nvSpPr>
         <p:spPr>
           <a:xfrm>
-            <a:off x="658368" y="4956048"/>
-            <a:ext cx="32004" cy="1024128"/>
+            <a:off x="658368" y="5138928"/>
+            <a:ext cx="32004" cy="868680"/>
           </a:xfrm>
           <a:prstGeom prst="rect">
             <a:avLst/>
@@ -8853,8 +11720,8 @@
         </p:nvSpPr>
         <p:spPr>
           <a:xfrm>
-            <a:off x="932688" y="5138928"/>
-            <a:ext cx="10344607" cy="658368"/>
+            <a:off x="932688" y="5321808"/>
+            <a:ext cx="10344607" cy="502919"/>
           </a:xfrm>
           <a:prstGeom prst="rect">
             <a:avLst/>
@@ -8885,7 +11752,7 @@
                 </a:solidFill>
                 <a:latin typeface="Consolas"/>
               </a:rPr>
-              <a:t>THE GAP IS THE TARGET</a:t>
+              <a:t/>
             </a:r>
           </a:p>
           <a:p>
@@ -8901,31 +11768,22 @@
               </a:spcAft>
             </a:pPr>
             <a:r>
-              <a:rPr sz="1400" b="0" i="0">
-                <a:solidFill>
-                  <a:srgbClr val="3C4551"/>
+              <a:rPr sz="1400" b="1" i="0">
+                <a:solidFill>
+                  <a:srgbClr val="151A21"/>
                 </a:solidFill>
                 <a:latin typeface="Calibri"/>
               </a:rPr>
-              <a:t>A detector at 1% and 37% has a 36-point gap. </a:t>
+              <a:t>A 36-point gap. </a:t>
             </a:r>
             <a:r>
               <a:rPr sz="1400" b="1" i="0">
                 <a:solidFill>
-                  <a:srgbClr val="151A21"/>
+                  <a:srgbClr val="1A6AA8"/>
                 </a:solidFill>
                 <a:latin typeface="Calibri"/>
               </a:rPr>
-              <a:t>Closing that gap is the job.</a:t>
-            </a:r>
-            <a:r>
-              <a:rPr sz="1400" b="0" i="0">
-                <a:solidFill>
-                  <a:srgbClr val="3C4551"/>
-                </a:solidFill>
-                <a:latin typeface="Calibri"/>
-              </a:rPr>
-              <a:t> More ASVspoof data will not do it: 33.9% to 33.1%, because every split comes from the same recordings.</a:t>
+              <a:t>Closing it is the job.</a:t>
             </a:r>
           </a:p>
         </p:txBody>
@@ -9059,7 +11917,7 @@
                 </a:solidFill>
                 <a:latin typeface="Arial"/>
               </a:rPr>
-              <a:t>The detector learns the </a:t>
+              <a:t>It learns the </a:t>
             </a:r>
             <a:r>
               <a:rPr sz="3400" b="1" i="0">
@@ -9090,8 +11948,8 @@
         </p:nvSpPr>
         <p:spPr>
           <a:xfrm>
-            <a:off x="658368" y="2148840"/>
-            <a:ext cx="3417722" cy="2103120"/>
+            <a:off x="658368" y="2286000"/>
+            <a:ext cx="3417722" cy="1874519"/>
           </a:xfrm>
           <a:prstGeom prst="rect">
             <a:avLst/>
@@ -9132,8 +11990,8 @@
         </p:nvSpPr>
         <p:spPr>
           <a:xfrm>
-            <a:off x="896112" y="2350008"/>
-            <a:ext cx="2942234" cy="1700784"/>
+            <a:off x="896112" y="2487168"/>
+            <a:ext cx="2942234" cy="1472184"/>
           </a:xfrm>
           <a:prstGeom prst="rect">
             <a:avLst/>
@@ -9176,11 +12034,11 @@
                 <a:spcPts val="0"/>
               </a:spcBef>
               <a:spcAft>
-                <a:spcPts val="900"/>
+                <a:spcPts val="1200"/>
               </a:spcAft>
             </a:pPr>
             <a:r>
-              <a:rPr sz="3000" b="1" i="0">
+              <a:rPr sz="3800" b="1" i="0">
                 <a:solidFill>
                   <a:srgbClr val="B0392E"/>
                 </a:solidFill>
@@ -9192,63 +12050,23 @@
           <a:p>
             <a:pPr>
               <a:lnSpc>
-                <a:spcPct val="130000"/>
+                <a:spcPct val="132000"/>
               </a:lnSpc>
               <a:spcBef>
                 <a:spcPts val="0"/>
               </a:spcBef>
               <a:spcAft>
-                <a:spcPts val="600"/>
+                <a:spcPts val="0"/>
               </a:spcAft>
             </a:pPr>
             <a:r>
-              <a:rPr sz="1300" b="0" i="0">
+              <a:rPr sz="1400" b="0" i="0">
                 <a:solidFill>
                   <a:srgbClr val="3C4551"/>
                 </a:solidFill>
                 <a:latin typeface="Calibri"/>
               </a:rPr>
-              <a:t>Accuracy from a classifier given </a:t>
-            </a:r>
-            <a:r>
-              <a:rPr sz="1300" b="1" i="0">
-                <a:solidFill>
-                  <a:srgbClr val="151A21"/>
-                </a:solidFill>
-                <a:latin typeface="Calibri"/>
-              </a:rPr>
-              <a:t>only the length of the opening silence</a:t>
-            </a:r>
-            <a:r>
-              <a:rPr sz="1300" b="0" i="0">
-                <a:solidFill>
-                  <a:srgbClr val="3C4551"/>
-                </a:solidFill>
-                <a:latin typeface="Calibri"/>
-              </a:rPr>
-              <a:t>.</a:t>
-            </a:r>
-          </a:p>
-          <a:p>
-            <a:pPr>
-              <a:lnSpc>
-                <a:spcPct val="115000"/>
-              </a:lnSpc>
-              <a:spcBef>
-                <a:spcPts val="0"/>
-              </a:spcBef>
-              <a:spcAft>
-                <a:spcPts val="0"/>
-              </a:spcAft>
-            </a:pPr>
-            <a:r>
-              <a:rPr sz="950" b="0" i="0">
-                <a:solidFill>
-                  <a:srgbClr val="6B7684"/>
-                </a:solidFill>
-                <a:latin typeface="Consolas"/>
-              </a:rPr>
-              <a:t>Müller et al.</a:t>
+              <a:t>accuracy from the length of the opening silence</a:t>
             </a:r>
           </a:p>
         </p:txBody>
@@ -9261,8 +12079,8 @@
         </p:nvSpPr>
         <p:spPr>
           <a:xfrm>
-            <a:off x="4386986" y="2148840"/>
-            <a:ext cx="3417722" cy="2103120"/>
+            <a:off x="4386986" y="2286000"/>
+            <a:ext cx="3417722" cy="1874519"/>
           </a:xfrm>
           <a:prstGeom prst="rect">
             <a:avLst/>
@@ -9303,8 +12121,8 @@
         </p:nvSpPr>
         <p:spPr>
           <a:xfrm>
-            <a:off x="4624730" y="2350008"/>
-            <a:ext cx="2942234" cy="1700784"/>
+            <a:off x="4624730" y="2487168"/>
+            <a:ext cx="2942234" cy="1472184"/>
           </a:xfrm>
           <a:prstGeom prst="rect">
             <a:avLst/>
@@ -9347,11 +12165,11 @@
                 <a:spcPts val="0"/>
               </a:spcBef>
               <a:spcAft>
-                <a:spcPts val="900"/>
+                <a:spcPts val="1200"/>
               </a:spcAft>
             </a:pPr>
             <a:r>
-              <a:rPr sz="3000" b="1" i="0">
+              <a:rPr sz="3800" b="1" i="0">
                 <a:solidFill>
                   <a:srgbClr val="B0392E"/>
                 </a:solidFill>
@@ -9363,63 +12181,23 @@
           <a:p>
             <a:pPr>
               <a:lnSpc>
-                <a:spcPct val="130000"/>
+                <a:spcPct val="132000"/>
               </a:lnSpc>
               <a:spcBef>
                 <a:spcPts val="0"/>
               </a:spcBef>
               <a:spcAft>
-                <a:spcPts val="600"/>
+                <a:spcPts val="0"/>
               </a:spcAft>
             </a:pPr>
             <a:r>
-              <a:rPr sz="1300" b="0" i="0">
+              <a:rPr sz="1400" b="0" i="0">
                 <a:solidFill>
                   <a:srgbClr val="3C4551"/>
                 </a:solidFill>
                 <a:latin typeface="Calibri"/>
               </a:rPr>
-              <a:t>Attack success from changing </a:t>
-            </a:r>
-            <a:r>
-              <a:rPr sz="1300" b="1" i="0">
-                <a:solidFill>
-                  <a:srgbClr val="151A21"/>
-                </a:solidFill>
-                <a:latin typeface="Calibri"/>
-              </a:rPr>
-              <a:t>only the background noise and the silence</a:t>
-            </a:r>
-            <a:r>
-              <a:rPr sz="1300" b="0" i="0">
-                <a:solidFill>
-                  <a:srgbClr val="3C4551"/>
-                </a:solidFill>
-                <a:latin typeface="Calibri"/>
-              </a:rPr>
-              <a:t>, never the voice.</a:t>
-            </a:r>
-          </a:p>
-          <a:p>
-            <a:pPr>
-              <a:lnSpc>
-                <a:spcPct val="115000"/>
-              </a:lnSpc>
-              <a:spcBef>
-                <a:spcPts val="0"/>
-              </a:spcBef>
-              <a:spcAft>
-                <a:spcPts val="0"/>
-              </a:spcAft>
-            </a:pPr>
-            <a:r>
-              <a:rPr sz="950" b="0" i="0">
-                <a:solidFill>
-                  <a:srgbClr val="6B7684"/>
-                </a:solidFill>
-                <a:latin typeface="Consolas"/>
-              </a:rPr>
-              <a:t>SiFDetectCracker, ACM MM 2023</a:t>
+              <a:t>success without ever touching the voice</a:t>
             </a:r>
           </a:p>
         </p:txBody>
@@ -9432,8 +12210,8 @@
         </p:nvSpPr>
         <p:spPr>
           <a:xfrm>
-            <a:off x="8115604" y="2148840"/>
-            <a:ext cx="3417722" cy="2103120"/>
+            <a:off x="8115604" y="2286000"/>
+            <a:ext cx="3417722" cy="1874519"/>
           </a:xfrm>
           <a:prstGeom prst="rect">
             <a:avLst/>
@@ -9474,8 +12252,8 @@
         </p:nvSpPr>
         <p:spPr>
           <a:xfrm>
-            <a:off x="8353348" y="2350008"/>
-            <a:ext cx="2942234" cy="1700784"/>
+            <a:off x="8353348" y="2487168"/>
+            <a:ext cx="2942234" cy="1472184"/>
           </a:xfrm>
           <a:prstGeom prst="rect">
             <a:avLst/>
@@ -9518,79 +12296,39 @@
                 <a:spcPts val="0"/>
               </a:spcBef>
               <a:spcAft>
-                <a:spcPts val="900"/>
+                <a:spcPts val="1200"/>
               </a:spcAft>
             </a:pPr>
             <a:r>
-              <a:rPr sz="3000" b="1" i="0">
+              <a:rPr sz="3800" b="1" i="0">
                 <a:solidFill>
                   <a:srgbClr val="B0392E"/>
                 </a:solidFill>
                 <a:latin typeface="Consolas"/>
               </a:rPr>
-              <a:t>0.5–0.6 kHz</a:t>
+              <a:t>0.5-0.6 kHz</a:t>
             </a:r>
           </a:p>
           <a:p>
             <a:pPr>
               <a:lnSpc>
-                <a:spcPct val="130000"/>
+                <a:spcPct val="132000"/>
               </a:lnSpc>
               <a:spcBef>
                 <a:spcPts val="0"/>
               </a:spcBef>
               <a:spcAft>
-                <a:spcPts val="600"/>
+                <a:spcPts val="0"/>
               </a:spcAft>
             </a:pPr>
             <a:r>
-              <a:rPr sz="1300" b="0" i="0">
+              <a:rPr sz="1400" b="0" i="0">
                 <a:solidFill>
                   <a:srgbClr val="3C4551"/>
                 </a:solidFill>
                 <a:latin typeface="Calibri"/>
               </a:rPr>
-              <a:t>SHAP analysis: the model attends to </a:t>
-            </a:r>
-            <a:r>
-              <a:rPr sz="1300" b="1" i="0">
-                <a:solidFill>
-                  <a:srgbClr val="151A21"/>
-                </a:solidFill>
-                <a:latin typeface="Calibri"/>
-              </a:rPr>
-              <a:t>the gaps between words</a:t>
-            </a:r>
-            <a:r>
-              <a:rPr sz="1300" b="0" i="0">
-                <a:solidFill>
-                  <a:srgbClr val="3C4551"/>
-                </a:solidFill>
-                <a:latin typeface="Calibri"/>
-              </a:rPr>
-              <a:t> and one narrow low band.</a:t>
-            </a:r>
-          </a:p>
-          <a:p>
-            <a:pPr>
-              <a:lnSpc>
-                <a:spcPct val="115000"/>
-              </a:lnSpc>
-              <a:spcBef>
-                <a:spcPts val="0"/>
-              </a:spcBef>
-              <a:spcAft>
-                <a:spcPts val="0"/>
-              </a:spcAft>
-            </a:pPr>
-            <a:r>
-              <a:rPr sz="950" b="0" i="0">
-                <a:solidFill>
-                  <a:srgbClr val="6B7684"/>
-                </a:solidFill>
-                <a:latin typeface="Consolas"/>
-              </a:rPr>
-              <a:t>arXiv:2110.03309</a:t>
+              <a:t>the gaps between words, one narrow band</a:t>
             </a:r>
           </a:p>
         </p:txBody>
@@ -9604,7 +12342,7 @@
         <p:spPr>
           <a:xfrm>
             <a:off x="658368" y="4617720"/>
-            <a:ext cx="10874959" cy="1234440"/>
+            <a:ext cx="10874959" cy="1143000"/>
           </a:xfrm>
           <a:prstGeom prst="rect">
             <a:avLst/>
@@ -9646,7 +12384,7 @@
         <p:spPr>
           <a:xfrm>
             <a:off x="658368" y="4617720"/>
-            <a:ext cx="32004" cy="1234440"/>
+            <a:ext cx="32004" cy="1143000"/>
           </a:xfrm>
           <a:prstGeom prst="rect">
             <a:avLst/>
@@ -9688,7 +12426,7 @@
         <p:spPr>
           <a:xfrm>
             <a:off x="932688" y="4800600"/>
-            <a:ext cx="10344607" cy="868680"/>
+            <a:ext cx="10344607" cy="777240"/>
           </a:xfrm>
           <a:prstGeom prst="rect">
             <a:avLst/>
@@ -9741,7 +12479,7 @@
                 </a:solidFill>
                 <a:latin typeface="Calibri"/>
               </a:rPr>
-              <a:t>The model wins on things that belong to the corpus, not to the speech. </a:t>
+              <a:t>It wins on what belongs to the corpus, not the speech. </a:t>
             </a:r>
             <a:r>
               <a:rPr sz="1400" b="1" i="0">
@@ -9750,7 +12488,7 @@
                 </a:solidFill>
                 <a:latin typeface="Calibri"/>
               </a:rPr>
-              <a:t>All of them can be taken away during training.</a:t>
+              <a:t>All of it can be taken away in training.</a:t>
             </a:r>
           </a:p>
         </p:txBody>
@@ -9897,8 +12635,8 @@
         </p:nvSpPr>
         <p:spPr>
           <a:xfrm>
-            <a:off x="3663095" y="1965960"/>
-            <a:ext cx="1815503" cy="1481328"/>
+            <a:off x="3663095" y="2240280"/>
+            <a:ext cx="1815503" cy="1645920"/>
           </a:xfrm>
           <a:prstGeom prst="rect">
             <a:avLst/>
@@ -9939,8 +12677,8 @@
         </p:nvSpPr>
         <p:spPr>
           <a:xfrm>
-            <a:off x="9036470" y="1965960"/>
-            <a:ext cx="2210649" cy="1481328"/>
+            <a:off x="9036470" y="2240280"/>
+            <a:ext cx="2210649" cy="1645920"/>
           </a:xfrm>
           <a:prstGeom prst="rect">
             <a:avLst/>
@@ -9981,8 +12719,8 @@
         </p:nvSpPr>
         <p:spPr>
           <a:xfrm>
-            <a:off x="3702166" y="1737360"/>
-            <a:ext cx="1737360" cy="201168"/>
+            <a:off x="3702166" y="1993392"/>
+            <a:ext cx="1737360" cy="219456"/>
           </a:xfrm>
           <a:prstGeom prst="rect">
             <a:avLst/>
@@ -10007,7 +12745,7 @@
               </a:spcAft>
             </a:pPr>
             <a:r>
-              <a:rPr sz="950" b="1" i="0">
+              <a:rPr sz="1000" b="1" i="0">
                 <a:solidFill>
                   <a:srgbClr val="1A6AA8"/>
                 </a:solidFill>
@@ -10026,8 +12764,8 @@
         </p:nvSpPr>
         <p:spPr>
           <a:xfrm>
-            <a:off x="8953075" y="1737360"/>
-            <a:ext cx="2377440" cy="201168"/>
+            <a:off x="8953075" y="1993392"/>
+            <a:ext cx="2377440" cy="219456"/>
           </a:xfrm>
           <a:prstGeom prst="rect">
             <a:avLst/>
@@ -10052,7 +12790,7 @@
               </a:spcAft>
             </a:pPr>
             <a:r>
-              <a:rPr sz="950" b="1" i="0">
+              <a:rPr sz="1000" b="1" i="0">
                 <a:solidFill>
                   <a:srgbClr val="B0392E"/>
                 </a:solidFill>
@@ -10071,7 +12809,7 @@
         </p:nvSpPr>
         <p:spPr>
           <a:xfrm>
-            <a:off x="658368" y="2139696"/>
+            <a:off x="658368" y="2404872"/>
             <a:ext cx="2286000" cy="274320"/>
           </a:xfrm>
           <a:prstGeom prst="rect">
@@ -10097,7 +12835,7 @@
               </a:spcAft>
             </a:pPr>
             <a:r>
-              <a:rPr sz="1300" b="1" i="0">
+              <a:rPr sz="1500" b="1" i="0">
                 <a:solidFill>
                   <a:srgbClr val="151A21"/>
                 </a:solidFill>
@@ -10116,8 +12854,8 @@
         </p:nvSpPr>
         <p:spPr>
           <a:xfrm>
-            <a:off x="3017520" y="2121408"/>
-            <a:ext cx="8229600" cy="201168"/>
+            <a:off x="3017520" y="2395728"/>
+            <a:ext cx="8229600" cy="237744"/>
           </a:xfrm>
           <a:prstGeom prst="rect">
             <a:avLst/>
@@ -10158,7 +12896,7 @@
         </p:nvSpPr>
         <p:spPr>
           <a:xfrm>
-            <a:off x="658368" y="2624328"/>
+            <a:off x="658368" y="2935224"/>
             <a:ext cx="2286000" cy="274320"/>
           </a:xfrm>
           <a:prstGeom prst="rect">
@@ -10184,7 +12922,7 @@
               </a:spcAft>
             </a:pPr>
             <a:r>
-              <a:rPr sz="1300" b="1" i="0">
+              <a:rPr sz="1500" b="1" i="0">
                 <a:solidFill>
                   <a:srgbClr val="151A21"/>
                 </a:solidFill>
@@ -10203,8 +12941,8 @@
         </p:nvSpPr>
         <p:spPr>
           <a:xfrm>
-            <a:off x="3017520" y="2606040"/>
-            <a:ext cx="6787612" cy="201168"/>
+            <a:off x="3017520" y="2926080"/>
+            <a:ext cx="6787612" cy="237744"/>
           </a:xfrm>
           <a:prstGeom prst="rect">
             <a:avLst/>
@@ -10245,7 +12983,7 @@
         </p:nvSpPr>
         <p:spPr>
           <a:xfrm>
-            <a:off x="658368" y="3108960"/>
+            <a:off x="658368" y="3465575"/>
             <a:ext cx="2286000" cy="274320"/>
           </a:xfrm>
           <a:prstGeom prst="rect">
@@ -10271,7 +13009,7 @@
               </a:spcAft>
             </a:pPr>
             <a:r>
-              <a:rPr sz="1300" b="1" i="0">
+              <a:rPr sz="1500" b="1" i="0">
                 <a:solidFill>
                   <a:srgbClr val="151A21"/>
                 </a:solidFill>
@@ -10290,8 +13028,8 @@
         </p:nvSpPr>
         <p:spPr>
           <a:xfrm>
-            <a:off x="5478598" y="3090672"/>
-            <a:ext cx="3334643" cy="201168"/>
+            <a:off x="5478598" y="3456432"/>
+            <a:ext cx="3334643" cy="237744"/>
           </a:xfrm>
           <a:prstGeom prst="rect">
             <a:avLst/>
@@ -10332,7 +13070,7 @@
         </p:nvCxnSpPr>
         <p:spPr>
           <a:xfrm>
-            <a:off x="3017520" y="3474720"/>
+            <a:off x="3017520" y="3913632"/>
             <a:ext cx="8229600" cy="0"/>
           </a:xfrm>
           <a:prstGeom prst="line">
@@ -10367,7 +13105,7 @@
         </p:nvSpPr>
         <p:spPr>
           <a:xfrm>
-            <a:off x="2606039" y="3529584"/>
+            <a:off x="2606039" y="3968496"/>
             <a:ext cx="822960" cy="219456"/>
           </a:xfrm>
           <a:prstGeom prst="rect">
@@ -10412,7 +13150,7 @@
         </p:nvSpPr>
         <p:spPr>
           <a:xfrm>
-            <a:off x="5067118" y="3529584"/>
+            <a:off x="5067118" y="3968496"/>
             <a:ext cx="822960" cy="219456"/>
           </a:xfrm>
           <a:prstGeom prst="rect">
@@ -10457,7 +13195,7 @@
         </p:nvSpPr>
         <p:spPr>
           <a:xfrm>
-            <a:off x="8401761" y="3529584"/>
+            <a:off x="8401761" y="3968496"/>
             <a:ext cx="822960" cy="219456"/>
           </a:xfrm>
           <a:prstGeom prst="rect">
@@ -10502,7 +13240,7 @@
         </p:nvSpPr>
         <p:spPr>
           <a:xfrm>
-            <a:off x="9393652" y="3529584"/>
+            <a:off x="9393652" y="3968496"/>
             <a:ext cx="822960" cy="219456"/>
           </a:xfrm>
           <a:prstGeom prst="rect">
@@ -10547,7 +13285,7 @@
         </p:nvSpPr>
         <p:spPr>
           <a:xfrm>
-            <a:off x="10835640" y="3529584"/>
+            <a:off x="10835640" y="3968496"/>
             <a:ext cx="822960" cy="219456"/>
           </a:xfrm>
           <a:prstGeom prst="rect">
@@ -10592,8 +13330,8 @@
         </p:nvSpPr>
         <p:spPr>
           <a:xfrm>
-            <a:off x="658368" y="4160520"/>
-            <a:ext cx="10874959" cy="1417320"/>
+            <a:off x="658368" y="4526280"/>
+            <a:ext cx="10874959" cy="1234440"/>
           </a:xfrm>
           <a:prstGeom prst="rect">
             <a:avLst/>
@@ -10634,8 +13372,8 @@
         </p:nvSpPr>
         <p:spPr>
           <a:xfrm>
-            <a:off x="658368" y="4160520"/>
-            <a:ext cx="32004" cy="1417320"/>
+            <a:off x="658368" y="4526280"/>
+            <a:ext cx="32004" cy="1234440"/>
           </a:xfrm>
           <a:prstGeom prst="rect">
             <a:avLst/>
@@ -10676,8 +13414,8 @@
         </p:nvSpPr>
         <p:spPr>
           <a:xfrm>
-            <a:off x="932688" y="4343400"/>
-            <a:ext cx="10344607" cy="1051560"/>
+            <a:off x="932688" y="4709160"/>
+            <a:ext cx="10344607" cy="868680"/>
           </a:xfrm>
           <a:prstGeom prst="rect">
             <a:avLst/>
@@ -10708,7 +13446,7 @@
                 </a:solidFill>
                 <a:latin typeface="Consolas"/>
               </a:rPr>
-              <a:t>GOOD NEWS FOR THE DESIGN</a:t>
+              <a:t>GOOD NEWS</a:t>
             </a:r>
           </a:p>
           <a:p>
@@ -10730,7 +13468,7 @@
                 </a:solidFill>
                 <a:latin typeface="Calibri"/>
               </a:rPr>
-              <a:t>A phone line throws away the top of the spectrum, where the synthesis artifact lives. But low-passing to the telephone band </a:t>
+              <a:t>The phone keeps the pitch band. </a:t>
             </a:r>
             <a:r>
               <a:rPr sz="1400" b="1" i="0">
@@ -10739,34 +13477,7 @@
                 </a:solidFill>
                 <a:latin typeface="Calibri"/>
               </a:rPr>
-              <a:t>improves</a:t>
-            </a:r>
-            <a:r>
-              <a:rPr sz="1400" b="0" i="0">
-                <a:solidFill>
-                  <a:srgbClr val="3C4551"/>
-                </a:solidFill>
-                <a:latin typeface="Calibri"/>
-              </a:rPr>
-              <a:t> codec robustness by about 25% relative, because the high bins are what overfit. And the </a:t>
-            </a:r>
-            <a:r>
-              <a:rPr sz="1400" b="1" i="0">
-                <a:solidFill>
-                  <a:srgbClr val="1A6AA8"/>
-                </a:solidFill>
-                <a:latin typeface="Calibri"/>
-              </a:rPr>
-              <a:t>pitch band alone reaches 1.15% EER</a:t>
-            </a:r>
-            <a:r>
-              <a:rPr sz="1400" b="0" i="0">
-                <a:solidFill>
-                  <a:srgbClr val="3C4551"/>
-                </a:solidFill>
-                <a:latin typeface="Calibri"/>
-              </a:rPr>
-              <a:t>. The band the phone keeps is a band we can build on.</a:t>
+              <a:t>The pitch band alone reaches 1.15% EER.</a:t>
             </a:r>
           </a:p>
         </p:txBody>
@@ -10932,8 +13643,8 @@
           <p:nvPr/>
         </p:nvGraphicFramePr>
         <p:xfrm>
-          <a:off x="658368" y="2103120"/>
-          <a:ext cx="10872216" cy="3108960"/>
+          <a:off x="658368" y="2286000"/>
+          <a:ext cx="10872216" cy="2834640"/>
         </p:xfrm>
         <a:graphic>
           <a:graphicData uri="http://schemas.openxmlformats.org/drawingml/2006/table">
@@ -10942,10 +13653,10 @@
                 <a:tableStyleId>{5C22544A-7EE6-4342-B048-85BDC9FD1C3A}</a:tableStyleId>
               </a:tblPr>
               <a:tblGrid>
-                <a:gridCol w="3657600"/>
-                <a:gridCol w="7214616"/>
+                <a:gridCol w="5486400"/>
+                <a:gridCol w="5385816"/>
               </a:tblGrid>
-              <a:tr h="444137">
+              <a:tr h="404948">
                 <a:tc>
                   <a:txBody>
                     <a:bodyPr wrap="square"/>
@@ -10990,7 +13701,7 @@
                           </a:solidFill>
                           <a:latin typeface="Consolas"/>
                         </a:rPr>
-                        <a:t>WHY</a:t>
+                        <a:t>EVIDENCE</a:t>
                       </a:r>
                     </a:p>
                   </a:txBody>
@@ -11001,7 +13712,7 @@
                   </a:tcPr>
                 </a:tc>
               </a:tr>
-              <a:tr h="444137">
+              <a:tr h="404948">
                 <a:tc>
                   <a:txBody>
                     <a:bodyPr wrap="square"/>
@@ -11016,7 +13727,7 @@
                         </a:spcAft>
                       </a:pPr>
                       <a:r>
-                        <a:rPr sz="1250" b="1" i="0">
+                        <a:rPr sz="1400" b="1" i="0">
                           <a:solidFill>
                             <a:srgbClr val="151A21"/>
                           </a:solidFill>
@@ -11046,13 +13757,13 @@
                         </a:spcAft>
                       </a:pPr>
                       <a:r>
-                        <a:rPr sz="1250" b="0" i="0">
+                        <a:rPr sz="1400" b="0" i="0">
                           <a:solidFill>
                             <a:srgbClr val="3C4551"/>
                           </a:solidFill>
-                          <a:latin typeface="Calibri"/>
+                          <a:latin typeface="Consolas"/>
                         </a:rPr>
-                        <a:t>Every top-5 system in ASVspoof 2021 used it. No counterexample.</a:t>
+                        <a:t>every top-5 system in 2021 used it</a:t>
                       </a:r>
                     </a:p>
                   </a:txBody>
@@ -11063,7 +13774,7 @@
                   </a:tcPr>
                 </a:tc>
               </a:tr>
-              <a:tr h="444137">
+              <a:tr h="404948">
                 <a:tc>
                   <a:txBody>
                     <a:bodyPr wrap="square"/>
@@ -11078,7 +13789,7 @@
                         </a:spcAft>
                       </a:pPr>
                       <a:r>
-                        <a:rPr sz="1250" b="1" i="0">
+                        <a:rPr sz="1400" b="1" i="0">
                           <a:solidFill>
                             <a:srgbClr val="151A21"/>
                           </a:solidFill>
@@ -11108,13 +13819,13 @@
                         </a:spcAft>
                       </a:pPr>
                       <a:r>
-                        <a:rPr sz="1250" b="0" i="0">
+                        <a:rPr sz="1400" b="0" i="0">
                           <a:solidFill>
                             <a:srgbClr val="3C4551"/>
                           </a:solidFill>
-                          <a:latin typeface="Calibri"/>
+                          <a:latin typeface="Consolas"/>
                         </a:rPr>
-                        <a:t>Mel is 37% worse on average, all else equal. It throws away the resolution the task needs.</a:t>
+                        <a:t>mel is 37% worse</a:t>
                       </a:r>
                     </a:p>
                   </a:txBody>
@@ -11125,7 +13836,7 @@
                   </a:tcPr>
                 </a:tc>
               </a:tr>
-              <a:tr h="444137">
+              <a:tr h="404948">
                 <a:tc>
                   <a:txBody>
                     <a:bodyPr wrap="square"/>
@@ -11140,7 +13851,7 @@
                         </a:spcAft>
                       </a:pPr>
                       <a:r>
-                        <a:rPr sz="1250" b="1" i="0">
+                        <a:rPr sz="1400" b="1" i="0">
                           <a:solidFill>
                             <a:srgbClr val="151A21"/>
                           </a:solidFill>
@@ -11170,13 +13881,13 @@
                         </a:spcAft>
                       </a:pPr>
                       <a:r>
-                        <a:rPr sz="1250" b="0" i="0">
+                        <a:rPr sz="1400" b="0" i="0">
                           <a:solidFill>
                             <a:srgbClr val="3C4551"/>
                           </a:solidFill>
-                          <a:latin typeface="Calibri"/>
+                          <a:latin typeface="Consolas"/>
                         </a:rPr>
-                        <a:t>Takes away the cue that carries 85% of the decision.</a:t>
+                        <a:t>removes the cue worth 85%</a:t>
                       </a:r>
                     </a:p>
                   </a:txBody>
@@ -11187,7 +13898,7 @@
                   </a:tcPr>
                 </a:tc>
               </a:tr>
-              <a:tr h="444137">
+              <a:tr h="404948">
                 <a:tc>
                   <a:txBody>
                     <a:bodyPr wrap="square"/>
@@ -11202,7 +13913,7 @@
                         </a:spcAft>
                       </a:pPr>
                       <a:r>
-                        <a:rPr sz="1250" b="1" i="0">
+                        <a:rPr sz="1400" b="1" i="0">
                           <a:solidFill>
                             <a:srgbClr val="151A21"/>
                           </a:solidFill>
@@ -11232,13 +13943,13 @@
                         </a:spcAft>
                       </a:pPr>
                       <a:r>
-                        <a:rPr sz="1250" b="0" i="0">
+                        <a:rPr sz="1400" b="0" i="0">
                           <a:solidFill>
                             <a:srgbClr val="3C4551"/>
                           </a:solidFill>
-                          <a:latin typeface="Calibri"/>
+                          <a:latin typeface="Consolas"/>
                         </a:rPr>
-                        <a:t>Costs high frequencies, buys 25% relative EER under codec shift. We test it, not assume it.</a:t>
+                        <a:t>25% better under codec shift</a:t>
                       </a:r>
                     </a:p>
                   </a:txBody>
@@ -11249,7 +13960,7 @@
                   </a:tcPr>
                 </a:tc>
               </a:tr>
-              <a:tr h="444137">
+              <a:tr h="404948">
                 <a:tc>
                   <a:txBody>
                     <a:bodyPr wrap="square"/>
@@ -11264,7 +13975,7 @@
                         </a:spcAft>
                       </a:pPr>
                       <a:r>
-                        <a:rPr sz="1250" b="1" i="0">
+                        <a:rPr sz="1400" b="1" i="0">
                           <a:solidFill>
                             <a:srgbClr val="151A21"/>
                           </a:solidFill>
@@ -11294,13 +14005,13 @@
                         </a:spcAft>
                       </a:pPr>
                       <a:r>
-                        <a:rPr sz="1250" b="0" i="0">
+                        <a:rPr sz="1400" b="0" i="0">
                           <a:solidFill>
                             <a:srgbClr val="3C4551"/>
                           </a:solidFill>
-                          <a:latin typeface="Calibri"/>
+                          <a:latin typeface="Consolas"/>
                         </a:rPr>
-                        <a:t>The most robust under attack: 1.89% to 11.6%, where SSNET goes to 61.81%. Also the heaviest.</a:t>
+                        <a:t>1.89% to 11.6% under attack, but heavy</a:t>
                       </a:r>
                     </a:p>
                   </a:txBody>
@@ -11311,7 +14022,7 @@
                   </a:tcPr>
                 </a:tc>
               </a:tr>
-              <a:tr h="444138">
+              <a:tr h="404952">
                 <a:tc>
                   <a:txBody>
                     <a:bodyPr wrap="square"/>
@@ -11326,7 +14037,7 @@
                         </a:spcAft>
                       </a:pPr>
                       <a:r>
-                        <a:rPr sz="1250" b="1" i="0">
+                        <a:rPr sz="1400" b="1" i="0">
                           <a:solidFill>
                             <a:srgbClr val="151A21"/>
                           </a:solidFill>
@@ -11356,13 +14067,13 @@
                         </a:spcAft>
                       </a:pPr>
                       <a:r>
-                        <a:rPr sz="1250" b="0" i="0">
+                        <a:rPr sz="1400" b="0" i="0">
                           <a:solidFill>
                             <a:srgbClr val="3C4551"/>
                           </a:solidFill>
-                          <a:latin typeface="Calibri"/>
+                          <a:latin typeface="Consolas"/>
                         </a:rPr>
-                        <a:t>Learns what real speech is, instead of which attacks we happened to see.</a:t>
+                        <a:t>learns real speech, not known attacks</a:t>
                       </a:r>
                     </a:p>
                   </a:txBody>
@@ -11417,7 +14128,7 @@
                 </a:solidFill>
                 <a:latin typeface="Calibri"/>
               </a:rPr>
-              <a:t>None of these is new on its own. The work is making them hold against both shifts at once, corpus and channel.</a:t>
+              <a:t>None of these is new on its own. The work is making them hold against both shifts at once.</a:t>
             </a:r>
           </a:p>
         </p:txBody>
@@ -11582,8 +14293,8 @@
         </p:nvSpPr>
         <p:spPr>
           <a:xfrm>
-            <a:off x="658368" y="2148840"/>
-            <a:ext cx="5282031" cy="2148840"/>
+            <a:off x="658368" y="2286000"/>
+            <a:ext cx="5282031" cy="1874519"/>
           </a:xfrm>
           <a:prstGeom prst="rect">
             <a:avLst/>
@@ -11624,8 +14335,8 @@
         </p:nvSpPr>
         <p:spPr>
           <a:xfrm>
-            <a:off x="896112" y="2350008"/>
-            <a:ext cx="4806543" cy="1746504"/>
+            <a:off x="896112" y="2487168"/>
+            <a:ext cx="4806543" cy="1472184"/>
           </a:xfrm>
           <a:prstGeom prst="rect">
             <a:avLst/>
@@ -11662,38 +14373,29 @@
           <a:p>
             <a:pPr>
               <a:lnSpc>
-                <a:spcPct val="130000"/>
+                <a:spcPct val="132000"/>
               </a:lnSpc>
               <a:spcBef>
                 <a:spcPts val="0"/>
               </a:spcBef>
               <a:spcAft>
-                <a:spcPts val="1000"/>
+                <a:spcPts val="1200"/>
               </a:spcAft>
             </a:pPr>
             <a:r>
-              <a:rPr sz="1350" b="1" i="0">
+              <a:rPr sz="1600" b="1" i="0">
                 <a:solidFill>
                   <a:srgbClr val="151A21"/>
                 </a:solidFill>
                 <a:latin typeface="Calibri"/>
               </a:rPr>
-              <a:t>ASVspoof 2019 LA</a:t>
-            </a:r>
-            <a:r>
-              <a:rPr sz="1350" b="0" i="0">
-                <a:solidFill>
-                  <a:srgbClr val="3C4551"/>
-                </a:solidFill>
-                <a:latin typeface="Calibri"/>
-              </a:rPr>
-              <a:t>, clean, with our augmentation on top. 25,380 utterances.</a:t>
+              <a:t>ASVspoof 2019 LA, clean.</a:t>
             </a:r>
           </a:p>
           <a:p>
             <a:pPr>
               <a:lnSpc>
-                <a:spcPct val="130000"/>
+                <a:spcPct val="132000"/>
               </a:lnSpc>
               <a:spcBef>
                 <a:spcPts val="0"/>
@@ -11703,13 +14405,13 @@
               </a:spcAft>
             </a:pPr>
             <a:r>
-              <a:rPr sz="1350" b="0" i="0">
+              <a:rPr sz="1600" b="0" i="0">
                 <a:solidFill>
                   <a:srgbClr val="3C4551"/>
                 </a:solidFill>
                 <a:latin typeface="Calibri"/>
               </a:rPr>
-              <a:t>We hold out one attack family, so unseen attacks are measured before we touch another corpus.</a:t>
+              <a:t>One attack family held out.</a:t>
             </a:r>
           </a:p>
         </p:txBody>
@@ -11722,8 +14424,8 @@
         </p:nvSpPr>
         <p:spPr>
           <a:xfrm>
-            <a:off x="6251295" y="2148840"/>
-            <a:ext cx="5282031" cy="2148840"/>
+            <a:off x="6251295" y="2286000"/>
+            <a:ext cx="5282031" cy="1874519"/>
           </a:xfrm>
           <a:prstGeom prst="rect">
             <a:avLst/>
@@ -11764,8 +14466,8 @@
         </p:nvSpPr>
         <p:spPr>
           <a:xfrm>
-            <a:off x="6489039" y="2350008"/>
-            <a:ext cx="4806543" cy="1746504"/>
+            <a:off x="6489039" y="2487168"/>
+            <a:ext cx="4806543" cy="1472184"/>
           </a:xfrm>
           <a:prstGeom prst="rect">
             <a:avLst/>
@@ -11802,56 +14504,38 @@
           <a:p>
             <a:pPr>
               <a:lnSpc>
-                <a:spcPct val="130000"/>
+                <a:spcPct val="132000"/>
               </a:lnSpc>
               <a:spcBef>
                 <a:spcPts val="0"/>
               </a:spcBef>
               <a:spcAft>
-                <a:spcPts val="1000"/>
+                <a:spcPts val="1200"/>
               </a:spcAft>
             </a:pPr>
             <a:r>
-              <a:rPr sz="1350" b="1" i="0">
+              <a:rPr sz="1600" b="1" i="0">
                 <a:solidFill>
                   <a:srgbClr val="151A21"/>
                 </a:solidFill>
                 <a:latin typeface="Calibri"/>
               </a:rPr>
-              <a:t>ASVspoof 2021 LA </a:t>
-            </a:r>
-            <a:r>
-              <a:rPr sz="1350" b="0" i="0">
+              <a:t>ASVspoof 2021 LA</a:t>
+            </a:r>
+            <a:r>
+              <a:rPr sz="1600" b="0" i="0">
                 <a:solidFill>
                   <a:srgbClr val="3C4551"/>
                 </a:solidFill>
                 <a:latin typeface="Calibri"/>
               </a:rPr>
-              <a:t>for the channel. Real VoIP and PSTN, seven codecs, </a:t>
-            </a:r>
-            <a:r>
-              <a:rPr sz="1350" b="1" i="0">
-                <a:solidFill>
-                  <a:srgbClr val="151A21"/>
-                </a:solidFill>
-                <a:latin typeface="Consolas"/>
-              </a:rPr>
-              <a:t>25,938</a:t>
-            </a:r>
-            <a:r>
-              <a:rPr sz="1350" b="0" i="0">
-                <a:solidFill>
-                  <a:srgbClr val="3C4551"/>
-                </a:solidFill>
-                <a:latin typeface="Calibri"/>
-              </a:rPr>
-              <a:t> trials each.</a:t>
+              <a:t>   for the channel</a:t>
             </a:r>
           </a:p>
           <a:p>
             <a:pPr>
               <a:lnSpc>
-                <a:spcPct val="130000"/>
+                <a:spcPct val="132000"/>
               </a:lnSpc>
               <a:spcBef>
                 <a:spcPts val="0"/>
@@ -11861,22 +14545,22 @@
               </a:spcAft>
             </a:pPr>
             <a:r>
-              <a:rPr sz="1350" b="1" i="0">
+              <a:rPr sz="1600" b="1" i="0">
                 <a:solidFill>
                   <a:srgbClr val="151A21"/>
                 </a:solidFill>
                 <a:latin typeface="Calibri"/>
               </a:rPr>
-              <a:t>In-the-Wild </a:t>
-            </a:r>
-            <a:r>
-              <a:rPr sz="1350" b="0" i="0">
+              <a:t>In-the-Wild</a:t>
+            </a:r>
+            <a:r>
+              <a:rPr sz="1600" b="0" i="0">
                 <a:solidFill>
                   <a:srgbClr val="3C4551"/>
                 </a:solidFill>
                 <a:latin typeface="Calibri"/>
               </a:rPr>
-              <a:t>for the corpus. New speakers, new attacks, new recordings. 31,779 clips.</a:t>
+              <a:t>   for the corpus</a:t>
             </a:r>
           </a:p>
         </p:txBody>
@@ -11889,8 +14573,8 @@
         </p:nvSpPr>
         <p:spPr>
           <a:xfrm>
-            <a:off x="658368" y="4526280"/>
-            <a:ext cx="10874959" cy="1298448"/>
+            <a:off x="658368" y="4480560"/>
+            <a:ext cx="10874959" cy="1280160"/>
           </a:xfrm>
           <a:prstGeom prst="rect">
             <a:avLst/>
@@ -11931,8 +14615,8 @@
         </p:nvSpPr>
         <p:spPr>
           <a:xfrm>
-            <a:off x="658368" y="4526280"/>
-            <a:ext cx="32004" cy="1298448"/>
+            <a:off x="658368" y="4480560"/>
+            <a:ext cx="32004" cy="1280160"/>
           </a:xfrm>
           <a:prstGeom prst="rect">
             <a:avLst/>
@@ -11973,8 +14657,8 @@
         </p:nvSpPr>
         <p:spPr>
           <a:xfrm>
-            <a:off x="932688" y="4709160"/>
-            <a:ext cx="10344607" cy="932688"/>
+            <a:off x="932688" y="4663440"/>
+            <a:ext cx="10344607" cy="914399"/>
           </a:xfrm>
           <a:prstGeom prst="rect">
             <a:avLst/>
@@ -12027,7 +14711,7 @@
                 </a:solidFill>
                 <a:latin typeface="Consolas"/>
               </a:rPr>
-              <a:t>gap  =  out-of-domain EER  −  in-domain EER</a:t>
+              <a:t>gap  =  out-of-domain EER  -  in-domain EER</a:t>
             </a:r>
             <a:r>
               <a:rPr sz="1400" b="0" i="0">
@@ -12037,7 +14721,7 @@
                 <a:latin typeface="Calibri"/>
               </a:rPr>
               <a:t>
-A detector at 1% and 37% has a 36-point gap. We report all three, per codec and per corpus, never averaged together. The gap is what we optimise.</a:t>
+Reported per codec and per corpus. Never averaged together.</a:t>
             </a:r>
           </a:p>
         </p:txBody>
@@ -12184,8 +14868,8 @@
         </p:nvSpPr>
         <p:spPr>
           <a:xfrm>
-            <a:off x="658368" y="2148840"/>
-            <a:ext cx="5282031" cy="2103120"/>
+            <a:off x="658368" y="2286000"/>
+            <a:ext cx="5282031" cy="1920240"/>
           </a:xfrm>
           <a:prstGeom prst="rect">
             <a:avLst/>
@@ -12226,8 +14910,8 @@
         </p:nvSpPr>
         <p:spPr>
           <a:xfrm>
-            <a:off x="896112" y="2350008"/>
-            <a:ext cx="4806543" cy="1700784"/>
+            <a:off x="896112" y="2487168"/>
+            <a:ext cx="4806543" cy="1517904"/>
           </a:xfrm>
           <a:prstGeom prst="rect">
             <a:avLst/>
@@ -12264,38 +14948,29 @@
           <a:p>
             <a:pPr>
               <a:lnSpc>
-                <a:spcPct val="130000"/>
+                <a:spcPct val="132000"/>
               </a:lnSpc>
               <a:spcBef>
                 <a:spcPts val="0"/>
               </a:spcBef>
               <a:spcAft>
-                <a:spcPts val="1000"/>
+                <a:spcPts val="1300"/>
               </a:spcAft>
             </a:pPr>
             <a:r>
-              <a:rPr sz="1350" b="1" i="0">
+              <a:rPr sz="1600" b="1" i="0">
                 <a:solidFill>
                   <a:srgbClr val="151A21"/>
                 </a:solidFill>
                 <a:latin typeface="Calibri"/>
               </a:rPr>
-              <a:t>A workable budget. </a:t>
-            </a:r>
-            <a:r>
-              <a:rPr sz="1350" b="0" i="0">
-                <a:solidFill>
-                  <a:srgbClr val="3C4551"/>
-                </a:solidFill>
-                <a:latin typeface="Calibri"/>
-              </a:rPr>
-              <a:t>A person reads the alarm and needs seconds to react, not 200 milliseconds.</a:t>
+              <a:t>Seconds, not milliseconds.</a:t>
             </a:r>
           </a:p>
           <a:p>
             <a:pPr>
               <a:lnSpc>
-                <a:spcPct val="130000"/>
+                <a:spcPct val="132000"/>
               </a:lnSpc>
               <a:spcBef>
                 <a:spcPts val="0"/>
@@ -12305,22 +14980,13 @@
               </a:spcAft>
             </a:pPr>
             <a:r>
-              <a:rPr sz="1350" b="1" i="0">
+              <a:rPr sz="1600" b="1" i="0">
                 <a:solidFill>
                   <a:srgbClr val="151A21"/>
                 </a:solidFill>
                 <a:latin typeface="Calibri"/>
               </a:rPr>
-              <a:t>False alarms cost more than misses. </a:t>
-            </a:r>
-            <a:r>
-              <a:rPr sz="1350" b="0" i="0">
-                <a:solidFill>
-                  <a:srgbClr val="3C4551"/>
-                </a:solidFill>
-                <a:latin typeface="Calibri"/>
-              </a:rPr>
-              <a:t>An app that cries wolf gets deleted. That sets where we sit on the curve.</a:t>
+              <a:t>False alarms cost more than misses.</a:t>
             </a:r>
           </a:p>
         </p:txBody>
@@ -12333,8 +14999,8 @@
         </p:nvSpPr>
         <p:spPr>
           <a:xfrm>
-            <a:off x="6251295" y="2148840"/>
-            <a:ext cx="5282031" cy="2103120"/>
+            <a:off x="6251295" y="2286000"/>
+            <a:ext cx="5282031" cy="1920240"/>
           </a:xfrm>
           <a:prstGeom prst="rect">
             <a:avLst/>
@@ -12377,8 +15043,8 @@
         </p:nvSpPr>
         <p:spPr>
           <a:xfrm>
-            <a:off x="6489039" y="2350008"/>
-            <a:ext cx="4806543" cy="1700784"/>
+            <a:off x="6489039" y="2487168"/>
+            <a:ext cx="4806543" cy="1517904"/>
           </a:xfrm>
           <a:prstGeom prst="rect">
             <a:avLst/>
@@ -12415,38 +15081,29 @@
           <a:p>
             <a:pPr>
               <a:lnSpc>
-                <a:spcPct val="130000"/>
+                <a:spcPct val="132000"/>
               </a:lnSpc>
               <a:spcBef>
                 <a:spcPts val="0"/>
               </a:spcBef>
               <a:spcAft>
-                <a:spcPts val="1000"/>
+                <a:spcPts val="1300"/>
               </a:spcAft>
             </a:pPr>
             <a:r>
-              <a:rPr sz="1350" b="1" i="0">
+              <a:rPr sz="1600" b="1" i="0">
                 <a:solidFill>
                   <a:srgbClr val="151A21"/>
                 </a:solidFill>
                 <a:latin typeface="Calibri"/>
               </a:rPr>
-              <a:t>Android will not hand call audio to a third-party app. </a:t>
-            </a:r>
-            <a:r>
-              <a:rPr sz="1350" b="0" i="0">
-                <a:solidFill>
-                  <a:srgbClr val="3C4551"/>
-                </a:solidFill>
-                <a:latin typeface="Calibri"/>
-              </a:rPr>
-              <a:t>VOICE_CALL has needed privileged access since Android 10. iOS is closed.</a:t>
+              <a:t>Android will not give us the call audio.</a:t>
             </a:r>
           </a:p>
           <a:p>
             <a:pPr>
               <a:lnSpc>
-                <a:spcPct val="130000"/>
+                <a:spcPct val="132000"/>
               </a:lnSpc>
               <a:spcBef>
                 <a:spcPts val="0"/>
@@ -12456,31 +15113,22 @@
               </a:spcAft>
             </a:pPr>
             <a:r>
-              <a:rPr sz="1350" b="0" i="0">
+              <a:rPr sz="1600" b="0" i="0">
                 <a:solidFill>
                   <a:srgbClr val="3C4551"/>
                 </a:solidFill>
                 <a:latin typeface="Calibri"/>
               </a:rPr>
-              <a:t>So we capture through the speaker and the microphone. That adds a room to the signal: </a:t>
-            </a:r>
-            <a:r>
-              <a:rPr sz="1350" b="1" i="0">
+              <a:t>So we capture through the room: </a:t>
+            </a:r>
+            <a:r>
+              <a:rPr sz="1600" b="1" i="0">
                 <a:solidFill>
                   <a:srgbClr val="B0392E"/>
                 </a:solidFill>
                 <a:latin typeface="Consolas"/>
               </a:rPr>
               <a:t>4.7% to 18.2%</a:t>
-            </a:r>
-            <a:r>
-              <a:rPr sz="1350" b="0" i="0">
-                <a:solidFill>
-                  <a:srgbClr val="3C4551"/>
-                </a:solidFill>
-                <a:latin typeface="Calibri"/>
-              </a:rPr>
-              <a:t> EER under replay.</a:t>
             </a:r>
           </a:p>
         </p:txBody>
@@ -12493,8 +15141,8 @@
         </p:nvSpPr>
         <p:spPr>
           <a:xfrm>
-            <a:off x="658368" y="4480560"/>
-            <a:ext cx="10874959" cy="1298448"/>
+            <a:off x="658368" y="4526280"/>
+            <a:ext cx="10874959" cy="1188720"/>
           </a:xfrm>
           <a:prstGeom prst="rect">
             <a:avLst/>
@@ -12535,8 +15183,8 @@
         </p:nvSpPr>
         <p:spPr>
           <a:xfrm>
-            <a:off x="658368" y="4480560"/>
-            <a:ext cx="32004" cy="1298448"/>
+            <a:off x="658368" y="4526280"/>
+            <a:ext cx="32004" cy="1188720"/>
           </a:xfrm>
           <a:prstGeom prst="rect">
             <a:avLst/>
@@ -12577,8 +15225,8 @@
         </p:nvSpPr>
         <p:spPr>
           <a:xfrm>
-            <a:off x="932688" y="4663440"/>
-            <a:ext cx="10344607" cy="932688"/>
+            <a:off x="932688" y="4709160"/>
+            <a:ext cx="10344607" cy="822960"/>
           </a:xfrm>
           <a:prstGeom prst="rect">
             <a:avLst/>
@@ -12631,16 +15279,7 @@
                 </a:solidFill>
                 <a:latin typeface="Calibri"/>
               </a:rPr>
-              <a:t>Re-capture is a third shift, next to corpus and channel, and it is the one a real deployment forces on us. </a:t>
-            </a:r>
-            <a:r>
-              <a:rPr sz="1400" b="1" i="0">
-                <a:solidFill>
-                  <a:srgbClr val="1A6AA8"/>
-                </a:solidFill>
-                <a:latin typeface="Calibri"/>
-              </a:rPr>
-              <a:t>It goes in the augmentation stack, not the limitations section.</a:t>
+              <a:t>Re-capture is a third shift, and it is the one a real deployment forces on us.</a:t>
             </a:r>
           </a:p>
         </p:txBody>
@@ -12971,4 +15610,324 @@
   </a:objectDefaults>
   <a:extraClrSchemeLst/>
 </a:theme>
+</file>
+
+<file path=ppt/theme/theme2.xml><?xml version="1.0" encoding="utf-8"?>
+<a:theme xmlns:a="http://schemas.openxmlformats.org/drawingml/2006/main" name="Office Theme">
+  <a:themeElements>
+    <a:clrScheme name="Office">
+      <a:dk1>
+        <a:sysClr val="windowText" lastClr="000000"/>
+      </a:dk1>
+      <a:lt1>
+        <a:sysClr val="window" lastClr="FFFFFF"/>
+      </a:lt1>
+      <a:dk2>
+        <a:srgbClr val="1F497D"/>
+      </a:dk2>
+      <a:lt2>
+        <a:srgbClr val="EEECE1"/>
+      </a:lt2>
+      <a:accent1>
+        <a:srgbClr val="4F81BD"/>
+      </a:accent1>
+      <a:accent2>
+        <a:srgbClr val="C0504D"/>
+      </a:accent2>
+      <a:accent3>
+        <a:srgbClr val="9BBB59"/>
+      </a:accent3>
+      <a:accent4>
+        <a:srgbClr val="8064A2"/>
+      </a:accent4>
+      <a:accent5>
+        <a:srgbClr val="4BACC6"/>
+      </a:accent5>
+      <a:accent6>
+        <a:srgbClr val="F79646"/>
+      </a:accent6>
+      <a:hlink>
+        <a:srgbClr val="0000FF"/>
+      </a:hlink>
+      <a:folHlink>
+        <a:srgbClr val="800080"/>
+      </a:folHlink>
+    </a:clrScheme>
+    <a:fontScheme name="Office">
+      <a:majorFont>
+        <a:latin typeface="Calibri"/>
+        <a:ea typeface=""/>
+        <a:cs typeface=""/>
+        <a:font script="Jpan" typeface="ＭＳ Ｐゴシック"/>
+        <a:font script="Hang" typeface="맑은 고딕"/>
+        <a:font script="Hans" typeface="宋体"/>
+        <a:font script="Hant" typeface="新細明體"/>
+        <a:font script="Arab" typeface="Times New Roman"/>
+        <a:font script="Hebr" typeface="Times New Roman"/>
+        <a:font script="Thai" typeface="Angsana New"/>
+        <a:font script="Ethi" typeface="Nyala"/>
+        <a:font script="Beng" typeface="Vrinda"/>
+        <a:font script="Gujr" typeface="Shruti"/>
+        <a:font script="Khmr" typeface="MoolBoran"/>
+        <a:font script="Knda" typeface="Tunga"/>
+        <a:font script="Guru" typeface="Raavi"/>
+        <a:font script="Cans" typeface="Euphemia"/>
+        <a:font script="Cher" typeface="Plantagenet Cherokee"/>
+        <a:font script="Yiii" typeface="Microsoft Yi Baiti"/>
+        <a:font script="Tibt" typeface="Microsoft Himalaya"/>
+        <a:font script="Thaa" typeface="MV Boli"/>
+        <a:font script="Deva" typeface="Mangal"/>
+        <a:font script="Telu" typeface="Gautami"/>
+        <a:font script="Taml" typeface="Latha"/>
+        <a:font script="Syrc" typeface="Estrangelo Edessa"/>
+        <a:font script="Orya" typeface="Kalinga"/>
+        <a:font script="Mlym" typeface="Kartika"/>
+        <a:font script="Laoo" typeface="DokChampa"/>
+        <a:font script="Sinh" typeface="Iskoola Pota"/>
+        <a:font script="Mong" typeface="Mongolian Baiti"/>
+        <a:font script="Viet" typeface="Times New Roman"/>
+        <a:font script="Uigh" typeface="Microsoft Uighur"/>
+        <a:font script="Geor" typeface="Sylfaen"/>
+      </a:majorFont>
+      <a:minorFont>
+        <a:latin typeface="Calibri"/>
+        <a:ea typeface=""/>
+        <a:cs typeface=""/>
+        <a:font script="Jpan" typeface="ＭＳ Ｐゴシック"/>
+        <a:font script="Hang" typeface="맑은 고딕"/>
+        <a:font script="Hans" typeface="宋体"/>
+        <a:font script="Hant" typeface="新細明體"/>
+        <a:font script="Arab" typeface="Arial"/>
+        <a:font script="Hebr" typeface="Arial"/>
+        <a:font script="Thai" typeface="Cordia New"/>
+        <a:font script="Ethi" typeface="Nyala"/>
+        <a:font script="Beng" typeface="Vrinda"/>
+        <a:font script="Gujr" typeface="Shruti"/>
+        <a:font script="Khmr" typeface="DaunPenh"/>
+        <a:font script="Knda" typeface="Tunga"/>
+        <a:font script="Guru" typeface="Raavi"/>
+        <a:font script="Cans" typeface="Euphemia"/>
+        <a:font script="Cher" typeface="Plantagenet Cherokee"/>
+        <a:font script="Yiii" typeface="Microsoft Yi Baiti"/>
+        <a:font script="Tibt" typeface="Microsoft Himalaya"/>
+        <a:font script="Thaa" typeface="MV Boli"/>
+        <a:font script="Deva" typeface="Mangal"/>
+        <a:font script="Telu" typeface="Gautami"/>
+        <a:font script="Taml" typeface="Latha"/>
+        <a:font script="Syrc" typeface="Estrangelo Edessa"/>
+        <a:font script="Orya" typeface="Kalinga"/>
+        <a:font script="Mlym" typeface="Kartika"/>
+        <a:font script="Laoo" typeface="DokChampa"/>
+        <a:font script="Sinh" typeface="Iskoola Pota"/>
+        <a:font script="Mong" typeface="Mongolian Baiti"/>
+        <a:font script="Viet" typeface="Arial"/>
+        <a:font script="Uigh" typeface="Microsoft Uighur"/>
+        <a:font script="Geor" typeface="Sylfaen"/>
+      </a:minorFont>
+    </a:fontScheme>
+    <a:fmtScheme name="Office">
+      <a:fillStyleLst>
+        <a:solidFill>
+          <a:schemeClr val="phClr"/>
+        </a:solidFill>
+        <a:gradFill rotWithShape="1">
+          <a:gsLst>
+            <a:gs pos="0">
+              <a:schemeClr val="phClr">
+                <a:tint val="50000"/>
+                <a:satMod val="300000"/>
+              </a:schemeClr>
+            </a:gs>
+            <a:gs pos="35000">
+              <a:schemeClr val="phClr">
+                <a:tint val="37000"/>
+                <a:satMod val="300000"/>
+              </a:schemeClr>
+            </a:gs>
+            <a:gs pos="100000">
+              <a:schemeClr val="phClr">
+                <a:tint val="15000"/>
+                <a:satMod val="350000"/>
+              </a:schemeClr>
+            </a:gs>
+          </a:gsLst>
+          <a:lin ang="16200000" scaled="1"/>
+        </a:gradFill>
+        <a:gradFill rotWithShape="1">
+          <a:gsLst>
+            <a:gs pos="0">
+              <a:schemeClr val="phClr">
+                <a:tint val="100000"/>
+                <a:shade val="100000"/>
+                <a:satMod val="130000"/>
+              </a:schemeClr>
+            </a:gs>
+            <a:gs pos="100000">
+              <a:schemeClr val="phClr">
+                <a:tint val="50000"/>
+                <a:shade val="100000"/>
+                <a:satMod val="350000"/>
+              </a:schemeClr>
+            </a:gs>
+          </a:gsLst>
+          <a:lin ang="16200000" scaled="0"/>
+        </a:gradFill>
+      </a:fillStyleLst>
+      <a:lnStyleLst>
+        <a:ln w="9525" cap="flat" cmpd="sng" algn="ctr">
+          <a:solidFill>
+            <a:schemeClr val="phClr">
+              <a:shade val="95000"/>
+              <a:satMod val="105000"/>
+            </a:schemeClr>
+          </a:solidFill>
+          <a:prstDash val="solid"/>
+        </a:ln>
+        <a:ln w="25400" cap="flat" cmpd="sng" algn="ctr">
+          <a:solidFill>
+            <a:schemeClr val="phClr"/>
+          </a:solidFill>
+          <a:prstDash val="solid"/>
+        </a:ln>
+        <a:ln w="38100" cap="flat" cmpd="sng" algn="ctr">
+          <a:solidFill>
+            <a:schemeClr val="phClr"/>
+          </a:solidFill>
+          <a:prstDash val="solid"/>
+        </a:ln>
+      </a:lnStyleLst>
+      <a:effectStyleLst>
+        <a:effectStyle>
+          <a:effectLst>
+            <a:outerShdw blurRad="40000" dist="20000" dir="5400000" rotWithShape="0">
+              <a:srgbClr val="000000">
+                <a:alpha val="38000"/>
+              </a:srgbClr>
+            </a:outerShdw>
+          </a:effectLst>
+        </a:effectStyle>
+        <a:effectStyle>
+          <a:effectLst>
+            <a:outerShdw blurRad="40000" dist="23000" dir="5400000" rotWithShape="0">
+              <a:srgbClr val="000000">
+                <a:alpha val="35000"/>
+              </a:srgbClr>
+            </a:outerShdw>
+          </a:effectLst>
+        </a:effectStyle>
+        <a:effectStyle>
+          <a:effectLst>
+            <a:outerShdw blurRad="40000" dist="23000" dir="5400000" rotWithShape="0">
+              <a:srgbClr val="000000">
+                <a:alpha val="35000"/>
+              </a:srgbClr>
+            </a:outerShdw>
+          </a:effectLst>
+          <a:scene3d>
+            <a:camera prst="orthographicFront">
+              <a:rot lat="0" lon="0" rev="0"/>
+            </a:camera>
+            <a:lightRig rig="threePt" dir="t">
+              <a:rot lat="0" lon="0" rev="1200000"/>
+            </a:lightRig>
+          </a:scene3d>
+          <a:sp3d>
+            <a:bevelT w="63500" h="25400"/>
+          </a:sp3d>
+        </a:effectStyle>
+      </a:effectStyleLst>
+      <a:bgFillStyleLst>
+        <a:solidFill>
+          <a:schemeClr val="phClr"/>
+        </a:solidFill>
+        <a:gradFill rotWithShape="1">
+          <a:gsLst>
+            <a:gs pos="0">
+              <a:schemeClr val="phClr">
+                <a:tint val="40000"/>
+                <a:satMod val="350000"/>
+              </a:schemeClr>
+            </a:gs>
+            <a:gs pos="40000">
+              <a:schemeClr val="phClr">
+                <a:tint val="45000"/>
+                <a:shade val="99000"/>
+                <a:satMod val="350000"/>
+              </a:schemeClr>
+            </a:gs>
+            <a:gs pos="100000">
+              <a:schemeClr val="phClr">
+                <a:shade val="20000"/>
+                <a:satMod val="255000"/>
+              </a:schemeClr>
+            </a:gs>
+          </a:gsLst>
+          <a:path path="circle">
+            <a:fillToRect l="50000" t="-80000" r="50000" b="180000"/>
+          </a:path>
+        </a:gradFill>
+        <a:gradFill rotWithShape="1">
+          <a:gsLst>
+            <a:gs pos="0">
+              <a:schemeClr val="phClr">
+                <a:tint val="80000"/>
+                <a:satMod val="300000"/>
+              </a:schemeClr>
+            </a:gs>
+            <a:gs pos="100000">
+              <a:schemeClr val="phClr">
+                <a:shade val="30000"/>
+                <a:satMod val="200000"/>
+              </a:schemeClr>
+            </a:gs>
+          </a:gsLst>
+          <a:path path="circle">
+            <a:fillToRect l="50000" t="50000" r="50000" b="50000"/>
+          </a:path>
+        </a:gradFill>
+      </a:bgFillStyleLst>
+    </a:fmtScheme>
+  </a:themeElements>
+  <a:objectDefaults>
+    <a:spDef>
+      <a:spPr/>
+      <a:bodyPr/>
+      <a:lstStyle/>
+      <a:style>
+        <a:lnRef idx="1">
+          <a:schemeClr val="accent1"/>
+        </a:lnRef>
+        <a:fillRef idx="3">
+          <a:schemeClr val="accent1"/>
+        </a:fillRef>
+        <a:effectRef idx="2">
+          <a:schemeClr val="accent1"/>
+        </a:effectRef>
+        <a:fontRef idx="minor">
+          <a:schemeClr val="lt1"/>
+        </a:fontRef>
+      </a:style>
+    </a:spDef>
+    <a:lnDef>
+      <a:spPr/>
+      <a:bodyPr/>
+      <a:lstStyle/>
+      <a:style>
+        <a:lnRef idx="2">
+          <a:schemeClr val="accent1"/>
+        </a:lnRef>
+        <a:fillRef idx="0">
+          <a:schemeClr val="accent1"/>
+        </a:fillRef>
+        <a:effectRef idx="1">
+          <a:schemeClr val="accent1"/>
+        </a:effectRef>
+        <a:fontRef idx="minor">
+          <a:schemeClr val="tx1"/>
+        </a:fontRef>
+      </a:style>
+    </a:lnDef>
+  </a:objectDefaults>
+  <a:extraClrSchemeLst/>
+</a:theme>
 </file>